--- a/DAY01_认知与案例.pptx
+++ b/DAY01_认知与案例.pptx
@@ -1913,7 +1913,7 @@
         </p:nvSpPr>
         <p:spPr>
           <a:xfrm>
-            <a:off x="457200" y="1371600"/>
+            <a:off x="457200" y="1097280"/>
             <a:ext cx="8229600" cy="1097280"/>
           </a:xfrm>
           <a:prstGeom prst="rect">
@@ -1949,7 +1949,7 @@
         </p:nvSpPr>
         <p:spPr>
           <a:xfrm>
-            <a:off x="457200" y="2560320"/>
+            <a:off x="457200" y="2286000"/>
             <a:ext cx="8229600" cy="731520"/>
           </a:xfrm>
           <a:prstGeom prst="rect">
@@ -1982,14 +1982,34 @@
       </p:sp>
       <p:sp>
         <p:nvSpPr>
-          <p:cNvPr id="4" name="Text 2"/>
-          <p:cNvSpPr/>
-          <p:nvPr/>
-        </p:nvSpPr>
-        <p:spPr>
-          <a:xfrm>
-            <a:off x="457200" y="3657600"/>
-            <a:ext cx="8229600" cy="457200"/>
+          <p:cNvPr id="4" name="Shape 2"/>
+          <p:cNvSpPr/>
+          <p:nvPr/>
+        </p:nvSpPr>
+        <p:spPr>
+          <a:xfrm>
+            <a:off x="457200" y="3291840"/>
+            <a:ext cx="8229600" cy="731520"/>
+          </a:xfrm>
+          <a:prstGeom prst="roundRect">
+            <a:avLst/>
+          </a:prstGeom>
+          <a:solidFill>
+            <a:srgbClr val="FF6B35"/>
+          </a:solidFill>
+          <a:ln/>
+        </p:spPr>
+      </p:sp>
+      <p:sp>
+        <p:nvSpPr>
+          <p:cNvPr id="5" name="Text 3"/>
+          <p:cNvSpPr/>
+          <p:nvPr/>
+        </p:nvSpPr>
+        <p:spPr>
+          <a:xfrm>
+            <a:off x="457200" y="3383280"/>
+            <a:ext cx="8229600" cy="548640"/>
           </a:xfrm>
           <a:prstGeom prst="rect">
             <a:avLst/>
@@ -2005,29 +2025,29 @@
               <a:buNone/>
             </a:pPr>
             <a:r>
-              <a:rPr lang="en-US" sz="1600" dirty="0">
-                <a:solidFill>
-                  <a:srgbClr val="E8F4F8"/>
-                </a:solidFill>
-                <a:latin typeface="Microsoft YaHei" pitchFamily="34" charset="0"/>
-                <a:ea typeface="Microsoft YaHei" pitchFamily="34" charset="-122"/>
-                <a:cs typeface="Microsoft YaHei" pitchFamily="34" charset="-120"/>
-              </a:rPr>
-              <a:t>有问题，加微信：aoxueluoluo</a:t>
-            </a:r>
-            <a:endParaRPr lang="en-US" sz="1600" dirty="0"/>
-          </a:p>
-        </p:txBody>
-      </p:sp>
-      <p:sp>
-        <p:nvSpPr>
-          <p:cNvPr id="5" name="Text 3"/>
-          <p:cNvSpPr/>
-          <p:nvPr/>
-        </p:nvSpPr>
-        <p:spPr>
-          <a:xfrm>
-            <a:off x="457200" y="4114800"/>
+              <a:rPr lang="en-US" sz="1800" b="1" dirty="0">
+                <a:solidFill>
+                  <a:srgbClr val="FFFFFF"/>
+                </a:solidFill>
+                <a:latin typeface="Microsoft YaHei" pitchFamily="34" charset="0"/>
+                <a:ea typeface="Microsoft YaHei" pitchFamily="34" charset="-122"/>
+                <a:cs typeface="Microsoft YaHei" pitchFamily="34" charset="-120"/>
+              </a:rPr>
+              <a:t>加为进围观群，加微信：aoxueluoluo</a:t>
+            </a:r>
+            <a:endParaRPr lang="en-US" sz="1800" dirty="0"/>
+          </a:p>
+        </p:txBody>
+      </p:sp>
+      <p:sp>
+        <p:nvSpPr>
+          <p:cNvPr id="6" name="Text 4"/>
+          <p:cNvSpPr/>
+          <p:nvPr/>
+        </p:nvSpPr>
+        <p:spPr>
+          <a:xfrm>
+            <a:off x="457200" y="4389120"/>
             <a:ext cx="8229600" cy="365760"/>
           </a:xfrm>
           <a:prstGeom prst="rect">

--- a/DAY01_认知与案例.pptx
+++ b/DAY01_认知与案例.pptx
@@ -2143,7 +2143,7 @@
                 <a:ea typeface="Microsoft YaHei" pitchFamily="34" charset="-122"/>
                 <a:cs typeface="Microsoft YaHei" pitchFamily="34" charset="-120"/>
               </a:rPr>
-              <a:t>为什么要讲认知篇？</a:t>
+              <a:t>三种模式的差别</a:t>
             </a:r>
             <a:endParaRPr lang="en-US" sz="3200" dirty="0"/>
           </a:p>
@@ -2151,256 +2151,612 @@
       </p:sp>
       <p:sp>
         <p:nvSpPr>
-          <p:cNvPr id="3" name="Shape 1"/>
-          <p:cNvSpPr/>
-          <p:nvPr/>
-        </p:nvSpPr>
-        <p:spPr>
-          <a:xfrm>
-            <a:off x="457200" y="1005840"/>
-            <a:ext cx="1371600" cy="54864"/>
+          <p:cNvPr id="3" name="Text 1"/>
+          <p:cNvSpPr/>
+          <p:nvPr/>
+        </p:nvSpPr>
+        <p:spPr>
+          <a:xfrm>
+            <a:off x="457200" y="914400"/>
+            <a:ext cx="8229600" cy="365760"/>
+          </a:xfrm>
+          <a:prstGeom prst="rect">
+            <a:avLst/>
+          </a:prstGeom>
+          <a:noFill/>
+          <a:ln/>
+        </p:spPr>
+        <p:txBody>
+          <a:bodyPr wrap="square" rtlCol="0" anchor="ctr"/>
+          <a:lstStyle/>
+          <a:p>
+            <a:pPr indent="0" marL="0">
+              <a:buNone/>
+            </a:pPr>
+            <a:r>
+              <a:rPr lang="en-US" sz="1600" dirty="0">
+                <a:solidFill>
+                  <a:srgbClr val="6B7280"/>
+                </a:solidFill>
+                <a:latin typeface="Microsoft YaHei" pitchFamily="34" charset="0"/>
+                <a:ea typeface="Microsoft YaHei" pitchFamily="34" charset="-122"/>
+                <a:cs typeface="Microsoft YaHei" pitchFamily="34" charset="-120"/>
+              </a:rPr>
+              <a:t>豆包 vs Claude Code vs OpenClaw</a:t>
+            </a:r>
+            <a:endParaRPr lang="en-US" sz="1600" dirty="0"/>
+          </a:p>
+        </p:txBody>
+      </p:sp>
+      <p:sp>
+        <p:nvSpPr>
+          <p:cNvPr id="4" name="Shape 2"/>
+          <p:cNvSpPr/>
+          <p:nvPr/>
+        </p:nvSpPr>
+        <p:spPr>
+          <a:xfrm>
+            <a:off x="457200" y="1371600"/>
+            <a:ext cx="2651760" cy="2560320"/>
           </a:xfrm>
           <a:prstGeom prst="rect">
             <a:avLst/>
           </a:prstGeom>
           <a:solidFill>
-            <a:srgbClr val="FF6B35"/>
+            <a:srgbClr val="FEE2E2"/>
           </a:solidFill>
           <a:ln/>
         </p:spPr>
       </p:sp>
       <p:sp>
         <p:nvSpPr>
-          <p:cNvPr id="4" name="Text 2"/>
-          <p:cNvSpPr/>
-          <p:nvPr/>
-        </p:nvSpPr>
-        <p:spPr>
-          <a:xfrm>
-            <a:off x="457200" y="1371600"/>
-            <a:ext cx="3657600" cy="457200"/>
-          </a:xfrm>
-          <a:prstGeom prst="rect">
-            <a:avLst/>
-          </a:prstGeom>
-          <a:noFill/>
-          <a:ln/>
-        </p:spPr>
-        <p:txBody>
-          <a:bodyPr wrap="square" rtlCol="0" anchor="ctr"/>
-          <a:lstStyle/>
-          <a:p>
-            <a:pPr indent="0" marL="0">
-              <a:buNone/>
-            </a:pPr>
-            <a:r>
-              <a:rPr lang="en-US" sz="1800" b="1" dirty="0">
-                <a:solidFill>
-                  <a:srgbClr val="1E2761"/>
-                </a:solidFill>
-                <a:latin typeface="Microsoft YaHei" pitchFamily="34" charset="0"/>
-                <a:ea typeface="Microsoft YaHei" pitchFamily="34" charset="-122"/>
-                <a:cs typeface="Microsoft YaHei" pitchFamily="34" charset="-120"/>
-              </a:rPr>
-              <a:t>群里小伙伴水平不一样</a:t>
-            </a:r>
-            <a:endParaRPr lang="en-US" sz="1800" dirty="0"/>
-          </a:p>
-        </p:txBody>
-      </p:sp>
-      <p:sp>
-        <p:nvSpPr>
           <p:cNvPr id="5" name="Text 3"/>
           <p:cNvSpPr/>
           <p:nvPr/>
         </p:nvSpPr>
         <p:spPr>
           <a:xfrm>
+            <a:off x="457200" y="1463040"/>
+            <a:ext cx="2651760" cy="457200"/>
+          </a:xfrm>
+          <a:prstGeom prst="rect">
+            <a:avLst/>
+          </a:prstGeom>
+          <a:noFill/>
+          <a:ln/>
+        </p:spPr>
+        <p:txBody>
+          <a:bodyPr wrap="square" rtlCol="0" anchor="ctr"/>
+          <a:lstStyle/>
+          <a:p>
+            <a:pPr algn="ctr" indent="0" marL="0">
+              <a:buNone/>
+            </a:pPr>
+            <a:r>
+              <a:rPr lang="en-US" sz="1600" b="1" dirty="0">
+                <a:solidFill>
+                  <a:srgbClr val="991B1B"/>
+                </a:solidFill>
+                <a:latin typeface="Microsoft YaHei" pitchFamily="34" charset="0"/>
+                <a:ea typeface="Microsoft YaHei" pitchFamily="34" charset="-122"/>
+                <a:cs typeface="Microsoft YaHei" pitchFamily="34" charset="-120"/>
+              </a:rPr>
+              <a:t>豆包</a:t>
+            </a:r>
+            <a:endParaRPr lang="en-US" sz="1600" dirty="0"/>
+          </a:p>
+        </p:txBody>
+      </p:sp>
+      <p:sp>
+        <p:nvSpPr>
+          <p:cNvPr id="6" name="Text 4"/>
+          <p:cNvSpPr/>
+          <p:nvPr/>
+        </p:nvSpPr>
+        <p:spPr>
+          <a:xfrm>
             <a:off x="457200" y="1828800"/>
-            <a:ext cx="4114800" cy="1371600"/>
-          </a:xfrm>
-          <a:prstGeom prst="rect">
-            <a:avLst/>
-          </a:prstGeom>
-          <a:noFill/>
-          <a:ln/>
-        </p:spPr>
-        <p:txBody>
-          <a:bodyPr wrap="square" rtlCol="0" anchor="ctr"/>
-          <a:lstStyle/>
-          <a:p>
-            <a:pPr marL="342900" indent="-342900">
-              <a:buSzPct val="100000"/>
-              <a:buChar char="•"/>
-            </a:pPr>
-            <a:r>
-              <a:rPr lang="en-US" sz="1400" dirty="0">
-                <a:solidFill>
-                  <a:srgbClr val="6B7280"/>
-                </a:solidFill>
-                <a:latin typeface="Microsoft YaHei" pitchFamily="34" charset="0"/>
-                <a:ea typeface="Microsoft YaHei" pitchFamily="34" charset="-122"/>
-                <a:cs typeface="Microsoft YaHei" pitchFamily="34" charset="-120"/>
-              </a:rPr>
-              <a:t>有些人已经用起来了</a:t>
-            </a:r>
-            <a:endParaRPr lang="en-US" sz="1400" dirty="0"/>
-          </a:p>
-          <a:p>
-            <a:pPr marL="342900" indent="-342900">
-              <a:buSzPct val="100000"/>
-              <a:buChar char="•"/>
-            </a:pPr>
-            <a:r>
-              <a:rPr lang="en-US" sz="1400" dirty="0">
-                <a:solidFill>
-                  <a:srgbClr val="6B7280"/>
-                </a:solidFill>
-                <a:latin typeface="Microsoft YaHei" pitchFamily="34" charset="0"/>
-                <a:ea typeface="Microsoft YaHei" pitchFamily="34" charset="-122"/>
-                <a:cs typeface="Microsoft YaHei" pitchFamily="34" charset="-120"/>
-              </a:rPr>
-              <a:t>有些人停留在[为什么我要用它]的阶段</a:t>
-            </a:r>
-            <a:endParaRPr lang="en-US" sz="1400" dirty="0"/>
-          </a:p>
-          <a:p>
-            <a:pPr marL="342900" indent="-342900">
-              <a:buSzPct val="100000"/>
-              <a:buChar char="•"/>
-            </a:pPr>
-            <a:r>
-              <a:rPr lang="en-US" sz="1400" dirty="0">
-                <a:solidFill>
-                  <a:srgbClr val="6B7280"/>
-                </a:solidFill>
-                <a:latin typeface="Microsoft YaHei" pitchFamily="34" charset="0"/>
-                <a:ea typeface="Microsoft YaHei" pitchFamily="34" charset="-122"/>
-                <a:cs typeface="Microsoft YaHei" pitchFamily="34" charset="-120"/>
-              </a:rPr>
-              <a:t>有些人用过豆包/ChatGPT，觉得够用了</a:t>
-            </a:r>
-            <a:endParaRPr lang="en-US" sz="1400" dirty="0"/>
-          </a:p>
-        </p:txBody>
-      </p:sp>
-      <p:sp>
-        <p:nvSpPr>
-          <p:cNvPr id="6" name="Shape 4"/>
-          <p:cNvSpPr/>
-          <p:nvPr/>
-        </p:nvSpPr>
-        <p:spPr>
-          <a:xfrm>
-            <a:off x="4846320" y="1371600"/>
-            <a:ext cx="3840480" cy="2560320"/>
+            <a:ext cx="2651760" cy="274320"/>
+          </a:xfrm>
+          <a:prstGeom prst="rect">
+            <a:avLst/>
+          </a:prstGeom>
+          <a:noFill/>
+          <a:ln/>
+        </p:spPr>
+        <p:txBody>
+          <a:bodyPr wrap="square" rtlCol="0" anchor="ctr"/>
+          <a:lstStyle/>
+          <a:p>
+            <a:pPr algn="ctr" indent="0" marL="0">
+              <a:buNone/>
+            </a:pPr>
+            <a:r>
+              <a:rPr lang="en-US" sz="1200" b="1" dirty="0">
+                <a:solidFill>
+                  <a:srgbClr val="991B1B"/>
+                </a:solidFill>
+                <a:latin typeface="Microsoft YaHei" pitchFamily="34" charset="0"/>
+                <a:ea typeface="Microsoft YaHei" pitchFamily="34" charset="-122"/>
+                <a:cs typeface="Microsoft YaHei" pitchFamily="34" charset="-120"/>
+              </a:rPr>
+              <a:t>咨询台模式</a:t>
+            </a:r>
+            <a:endParaRPr lang="en-US" sz="1200" dirty="0"/>
+          </a:p>
+        </p:txBody>
+      </p:sp>
+      <p:sp>
+        <p:nvSpPr>
+          <p:cNvPr id="7" name="Text 5"/>
+          <p:cNvSpPr/>
+          <p:nvPr/>
+        </p:nvSpPr>
+        <p:spPr>
+          <a:xfrm>
+            <a:off x="548640" y="2194560"/>
+            <a:ext cx="2468880" cy="731520"/>
+          </a:xfrm>
+          <a:prstGeom prst="rect">
+            <a:avLst/>
+          </a:prstGeom>
+          <a:noFill/>
+          <a:ln/>
+        </p:spPr>
+        <p:txBody>
+          <a:bodyPr wrap="square" rtlCol="0" anchor="ctr"/>
+          <a:lstStyle/>
+          <a:p>
+            <a:pPr algn="ctr" indent="0" marL="0">
+              <a:buNone/>
+            </a:pPr>
+            <a:r>
+              <a:rPr lang="en-US" sz="1100" dirty="0">
+                <a:solidFill>
+                  <a:srgbClr val="991B1B"/>
+                </a:solidFill>
+                <a:latin typeface="Microsoft YaHei" pitchFamily="34" charset="0"/>
+                <a:ea typeface="Microsoft YaHei" pitchFamily="34" charset="-122"/>
+                <a:cs typeface="Microsoft YaHei" pitchFamily="34" charset="-120"/>
+              </a:rPr>
+              <a:t>你问问题</a:t>
+            </a:r>
+            <a:endParaRPr lang="en-US" sz="1100" dirty="0"/>
+          </a:p>
+          <a:p>
+            <a:pPr algn="ctr" indent="0" marL="0">
+              <a:buNone/>
+            </a:pPr>
+            <a:r>
+              <a:rPr lang="en-US" sz="1100" dirty="0">
+                <a:solidFill>
+                  <a:srgbClr val="991B1B"/>
+                </a:solidFill>
+                <a:latin typeface="Microsoft YaHei" pitchFamily="34" charset="0"/>
+                <a:ea typeface="Microsoft YaHei" pitchFamily="34" charset="-122"/>
+                <a:cs typeface="Microsoft YaHei" pitchFamily="34" charset="-120"/>
+              </a:rPr>
+              <a:t>它给答案</a:t>
+            </a:r>
+            <a:endParaRPr lang="en-US" sz="1100" dirty="0"/>
+          </a:p>
+          <a:p>
+            <a:pPr algn="ctr" indent="0" marL="0">
+              <a:buNone/>
+            </a:pPr>
+            <a:r>
+              <a:rPr lang="en-US" sz="1100" dirty="0">
+                <a:solidFill>
+                  <a:srgbClr val="991B1B"/>
+                </a:solidFill>
+                <a:latin typeface="Microsoft YaHei" pitchFamily="34" charset="0"/>
+                <a:ea typeface="Microsoft YaHei" pitchFamily="34" charset="-122"/>
+                <a:cs typeface="Microsoft YaHei" pitchFamily="34" charset="-120"/>
+              </a:rPr>
+              <a:t>你再去做</a:t>
+            </a:r>
+            <a:endParaRPr lang="en-US" sz="1100" dirty="0"/>
+          </a:p>
+        </p:txBody>
+      </p:sp>
+      <p:sp>
+        <p:nvSpPr>
+          <p:cNvPr id="8" name="Shape 6"/>
+          <p:cNvSpPr/>
+          <p:nvPr/>
+        </p:nvSpPr>
+        <p:spPr>
+          <a:xfrm>
+            <a:off x="3246120" y="1371600"/>
+            <a:ext cx="2651760" cy="2560320"/>
+          </a:xfrm>
+          <a:prstGeom prst="rect">
+            <a:avLst/>
+          </a:prstGeom>
+          <a:solidFill>
+            <a:srgbClr val="FEF3C7"/>
+          </a:solidFill>
+          <a:ln/>
+        </p:spPr>
+      </p:sp>
+      <p:sp>
+        <p:nvSpPr>
+          <p:cNvPr id="9" name="Text 7"/>
+          <p:cNvSpPr/>
+          <p:nvPr/>
+        </p:nvSpPr>
+        <p:spPr>
+          <a:xfrm>
+            <a:off x="3246120" y="1463040"/>
+            <a:ext cx="2651760" cy="457200"/>
+          </a:xfrm>
+          <a:prstGeom prst="rect">
+            <a:avLst/>
+          </a:prstGeom>
+          <a:noFill/>
+          <a:ln/>
+        </p:spPr>
+        <p:txBody>
+          <a:bodyPr wrap="square" rtlCol="0" anchor="ctr"/>
+          <a:lstStyle/>
+          <a:p>
+            <a:pPr algn="ctr" indent="0" marL="0">
+              <a:buNone/>
+            </a:pPr>
+            <a:r>
+              <a:rPr lang="en-US" sz="1600" b="1" dirty="0">
+                <a:solidFill>
+                  <a:srgbClr val="92400E"/>
+                </a:solidFill>
+                <a:latin typeface="Microsoft YaHei" pitchFamily="34" charset="0"/>
+                <a:ea typeface="Microsoft YaHei" pitchFamily="34" charset="-122"/>
+                <a:cs typeface="Microsoft YaHei" pitchFamily="34" charset="-120"/>
+              </a:rPr>
+              <a:t>Claude Code</a:t>
+            </a:r>
+            <a:endParaRPr lang="en-US" sz="1600" dirty="0"/>
+          </a:p>
+        </p:txBody>
+      </p:sp>
+      <p:sp>
+        <p:nvSpPr>
+          <p:cNvPr id="10" name="Text 8"/>
+          <p:cNvSpPr/>
+          <p:nvPr/>
+        </p:nvSpPr>
+        <p:spPr>
+          <a:xfrm>
+            <a:off x="3246120" y="1828800"/>
+            <a:ext cx="2651760" cy="274320"/>
+          </a:xfrm>
+          <a:prstGeom prst="rect">
+            <a:avLst/>
+          </a:prstGeom>
+          <a:noFill/>
+          <a:ln/>
+        </p:spPr>
+        <p:txBody>
+          <a:bodyPr wrap="square" rtlCol="0" anchor="ctr"/>
+          <a:lstStyle/>
+          <a:p>
+            <a:pPr algn="ctr" indent="0" marL="0">
+              <a:buNone/>
+            </a:pPr>
+            <a:r>
+              <a:rPr lang="en-US" sz="1200" b="1" dirty="0">
+                <a:solidFill>
+                  <a:srgbClr val="92400E"/>
+                </a:solidFill>
+                <a:latin typeface="Microsoft YaHei" pitchFamily="34" charset="0"/>
+                <a:ea typeface="Microsoft YaHei" pitchFamily="34" charset="-122"/>
+                <a:cs typeface="Microsoft YaHei" pitchFamily="34" charset="-120"/>
+              </a:rPr>
+              <a:t>在家干活</a:t>
+            </a:r>
+            <a:endParaRPr lang="en-US" sz="1200" dirty="0"/>
+          </a:p>
+        </p:txBody>
+      </p:sp>
+      <p:sp>
+        <p:nvSpPr>
+          <p:cNvPr id="11" name="Text 9"/>
+          <p:cNvSpPr/>
+          <p:nvPr/>
+        </p:nvSpPr>
+        <p:spPr>
+          <a:xfrm>
+            <a:off x="3337560" y="2194560"/>
+            <a:ext cx="2468880" cy="731520"/>
+          </a:xfrm>
+          <a:prstGeom prst="rect">
+            <a:avLst/>
+          </a:prstGeom>
+          <a:noFill/>
+          <a:ln/>
+        </p:spPr>
+        <p:txBody>
+          <a:bodyPr wrap="square" rtlCol="0" anchor="ctr"/>
+          <a:lstStyle/>
+          <a:p>
+            <a:pPr algn="ctr" indent="0" marL="0">
+              <a:buNone/>
+            </a:pPr>
+            <a:r>
+              <a:rPr lang="en-US" sz="1100" dirty="0">
+                <a:solidFill>
+                  <a:srgbClr val="92400E"/>
+                </a:solidFill>
+                <a:latin typeface="Microsoft YaHei" pitchFamily="34" charset="0"/>
+                <a:ea typeface="Microsoft YaHei" pitchFamily="34" charset="-122"/>
+                <a:cs typeface="Microsoft YaHei" pitchFamily="34" charset="-120"/>
+              </a:rPr>
+              <a:t>在电脑上操作</a:t>
+            </a:r>
+            <a:endParaRPr lang="en-US" sz="1100" dirty="0"/>
+          </a:p>
+          <a:p>
+            <a:pPr algn="ctr" indent="0" marL="0">
+              <a:buNone/>
+            </a:pPr>
+            <a:r>
+              <a:rPr lang="en-US" sz="1100" dirty="0">
+                <a:solidFill>
+                  <a:srgbClr val="92400E"/>
+                </a:solidFill>
+                <a:latin typeface="Microsoft YaHei" pitchFamily="34" charset="0"/>
+                <a:ea typeface="Microsoft YaHei" pitchFamily="34" charset="-122"/>
+                <a:cs typeface="Microsoft YaHei" pitchFamily="34" charset="-120"/>
+              </a:rPr>
+              <a:t>但得盯着</a:t>
+            </a:r>
+            <a:endParaRPr lang="en-US" sz="1100" dirty="0"/>
+          </a:p>
+          <a:p>
+            <a:pPr algn="ctr" indent="0" marL="0">
+              <a:buNone/>
+            </a:pPr>
+            <a:r>
+              <a:rPr lang="en-US" sz="1100" dirty="0">
+                <a:solidFill>
+                  <a:srgbClr val="92400E"/>
+                </a:solidFill>
+                <a:latin typeface="Microsoft YaHei" pitchFamily="34" charset="0"/>
+                <a:ea typeface="Microsoft YaHei" pitchFamily="34" charset="-122"/>
+                <a:cs typeface="Microsoft YaHei" pitchFamily="34" charset="-120"/>
+              </a:rPr>
+              <a:t>你看着它干活</a:t>
+            </a:r>
+            <a:endParaRPr lang="en-US" sz="1100" dirty="0"/>
+          </a:p>
+        </p:txBody>
+      </p:sp>
+      <p:sp>
+        <p:nvSpPr>
+          <p:cNvPr id="12" name="Shape 10"/>
+          <p:cNvSpPr/>
+          <p:nvPr/>
+        </p:nvSpPr>
+        <p:spPr>
+          <a:xfrm>
+            <a:off x="6035040" y="1371600"/>
+            <a:ext cx="2651760" cy="2560320"/>
+          </a:xfrm>
+          <a:prstGeom prst="rect">
+            <a:avLst/>
+          </a:prstGeom>
+          <a:solidFill>
+            <a:srgbClr val="DCFCE7"/>
+          </a:solidFill>
+          <a:ln/>
+        </p:spPr>
+      </p:sp>
+      <p:sp>
+        <p:nvSpPr>
+          <p:cNvPr id="13" name="Text 11"/>
+          <p:cNvSpPr/>
+          <p:nvPr/>
+        </p:nvSpPr>
+        <p:spPr>
+          <a:xfrm>
+            <a:off x="6035040" y="1463040"/>
+            <a:ext cx="2651760" cy="457200"/>
+          </a:xfrm>
+          <a:prstGeom prst="rect">
+            <a:avLst/>
+          </a:prstGeom>
+          <a:noFill/>
+          <a:ln/>
+        </p:spPr>
+        <p:txBody>
+          <a:bodyPr wrap="square" rtlCol="0" anchor="ctr"/>
+          <a:lstStyle/>
+          <a:p>
+            <a:pPr algn="ctr" indent="0" marL="0">
+              <a:buNone/>
+            </a:pPr>
+            <a:r>
+              <a:rPr lang="en-US" sz="1600" b="1" dirty="0">
+                <a:solidFill>
+                  <a:srgbClr val="166534"/>
+                </a:solidFill>
+                <a:latin typeface="Microsoft YaHei" pitchFamily="34" charset="0"/>
+                <a:ea typeface="Microsoft YaHei" pitchFamily="34" charset="-122"/>
+                <a:cs typeface="Microsoft YaHei" pitchFamily="34" charset="-120"/>
+              </a:rPr>
+              <a:t>OpenClaw 🦞</a:t>
+            </a:r>
+            <a:endParaRPr lang="en-US" sz="1600" dirty="0"/>
+          </a:p>
+        </p:txBody>
+      </p:sp>
+      <p:sp>
+        <p:nvSpPr>
+          <p:cNvPr id="14" name="Text 12"/>
+          <p:cNvSpPr/>
+          <p:nvPr/>
+        </p:nvSpPr>
+        <p:spPr>
+          <a:xfrm>
+            <a:off x="6035040" y="1828800"/>
+            <a:ext cx="2651760" cy="274320"/>
+          </a:xfrm>
+          <a:prstGeom prst="rect">
+            <a:avLst/>
+          </a:prstGeom>
+          <a:noFill/>
+          <a:ln/>
+        </p:spPr>
+        <p:txBody>
+          <a:bodyPr wrap="square" rtlCol="0" anchor="ctr"/>
+          <a:lstStyle/>
+          <a:p>
+            <a:pPr algn="ctr" indent="0" marL="0">
+              <a:buNone/>
+            </a:pPr>
+            <a:r>
+              <a:rPr lang="en-US" sz="1200" b="1" dirty="0">
+                <a:solidFill>
+                  <a:srgbClr val="166534"/>
+                </a:solidFill>
+                <a:latin typeface="Microsoft YaHei" pitchFamily="34" charset="0"/>
+                <a:ea typeface="Microsoft YaHei" pitchFamily="34" charset="-122"/>
+                <a:cs typeface="Microsoft YaHei" pitchFamily="34" charset="-120"/>
+              </a:rPr>
+              <a:t>Channel通道</a:t>
+            </a:r>
+            <a:endParaRPr lang="en-US" sz="1200" dirty="0"/>
+          </a:p>
+        </p:txBody>
+      </p:sp>
+      <p:sp>
+        <p:nvSpPr>
+          <p:cNvPr id="15" name="Text 13"/>
+          <p:cNvSpPr/>
+          <p:nvPr/>
+        </p:nvSpPr>
+        <p:spPr>
+          <a:xfrm>
+            <a:off x="6126480" y="2194560"/>
+            <a:ext cx="2468880" cy="731520"/>
+          </a:xfrm>
+          <a:prstGeom prst="rect">
+            <a:avLst/>
+          </a:prstGeom>
+          <a:noFill/>
+          <a:ln/>
+        </p:spPr>
+        <p:txBody>
+          <a:bodyPr wrap="square" rtlCol="0" anchor="ctr"/>
+          <a:lstStyle/>
+          <a:p>
+            <a:pPr algn="ctr" indent="0" marL="0">
+              <a:buNone/>
+            </a:pPr>
+            <a:r>
+              <a:rPr lang="en-US" sz="1100" dirty="0">
+                <a:solidFill>
+                  <a:srgbClr val="166534"/>
+                </a:solidFill>
+                <a:latin typeface="Microsoft YaHei" pitchFamily="34" charset="0"/>
+                <a:ea typeface="Microsoft YaHei" pitchFamily="34" charset="-122"/>
+                <a:cs typeface="Microsoft YaHei" pitchFamily="34" charset="-120"/>
+              </a:rPr>
+              <a:t>你让它干就行</a:t>
+            </a:r>
+            <a:endParaRPr lang="en-US" sz="1100" dirty="0"/>
+          </a:p>
+          <a:p>
+            <a:pPr algn="ctr" indent="0" marL="0">
+              <a:buNone/>
+            </a:pPr>
+            <a:r>
+              <a:rPr lang="en-US" sz="1100" dirty="0">
+                <a:solidFill>
+                  <a:srgbClr val="166534"/>
+                </a:solidFill>
+                <a:latin typeface="Microsoft YaHei" pitchFamily="34" charset="0"/>
+                <a:ea typeface="Microsoft YaHei" pitchFamily="34" charset="-122"/>
+                <a:cs typeface="Microsoft YaHei" pitchFamily="34" charset="-120"/>
+              </a:rPr>
+              <a:t>可以去旅游</a:t>
+            </a:r>
+            <a:endParaRPr lang="en-US" sz="1100" dirty="0"/>
+          </a:p>
+          <a:p>
+            <a:pPr algn="ctr" indent="0" marL="0">
+              <a:buNone/>
+            </a:pPr>
+            <a:r>
+              <a:rPr lang="en-US" sz="1100" dirty="0">
+                <a:solidFill>
+                  <a:srgbClr val="166534"/>
+                </a:solidFill>
+                <a:latin typeface="Microsoft YaHei" pitchFamily="34" charset="0"/>
+                <a:ea typeface="Microsoft YaHei" pitchFamily="34" charset="-122"/>
+                <a:cs typeface="Microsoft YaHei" pitchFamily="34" charset="-120"/>
+              </a:rPr>
+              <a:t>动嘴就办事</a:t>
+            </a:r>
+            <a:endParaRPr lang="en-US" sz="1100" dirty="0"/>
+          </a:p>
+        </p:txBody>
+      </p:sp>
+      <p:sp>
+        <p:nvSpPr>
+          <p:cNvPr id="16" name="Shape 14"/>
+          <p:cNvSpPr/>
+          <p:nvPr/>
+        </p:nvSpPr>
+        <p:spPr>
+          <a:xfrm>
+            <a:off x="457200" y="4206240"/>
+            <a:ext cx="8229600" cy="640080"/>
           </a:xfrm>
           <a:prstGeom prst="roundRect">
             <a:avLst/>
           </a:prstGeom>
           <a:solidFill>
-            <a:srgbClr val="E8F4F8"/>
+            <a:srgbClr val="1E3A5F"/>
           </a:solidFill>
-          <a:ln w="25400">
-            <a:solidFill>
-              <a:srgbClr val="3D7EAA"/>
-            </a:solidFill>
-            <a:prstDash val="solid"/>
-          </a:ln>
-        </p:spPr>
-      </p:sp>
-      <p:sp>
-        <p:nvSpPr>
-          <p:cNvPr id="7" name="Text 5"/>
-          <p:cNvSpPr/>
-          <p:nvPr/>
-        </p:nvSpPr>
-        <p:spPr>
-          <a:xfrm>
-            <a:off x="5029200" y="1554480"/>
-            <a:ext cx="3474720" cy="365760"/>
-          </a:xfrm>
-          <a:prstGeom prst="rect">
-            <a:avLst/>
-          </a:prstGeom>
-          <a:noFill/>
-          <a:ln/>
-        </p:spPr>
-        <p:txBody>
-          <a:bodyPr wrap="square" rtlCol="0" anchor="ctr"/>
-          <a:lstStyle/>
-          <a:p>
-            <a:pPr indent="0" marL="0">
+          <a:ln/>
+        </p:spPr>
+      </p:sp>
+      <p:sp>
+        <p:nvSpPr>
+          <p:cNvPr id="17" name="Text 15"/>
+          <p:cNvSpPr/>
+          <p:nvPr/>
+        </p:nvSpPr>
+        <p:spPr>
+          <a:xfrm>
+            <a:off x="457200" y="4297680"/>
+            <a:ext cx="8229600" cy="457200"/>
+          </a:xfrm>
+          <a:prstGeom prst="rect">
+            <a:avLst/>
+          </a:prstGeom>
+          <a:noFill/>
+          <a:ln/>
+        </p:spPr>
+        <p:txBody>
+          <a:bodyPr wrap="square" rtlCol="0" anchor="ctr"/>
+          <a:lstStyle/>
+          <a:p>
+            <a:pPr algn="ctr" indent="0" marL="0">
               <a:buNone/>
             </a:pPr>
             <a:r>
               <a:rPr lang="en-US" sz="1600" b="1" dirty="0">
                 <a:solidFill>
-                  <a:srgbClr val="1E3A5F"/>
-                </a:solidFill>
-                <a:latin typeface="Microsoft YaHei" pitchFamily="34" charset="0"/>
-                <a:ea typeface="Microsoft YaHei" pitchFamily="34" charset="-122"/>
-                <a:cs typeface="Microsoft YaHei" pitchFamily="34" charset="-120"/>
-              </a:rPr>
-              <a:t>核心问题</a:t>
+                  <a:srgbClr val="FFFFFF"/>
+                </a:solidFill>
+                <a:latin typeface="Microsoft YaHei" pitchFamily="34" charset="0"/>
+                <a:ea typeface="Microsoft YaHei" pitchFamily="34" charset="-122"/>
+                <a:cs typeface="Microsoft YaHei" pitchFamily="34" charset="-120"/>
+              </a:rPr>
+              <a:t>Channel（通道）才是杀手锏！</a:t>
             </a:r>
             <a:endParaRPr lang="en-US" sz="1600" dirty="0"/>
-          </a:p>
-        </p:txBody>
-      </p:sp>
-      <p:sp>
-        <p:nvSpPr>
-          <p:cNvPr id="8" name="Text 6"/>
-          <p:cNvSpPr/>
-          <p:nvPr/>
-        </p:nvSpPr>
-        <p:spPr>
-          <a:xfrm>
-            <a:off x="5029200" y="2011680"/>
-            <a:ext cx="3474720" cy="731520"/>
-          </a:xfrm>
-          <a:prstGeom prst="rect">
-            <a:avLst/>
-          </a:prstGeom>
-          <a:noFill/>
-          <a:ln/>
-        </p:spPr>
-        <p:txBody>
-          <a:bodyPr wrap="square" rtlCol="0" anchor="ctr"/>
-          <a:lstStyle/>
-          <a:p>
-            <a:pPr indent="0" marL="0">
-              <a:buNone/>
-            </a:pPr>
-            <a:r>
-              <a:rPr lang="en-US" sz="2000" b="1" dirty="0">
-                <a:solidFill>
-                  <a:srgbClr val="FF6B35"/>
-                </a:solidFill>
-                <a:latin typeface="Microsoft YaHei" pitchFamily="34" charset="0"/>
-                <a:ea typeface="Microsoft YaHei" pitchFamily="34" charset="-122"/>
-                <a:cs typeface="Microsoft YaHei" pitchFamily="34" charset="-120"/>
-              </a:rPr>
-              <a:t>为什么还要用</a:t>
-            </a:r>
-            <a:endParaRPr lang="en-US" sz="2000" dirty="0"/>
-          </a:p>
-          <a:p>
-            <a:pPr indent="0" marL="0">
-              <a:buNone/>
-            </a:pPr>
-            <a:r>
-              <a:rPr lang="en-US" sz="2000" b="1" dirty="0">
-                <a:solidFill>
-                  <a:srgbClr val="FF6B35"/>
-                </a:solidFill>
-                <a:latin typeface="Microsoft YaHei" pitchFamily="34" charset="0"/>
-                <a:ea typeface="Microsoft YaHei" pitchFamily="34" charset="-122"/>
-                <a:cs typeface="Microsoft YaHei" pitchFamily="34" charset="-120"/>
-              </a:rPr>
-              <a:t>OpenClaw？</a:t>
-            </a:r>
-            <a:endParaRPr lang="en-US" sz="2000" dirty="0"/>
           </a:p>
         </p:txBody>
       </p:sp>
@@ -2461,7 +2817,7 @@
               <a:buNone/>
             </a:pPr>
             <a:r>
-              <a:rPr lang="en-US" sz="2800" b="1" dirty="0">
+              <a:rPr lang="en-US" sz="3200" b="1" dirty="0">
                 <a:solidFill>
                   <a:srgbClr val="1E3A5F"/>
                 </a:solidFill>
@@ -2469,9 +2825,9 @@
                 <a:ea typeface="Microsoft YaHei" pitchFamily="34" charset="-122"/>
                 <a:cs typeface="Microsoft YaHei" pitchFamily="34" charset="-120"/>
               </a:rPr>
-              <a:t>认知跃迁：从咨询台到请到家里</a:t>
-            </a:r>
-            <a:endParaRPr lang="en-US" sz="2800" dirty="0"/>
+              <a:t>比喻一下</a:t>
+            </a:r>
+            <a:endParaRPr lang="en-US" sz="3200" dirty="0"/>
           </a:p>
         </p:txBody>
       </p:sp>
@@ -2484,9 +2840,9 @@
         <p:spPr>
           <a:xfrm>
             <a:off x="457200" y="1188720"/>
-            <a:ext cx="3840480" cy="2286000"/>
-          </a:xfrm>
-          <a:prstGeom prst="rect">
+            <a:ext cx="8229600" cy="822960"/>
+          </a:xfrm>
+          <a:prstGeom prst="roundRect">
             <a:avLst/>
           </a:prstGeom>
           <a:solidFill>
@@ -2503,34 +2859,34 @@
         </p:nvSpPr>
         <p:spPr>
           <a:xfrm>
-            <a:off x="457200" y="1280160"/>
-            <a:ext cx="3840480" cy="457200"/>
-          </a:xfrm>
-          <a:prstGeom prst="rect">
-            <a:avLst/>
-          </a:prstGeom>
-          <a:noFill/>
-          <a:ln/>
-        </p:spPr>
-        <p:txBody>
-          <a:bodyPr wrap="square" rtlCol="0" anchor="ctr"/>
-          <a:lstStyle/>
-          <a:p>
-            <a:pPr algn="ctr" indent="0" marL="0">
-              <a:buNone/>
-            </a:pPr>
-            <a:r>
-              <a:rPr lang="en-US" sz="1800" b="1" dirty="0">
-                <a:solidFill>
-                  <a:srgbClr val="991B1B"/>
-                </a:solidFill>
-                <a:latin typeface="Microsoft YaHei" pitchFamily="34" charset="0"/>
-                <a:ea typeface="Microsoft YaHei" pitchFamily="34" charset="-122"/>
-                <a:cs typeface="Microsoft YaHei" pitchFamily="34" charset="-120"/>
-              </a:rPr>
-              <a:t>豆包/传统AI</a:t>
-            </a:r>
-            <a:endParaRPr lang="en-US" sz="1800" dirty="0"/>
+            <a:off x="640080" y="1280160"/>
+            <a:ext cx="1828800" cy="320040"/>
+          </a:xfrm>
+          <a:prstGeom prst="rect">
+            <a:avLst/>
+          </a:prstGeom>
+          <a:noFill/>
+          <a:ln/>
+        </p:spPr>
+        <p:txBody>
+          <a:bodyPr wrap="square" rtlCol="0" anchor="ctr"/>
+          <a:lstStyle/>
+          <a:p>
+            <a:pPr indent="0" marL="0">
+              <a:buNone/>
+            </a:pPr>
+            <a:r>
+              <a:rPr lang="en-US" sz="1400" b="1" dirty="0">
+                <a:solidFill>
+                  <a:srgbClr val="1E2761"/>
+                </a:solidFill>
+                <a:latin typeface="Microsoft YaHei" pitchFamily="34" charset="0"/>
+                <a:ea typeface="Microsoft YaHei" pitchFamily="34" charset="-122"/>
+                <a:cs typeface="Microsoft YaHei" pitchFamily="34" charset="-120"/>
+              </a:rPr>
+              <a:t>🤔 豆包</a:t>
+            </a:r>
+            <a:endParaRPr lang="en-US" sz="1400" dirty="0"/>
           </a:p>
         </p:txBody>
       </p:sp>
@@ -2542,34 +2898,34 @@
         </p:nvSpPr>
         <p:spPr>
           <a:xfrm>
-            <a:off x="640080" y="1737360"/>
-            <a:ext cx="3474720" cy="365760"/>
-          </a:xfrm>
-          <a:prstGeom prst="rect">
-            <a:avLst/>
-          </a:prstGeom>
-          <a:noFill/>
-          <a:ln/>
-        </p:spPr>
-        <p:txBody>
-          <a:bodyPr wrap="square" rtlCol="0" anchor="ctr"/>
-          <a:lstStyle/>
-          <a:p>
-            <a:pPr indent="0" marL="0">
-              <a:buNone/>
-            </a:pPr>
-            <a:r>
-              <a:rPr lang="en-US" sz="2000" b="1" dirty="0">
-                <a:solidFill>
-                  <a:srgbClr val="991B1B"/>
-                </a:solidFill>
-                <a:latin typeface="Microsoft YaHei" pitchFamily="34" charset="0"/>
-                <a:ea typeface="Microsoft YaHei" pitchFamily="34" charset="-122"/>
-                <a:cs typeface="Microsoft YaHei" pitchFamily="34" charset="-120"/>
-              </a:rPr>
-              <a:t>咨询台模式</a:t>
-            </a:r>
-            <a:endParaRPr lang="en-US" sz="2000" dirty="0"/>
+            <a:off x="2468880" y="1280160"/>
+            <a:ext cx="1828800" cy="320040"/>
+          </a:xfrm>
+          <a:prstGeom prst="rect">
+            <a:avLst/>
+          </a:prstGeom>
+          <a:noFill/>
+          <a:ln/>
+        </p:spPr>
+        <p:txBody>
+          <a:bodyPr wrap="square" rtlCol="0" anchor="ctr"/>
+          <a:lstStyle/>
+          <a:p>
+            <a:pPr indent="0" marL="0">
+              <a:buNone/>
+            </a:pPr>
+            <a:r>
+              <a:rPr lang="en-US" sz="1400" b="1" dirty="0">
+                <a:solidFill>
+                  <a:srgbClr val="1E3A5F"/>
+                </a:solidFill>
+                <a:latin typeface="Microsoft YaHei" pitchFamily="34" charset="0"/>
+                <a:ea typeface="Microsoft YaHei" pitchFamily="34" charset="-122"/>
+                <a:cs typeface="Microsoft YaHei" pitchFamily="34" charset="-120"/>
+              </a:rPr>
+              <a:t>像去咨询台</a:t>
+            </a:r>
+            <a:endParaRPr lang="en-US" sz="1400" dirty="0"/>
           </a:p>
         </p:txBody>
       </p:sp>
@@ -2581,86 +2937,186 @@
         </p:nvSpPr>
         <p:spPr>
           <a:xfrm>
-            <a:off x="640080" y="2194560"/>
-            <a:ext cx="3474720" cy="1097280"/>
-          </a:xfrm>
-          <a:prstGeom prst="rect">
-            <a:avLst/>
-          </a:prstGeom>
-          <a:noFill/>
-          <a:ln/>
-        </p:spPr>
-        <p:txBody>
-          <a:bodyPr wrap="square" rtlCol="0" anchor="ctr"/>
-          <a:lstStyle/>
-          <a:p>
-            <a:pPr marL="342900" indent="-342900">
-              <a:buSzPct val="100000"/>
-              <a:buChar char="•"/>
+            <a:off x="4297680" y="1280160"/>
+            <a:ext cx="4114800" cy="640080"/>
+          </a:xfrm>
+          <a:prstGeom prst="rect">
+            <a:avLst/>
+          </a:prstGeom>
+          <a:noFill/>
+          <a:ln/>
+        </p:spPr>
+        <p:txBody>
+          <a:bodyPr wrap="square" rtlCol="0" anchor="ctr"/>
+          <a:lstStyle/>
+          <a:p>
+            <a:pPr indent="0" marL="0">
+              <a:buNone/>
             </a:pPr>
             <a:r>
               <a:rPr lang="en-US" sz="1300" dirty="0">
                 <a:solidFill>
-                  <a:srgbClr val="991B1B"/>
-                </a:solidFill>
-                <a:latin typeface="Microsoft YaHei" pitchFamily="34" charset="0"/>
-                <a:ea typeface="Microsoft YaHei" pitchFamily="34" charset="-122"/>
-                <a:cs typeface="Microsoft YaHei" pitchFamily="34" charset="-120"/>
-              </a:rPr>
-              <a:t>每天跑到别人家门口问问题</a:t>
+                  <a:srgbClr val="1E2761"/>
+                </a:solidFill>
+                <a:latin typeface="Microsoft YaHei" pitchFamily="34" charset="0"/>
+                <a:ea typeface="Microsoft YaHei" pitchFamily="34" charset="-122"/>
+                <a:cs typeface="Microsoft YaHei" pitchFamily="34" charset="-120"/>
+              </a:rPr>
+              <a:t>你问问题，它给答案，你再去做</a:t>
             </a:r>
             <a:endParaRPr lang="en-US" sz="1300" dirty="0"/>
           </a:p>
-          <a:p>
-            <a:pPr marL="342900" indent="-342900">
-              <a:buSzPct val="100000"/>
-              <a:buChar char="•"/>
+        </p:txBody>
+      </p:sp>
+      <p:sp>
+        <p:nvSpPr>
+          <p:cNvPr id="7" name="Shape 5"/>
+          <p:cNvSpPr/>
+          <p:nvPr/>
+        </p:nvSpPr>
+        <p:spPr>
+          <a:xfrm>
+            <a:off x="457200" y="2194560"/>
+            <a:ext cx="8229600" cy="822960"/>
+          </a:xfrm>
+          <a:prstGeom prst="roundRect">
+            <a:avLst/>
+          </a:prstGeom>
+          <a:solidFill>
+            <a:srgbClr val="FEF3C7"/>
+          </a:solidFill>
+          <a:ln/>
+        </p:spPr>
+      </p:sp>
+      <p:sp>
+        <p:nvSpPr>
+          <p:cNvPr id="8" name="Text 6"/>
+          <p:cNvSpPr/>
+          <p:nvPr/>
+        </p:nvSpPr>
+        <p:spPr>
+          <a:xfrm>
+            <a:off x="640080" y="2286000"/>
+            <a:ext cx="1828800" cy="320040"/>
+          </a:xfrm>
+          <a:prstGeom prst="rect">
+            <a:avLst/>
+          </a:prstGeom>
+          <a:noFill/>
+          <a:ln/>
+        </p:spPr>
+        <p:txBody>
+          <a:bodyPr wrap="square" rtlCol="0" anchor="ctr"/>
+          <a:lstStyle/>
+          <a:p>
+            <a:pPr indent="0" marL="0">
+              <a:buNone/>
+            </a:pPr>
+            <a:r>
+              <a:rPr lang="en-US" sz="1400" b="1" dirty="0">
+                <a:solidFill>
+                  <a:srgbClr val="1E2761"/>
+                </a:solidFill>
+                <a:latin typeface="Microsoft YaHei" pitchFamily="34" charset="0"/>
+                <a:ea typeface="Microsoft YaHei" pitchFamily="34" charset="-122"/>
+                <a:cs typeface="Microsoft YaHei" pitchFamily="34" charset="-120"/>
+              </a:rPr>
+              <a:t>💻 Claude Code</a:t>
+            </a:r>
+            <a:endParaRPr lang="en-US" sz="1400" dirty="0"/>
+          </a:p>
+        </p:txBody>
+      </p:sp>
+      <p:sp>
+        <p:nvSpPr>
+          <p:cNvPr id="9" name="Text 7"/>
+          <p:cNvSpPr/>
+          <p:nvPr/>
+        </p:nvSpPr>
+        <p:spPr>
+          <a:xfrm>
+            <a:off x="2468880" y="2286000"/>
+            <a:ext cx="1828800" cy="320040"/>
+          </a:xfrm>
+          <a:prstGeom prst="rect">
+            <a:avLst/>
+          </a:prstGeom>
+          <a:noFill/>
+          <a:ln/>
+        </p:spPr>
+        <p:txBody>
+          <a:bodyPr wrap="square" rtlCol="0" anchor="ctr"/>
+          <a:lstStyle/>
+          <a:p>
+            <a:pPr indent="0" marL="0">
+              <a:buNone/>
+            </a:pPr>
+            <a:r>
+              <a:rPr lang="en-US" sz="1400" b="1" dirty="0">
+                <a:solidFill>
+                  <a:srgbClr val="1E3A5F"/>
+                </a:solidFill>
+                <a:latin typeface="Microsoft YaHei" pitchFamily="34" charset="0"/>
+                <a:ea typeface="Microsoft YaHei" pitchFamily="34" charset="-122"/>
+                <a:cs typeface="Microsoft YaHei" pitchFamily="34" charset="-120"/>
+              </a:rPr>
+              <a:t>像请了个保姆</a:t>
+            </a:r>
+            <a:endParaRPr lang="en-US" sz="1400" dirty="0"/>
+          </a:p>
+        </p:txBody>
+      </p:sp>
+      <p:sp>
+        <p:nvSpPr>
+          <p:cNvPr id="10" name="Text 8"/>
+          <p:cNvSpPr/>
+          <p:nvPr/>
+        </p:nvSpPr>
+        <p:spPr>
+          <a:xfrm>
+            <a:off x="4297680" y="2286000"/>
+            <a:ext cx="4114800" cy="640080"/>
+          </a:xfrm>
+          <a:prstGeom prst="rect">
+            <a:avLst/>
+          </a:prstGeom>
+          <a:noFill/>
+          <a:ln/>
+        </p:spPr>
+        <p:txBody>
+          <a:bodyPr wrap="square" rtlCol="0" anchor="ctr"/>
+          <a:lstStyle/>
+          <a:p>
+            <a:pPr indent="0" marL="0">
+              <a:buNone/>
             </a:pPr>
             <a:r>
               <a:rPr lang="en-US" sz="1300" dirty="0">
                 <a:solidFill>
-                  <a:srgbClr val="991B1B"/>
-                </a:solidFill>
-                <a:latin typeface="Microsoft YaHei" pitchFamily="34" charset="0"/>
-                <a:ea typeface="Microsoft YaHei" pitchFamily="34" charset="-122"/>
-                <a:cs typeface="Microsoft YaHei" pitchFamily="34" charset="-120"/>
-              </a:rPr>
-              <a:t>你接收信息，再去操作</a:t>
+                  <a:srgbClr val="1E2761"/>
+                </a:solidFill>
+                <a:latin typeface="Microsoft YaHei" pitchFamily="34" charset="0"/>
+                <a:ea typeface="Microsoft YaHei" pitchFamily="34" charset="-122"/>
+                <a:cs typeface="Microsoft YaHei" pitchFamily="34" charset="-120"/>
+              </a:rPr>
+              <a:t>在家干活，但你得盯着</a:t>
             </a:r>
             <a:endParaRPr lang="en-US" sz="1300" dirty="0"/>
           </a:p>
-          <a:p>
-            <a:pPr marL="342900" indent="-342900">
-              <a:buSzPct val="100000"/>
-              <a:buChar char="•"/>
-            </a:pPr>
-            <a:r>
-              <a:rPr lang="en-US" sz="1300" dirty="0">
-                <a:solidFill>
-                  <a:srgbClr val="991B1B"/>
-                </a:solidFill>
-                <a:latin typeface="Microsoft YaHei" pitchFamily="34" charset="0"/>
-                <a:ea typeface="Microsoft YaHei" pitchFamily="34" charset="-122"/>
-                <a:cs typeface="Microsoft YaHei" pitchFamily="34" charset="-120"/>
-              </a:rPr>
-              <a:t>你动手，AI动嘴</a:t>
-            </a:r>
-            <a:endParaRPr lang="en-US" sz="1300" dirty="0"/>
-          </a:p>
-        </p:txBody>
-      </p:sp>
-      <p:sp>
-        <p:nvSpPr>
-          <p:cNvPr id="7" name="Shape 5"/>
-          <p:cNvSpPr/>
-          <p:nvPr/>
-        </p:nvSpPr>
-        <p:spPr>
-          <a:xfrm>
-            <a:off x="4846320" y="1188720"/>
-            <a:ext cx="3840480" cy="2286000"/>
-          </a:xfrm>
-          <a:prstGeom prst="rect">
+        </p:txBody>
+      </p:sp>
+      <p:sp>
+        <p:nvSpPr>
+          <p:cNvPr id="11" name="Shape 9"/>
+          <p:cNvSpPr/>
+          <p:nvPr/>
+        </p:nvSpPr>
+        <p:spPr>
+          <a:xfrm>
+            <a:off x="457200" y="3200400"/>
+            <a:ext cx="8229600" cy="822960"/>
+          </a:xfrm>
+          <a:prstGeom prst="roundRect">
             <a:avLst/>
           </a:prstGeom>
           <a:solidFill>
@@ -2671,214 +3127,393 @@
       </p:sp>
       <p:sp>
         <p:nvSpPr>
-          <p:cNvPr id="8" name="Text 6"/>
-          <p:cNvSpPr/>
-          <p:nvPr/>
-        </p:nvSpPr>
-        <p:spPr>
-          <a:xfrm>
-            <a:off x="4846320" y="1280160"/>
-            <a:ext cx="3840480" cy="457200"/>
-          </a:xfrm>
-          <a:prstGeom prst="rect">
-            <a:avLst/>
-          </a:prstGeom>
-          <a:noFill/>
-          <a:ln/>
-        </p:spPr>
-        <p:txBody>
-          <a:bodyPr wrap="square" rtlCol="0" anchor="ctr"/>
-          <a:lstStyle/>
-          <a:p>
-            <a:pPr algn="ctr" indent="0" marL="0">
-              <a:buNone/>
-            </a:pPr>
-            <a:r>
-              <a:rPr lang="en-US" sz="1800" b="1" dirty="0">
-                <a:solidFill>
-                  <a:srgbClr val="166534"/>
-                </a:solidFill>
-                <a:latin typeface="Microsoft YaHei" pitchFamily="34" charset="0"/>
-                <a:ea typeface="Microsoft YaHei" pitchFamily="34" charset="-122"/>
-                <a:cs typeface="Microsoft YaHei" pitchFamily="34" charset="-120"/>
-              </a:rPr>
-              <a:t>OpenClaw 🦞</a:t>
-            </a:r>
-            <a:endParaRPr lang="en-US" sz="1800" dirty="0"/>
-          </a:p>
-        </p:txBody>
-      </p:sp>
-      <p:sp>
-        <p:nvSpPr>
-          <p:cNvPr id="9" name="Text 7"/>
-          <p:cNvSpPr/>
-          <p:nvPr/>
-        </p:nvSpPr>
-        <p:spPr>
-          <a:xfrm>
-            <a:off x="5029200" y="1737360"/>
-            <a:ext cx="3474720" cy="365760"/>
-          </a:xfrm>
-          <a:prstGeom prst="rect">
-            <a:avLst/>
-          </a:prstGeom>
-          <a:noFill/>
-          <a:ln/>
-        </p:spPr>
-        <p:txBody>
-          <a:bodyPr wrap="square" rtlCol="0" anchor="ctr"/>
-          <a:lstStyle/>
-          <a:p>
-            <a:pPr indent="0" marL="0">
-              <a:buNone/>
-            </a:pPr>
-            <a:r>
-              <a:rPr lang="en-US" sz="2000" b="1" dirty="0">
-                <a:solidFill>
-                  <a:srgbClr val="166534"/>
-                </a:solidFill>
-                <a:latin typeface="Microsoft YaHei" pitchFamily="34" charset="0"/>
-                <a:ea typeface="Microsoft YaHei" pitchFamily="34" charset="-122"/>
-                <a:cs typeface="Microsoft YaHei" pitchFamily="34" charset="-120"/>
-              </a:rPr>
-              <a:t>请到家里</a:t>
-            </a:r>
-            <a:endParaRPr lang="en-US" sz="2000" dirty="0"/>
-          </a:p>
-        </p:txBody>
-      </p:sp>
-      <p:sp>
-        <p:nvSpPr>
-          <p:cNvPr id="10" name="Text 8"/>
-          <p:cNvSpPr/>
-          <p:nvPr/>
-        </p:nvSpPr>
-        <p:spPr>
-          <a:xfrm>
-            <a:off x="5029200" y="2194560"/>
-            <a:ext cx="3474720" cy="1097280"/>
-          </a:xfrm>
-          <a:prstGeom prst="rect">
-            <a:avLst/>
-          </a:prstGeom>
-          <a:noFill/>
-          <a:ln/>
-        </p:spPr>
-        <p:txBody>
-          <a:bodyPr wrap="square" rtlCol="0" anchor="ctr"/>
-          <a:lstStyle/>
-          <a:p>
-            <a:pPr marL="342900" indent="-342900">
-              <a:buSzPct val="100000"/>
-              <a:buChar char="•"/>
+          <p:cNvPr id="12" name="Text 10"/>
+          <p:cNvSpPr/>
+          <p:nvPr/>
+        </p:nvSpPr>
+        <p:spPr>
+          <a:xfrm>
+            <a:off x="640080" y="3291840"/>
+            <a:ext cx="1828800" cy="320040"/>
+          </a:xfrm>
+          <a:prstGeom prst="rect">
+            <a:avLst/>
+          </a:prstGeom>
+          <a:noFill/>
+          <a:ln/>
+        </p:spPr>
+        <p:txBody>
+          <a:bodyPr wrap="square" rtlCol="0" anchor="ctr"/>
+          <a:lstStyle/>
+          <a:p>
+            <a:pPr indent="0" marL="0">
+              <a:buNone/>
+            </a:pPr>
+            <a:r>
+              <a:rPr lang="en-US" sz="1400" b="1" dirty="0">
+                <a:solidFill>
+                  <a:srgbClr val="1E2761"/>
+                </a:solidFill>
+                <a:latin typeface="Microsoft YaHei" pitchFamily="34" charset="0"/>
+                <a:ea typeface="Microsoft YaHei" pitchFamily="34" charset="-122"/>
+                <a:cs typeface="Microsoft YaHei" pitchFamily="34" charset="-120"/>
+              </a:rPr>
+              <a:t>🦞 OpenClaw</a:t>
+            </a:r>
+            <a:endParaRPr lang="en-US" sz="1400" dirty="0"/>
+          </a:p>
+        </p:txBody>
+      </p:sp>
+      <p:sp>
+        <p:nvSpPr>
+          <p:cNvPr id="13" name="Text 11"/>
+          <p:cNvSpPr/>
+          <p:nvPr/>
+        </p:nvSpPr>
+        <p:spPr>
+          <a:xfrm>
+            <a:off x="2468880" y="3291840"/>
+            <a:ext cx="1828800" cy="320040"/>
+          </a:xfrm>
+          <a:prstGeom prst="rect">
+            <a:avLst/>
+          </a:prstGeom>
+          <a:noFill/>
+          <a:ln/>
+        </p:spPr>
+        <p:txBody>
+          <a:bodyPr wrap="square" rtlCol="0" anchor="ctr"/>
+          <a:lstStyle/>
+          <a:p>
+            <a:pPr indent="0" marL="0">
+              <a:buNone/>
+            </a:pPr>
+            <a:r>
+              <a:rPr lang="en-US" sz="1400" b="1" dirty="0">
+                <a:solidFill>
+                  <a:srgbClr val="1E3A5F"/>
+                </a:solidFill>
+                <a:latin typeface="Microsoft YaHei" pitchFamily="34" charset="0"/>
+                <a:ea typeface="Microsoft YaHei" pitchFamily="34" charset="-122"/>
+                <a:cs typeface="Microsoft YaHei" pitchFamily="34" charset="-120"/>
+              </a:rPr>
+              <a:t>像请了个管家</a:t>
+            </a:r>
+            <a:endParaRPr lang="en-US" sz="1400" dirty="0"/>
+          </a:p>
+        </p:txBody>
+      </p:sp>
+      <p:sp>
+        <p:nvSpPr>
+          <p:cNvPr id="14" name="Text 12"/>
+          <p:cNvSpPr/>
+          <p:nvPr/>
+        </p:nvSpPr>
+        <p:spPr>
+          <a:xfrm>
+            <a:off x="4297680" y="3291840"/>
+            <a:ext cx="4114800" cy="640080"/>
+          </a:xfrm>
+          <a:prstGeom prst="rect">
+            <a:avLst/>
+          </a:prstGeom>
+          <a:noFill/>
+          <a:ln/>
+        </p:spPr>
+        <p:txBody>
+          <a:bodyPr wrap="square" rtlCol="0" anchor="ctr"/>
+          <a:lstStyle/>
+          <a:p>
+            <a:pPr indent="0" marL="0">
+              <a:buNone/>
             </a:pPr>
             <a:r>
               <a:rPr lang="en-US" sz="1300" dirty="0">
                 <a:solidFill>
-                  <a:srgbClr val="166534"/>
-                </a:solidFill>
-                <a:latin typeface="Microsoft YaHei" pitchFamily="34" charset="0"/>
-                <a:ea typeface="Microsoft YaHei" pitchFamily="34" charset="-122"/>
-                <a:cs typeface="Microsoft YaHei" pitchFamily="34" charset="-120"/>
-              </a:rPr>
-              <a:t>直接让它帮你干活</a:t>
+                  <a:srgbClr val="1E2761"/>
+                </a:solidFill>
+                <a:latin typeface="Microsoft YaHei" pitchFamily="34" charset="0"/>
+                <a:ea typeface="Microsoft YaHei" pitchFamily="34" charset="-122"/>
+                <a:cs typeface="Microsoft YaHei" pitchFamily="34" charset="-120"/>
+              </a:rPr>
+              <a:t>你让它干就行，可以去旅游</a:t>
             </a:r>
             <a:endParaRPr lang="en-US" sz="1300" dirty="0"/>
           </a:p>
-          <a:p>
-            <a:pPr marL="342900" indent="-342900">
-              <a:buSzPct val="100000"/>
-              <a:buChar char="•"/>
-            </a:pPr>
-            <a:r>
-              <a:rPr lang="en-US" sz="1300" dirty="0">
-                <a:solidFill>
-                  <a:srgbClr val="166534"/>
-                </a:solidFill>
-                <a:latin typeface="Microsoft YaHei" pitchFamily="34" charset="0"/>
-                <a:ea typeface="Microsoft YaHei" pitchFamily="34" charset="-122"/>
-                <a:cs typeface="Microsoft YaHei" pitchFamily="34" charset="-120"/>
-              </a:rPr>
-              <a:t>它操作你的电脑</a:t>
-            </a:r>
-            <a:endParaRPr lang="en-US" sz="1300" dirty="0"/>
-          </a:p>
-          <a:p>
-            <a:pPr marL="342900" indent="-342900">
-              <a:buSzPct val="100000"/>
-              <a:buChar char="•"/>
-            </a:pPr>
-            <a:r>
-              <a:rPr lang="en-US" sz="1300" dirty="0">
-                <a:solidFill>
-                  <a:srgbClr val="166534"/>
-                </a:solidFill>
-                <a:latin typeface="Microsoft YaHei" pitchFamily="34" charset="0"/>
-                <a:ea typeface="Microsoft YaHei" pitchFamily="34" charset="-122"/>
-                <a:cs typeface="Microsoft YaHei" pitchFamily="34" charset="-120"/>
-              </a:rPr>
-              <a:t>你动嘴，它动手</a:t>
-            </a:r>
-            <a:endParaRPr lang="en-US" sz="1300" dirty="0"/>
-          </a:p>
-        </p:txBody>
-      </p:sp>
-      <p:sp>
-        <p:nvSpPr>
-          <p:cNvPr id="11" name="Shape 9"/>
-          <p:cNvSpPr/>
-          <p:nvPr/>
-        </p:nvSpPr>
-        <p:spPr>
-          <a:xfrm>
-            <a:off x="457200" y="3840480"/>
-            <a:ext cx="8229600" cy="822960"/>
+        </p:txBody>
+      </p:sp>
+      <p:sp>
+        <p:nvSpPr>
+          <p:cNvPr id="15" name="Text 13"/>
+          <p:cNvSpPr/>
+          <p:nvPr/>
+        </p:nvSpPr>
+        <p:spPr>
+          <a:xfrm>
+            <a:off x="457200" y="3657600"/>
+            <a:ext cx="8229600" cy="365760"/>
+          </a:xfrm>
+          <a:prstGeom prst="rect">
+            <a:avLst/>
+          </a:prstGeom>
+          <a:noFill/>
+          <a:ln/>
+        </p:spPr>
+        <p:txBody>
+          <a:bodyPr wrap="square" rtlCol="0" anchor="ctr"/>
+          <a:lstStyle/>
+          <a:p>
+            <a:pPr indent="0" marL="0">
+              <a:buNone/>
+            </a:pPr>
+            <a:r>
+              <a:rPr lang="en-US" sz="1600" b="1" dirty="0">
+                <a:solidFill>
+                  <a:srgbClr val="1E3A5F"/>
+                </a:solidFill>
+                <a:latin typeface="Microsoft YaHei" pitchFamily="34" charset="0"/>
+                <a:ea typeface="Microsoft YaHei" pitchFamily="34" charset="-122"/>
+                <a:cs typeface="Microsoft YaHei" pitchFamily="34" charset="-120"/>
+              </a:rPr>
+              <a:t>真实使用场景</a:t>
+            </a:r>
+            <a:endParaRPr lang="en-US" sz="1600" dirty="0"/>
+          </a:p>
+        </p:txBody>
+      </p:sp>
+      <p:sp>
+        <p:nvSpPr>
+          <p:cNvPr id="16" name="Shape 14"/>
+          <p:cNvSpPr/>
+          <p:nvPr/>
+        </p:nvSpPr>
+        <p:spPr>
+          <a:xfrm>
+            <a:off x="457200" y="4114800"/>
+            <a:ext cx="4114800" cy="457200"/>
           </a:xfrm>
           <a:prstGeom prst="roundRect">
             <a:avLst/>
           </a:prstGeom>
           <a:solidFill>
-            <a:srgbClr val="1E3A5F"/>
+            <a:srgbClr val="F3F4F6"/>
           </a:solidFill>
           <a:ln/>
         </p:spPr>
       </p:sp>
       <p:sp>
         <p:nvSpPr>
-          <p:cNvPr id="12" name="Text 10"/>
-          <p:cNvSpPr/>
-          <p:nvPr/>
-        </p:nvSpPr>
-        <p:spPr>
-          <a:xfrm>
-            <a:off x="640080" y="3977640"/>
-            <a:ext cx="7863840" cy="548640"/>
-          </a:xfrm>
-          <a:prstGeom prst="rect">
-            <a:avLst/>
-          </a:prstGeom>
-          <a:noFill/>
-          <a:ln/>
-        </p:spPr>
-        <p:txBody>
-          <a:bodyPr wrap="square" rtlCol="0" anchor="ctr"/>
-          <a:lstStyle/>
-          <a:p>
-            <a:pPr algn="ctr" indent="0" marL="0">
-              <a:buNone/>
-            </a:pPr>
-            <a:r>
-              <a:rPr lang="en-US" sz="1400" dirty="0">
-                <a:solidFill>
-                  <a:srgbClr val="FFFFFF"/>
-                </a:solidFill>
-                <a:latin typeface="Microsoft YaHei" pitchFamily="34" charset="0"/>
-                <a:ea typeface="Microsoft YaHei" pitchFamily="34" charset="-122"/>
-                <a:cs typeface="Microsoft YaHei" pitchFamily="34" charset="-120"/>
-              </a:rPr>
-              <a:t>现在的 OpenClaw，更像是你把它请到家里，让它直接帮你去做，比如打扫房间。</a:t>
-            </a:r>
-            <a:endParaRPr lang="en-US" sz="1400" dirty="0"/>
+          <p:cNvPr id="17" name="Text 15"/>
+          <p:cNvSpPr/>
+          <p:nvPr/>
+        </p:nvSpPr>
+        <p:spPr>
+          <a:xfrm>
+            <a:off x="640080" y="4206240"/>
+            <a:ext cx="3749040" cy="274320"/>
+          </a:xfrm>
+          <a:prstGeom prst="rect">
+            <a:avLst/>
+          </a:prstGeom>
+          <a:noFill/>
+          <a:ln/>
+        </p:spPr>
+        <p:txBody>
+          <a:bodyPr wrap="square" rtlCol="0" anchor="ctr"/>
+          <a:lstStyle/>
+          <a:p>
+            <a:pPr indent="0" marL="0">
+              <a:buNone/>
+            </a:pPr>
+            <a:r>
+              <a:rPr lang="en-US" sz="1100" dirty="0">
+                <a:solidFill>
+                  <a:srgbClr val="1E2761"/>
+                </a:solidFill>
+                <a:latin typeface="Microsoft YaHei" pitchFamily="34" charset="0"/>
+                <a:ea typeface="Microsoft YaHei" pitchFamily="34" charset="-122"/>
+                <a:cs typeface="Microsoft YaHei" pitchFamily="34" charset="-120"/>
+              </a:rPr>
+              <a:t>🤰 带娃  说话就能处理</a:t>
+            </a:r>
+            <a:endParaRPr lang="en-US" sz="1100" dirty="0"/>
+          </a:p>
+        </p:txBody>
+      </p:sp>
+      <p:sp>
+        <p:nvSpPr>
+          <p:cNvPr id="18" name="Shape 16"/>
+          <p:cNvSpPr/>
+          <p:nvPr/>
+        </p:nvSpPr>
+        <p:spPr>
+          <a:xfrm>
+            <a:off x="4846320" y="4114800"/>
+            <a:ext cx="4114800" cy="457200"/>
+          </a:xfrm>
+          <a:prstGeom prst="roundRect">
+            <a:avLst/>
+          </a:prstGeom>
+          <a:solidFill>
+            <a:srgbClr val="F3F4F6"/>
+          </a:solidFill>
+          <a:ln/>
+        </p:spPr>
+      </p:sp>
+      <p:sp>
+        <p:nvSpPr>
+          <p:cNvPr id="19" name="Text 17"/>
+          <p:cNvSpPr/>
+          <p:nvPr/>
+        </p:nvSpPr>
+        <p:spPr>
+          <a:xfrm>
+            <a:off x="5029200" y="4206240"/>
+            <a:ext cx="3749040" cy="274320"/>
+          </a:xfrm>
+          <a:prstGeom prst="rect">
+            <a:avLst/>
+          </a:prstGeom>
+          <a:noFill/>
+          <a:ln/>
+        </p:spPr>
+        <p:txBody>
+          <a:bodyPr wrap="square" rtlCol="0" anchor="ctr"/>
+          <a:lstStyle/>
+          <a:p>
+            <a:pPr indent="0" marL="0">
+              <a:buNone/>
+            </a:pPr>
+            <a:r>
+              <a:rPr lang="en-US" sz="1100" dirty="0">
+                <a:solidFill>
+                  <a:srgbClr val="1E2761"/>
+                </a:solidFill>
+                <a:latin typeface="Microsoft YaHei" pitchFamily="34" charset="0"/>
+                <a:ea typeface="Microsoft YaHei" pitchFamily="34" charset="-122"/>
+                <a:cs typeface="Microsoft YaHei" pitchFamily="34" charset="-120"/>
+              </a:rPr>
+              <a:t>🚂 坐火车  手机指挥</a:t>
+            </a:r>
+            <a:endParaRPr lang="en-US" sz="1100" dirty="0"/>
+          </a:p>
+        </p:txBody>
+      </p:sp>
+      <p:sp>
+        <p:nvSpPr>
+          <p:cNvPr id="20" name="Shape 18"/>
+          <p:cNvSpPr/>
+          <p:nvPr/>
+        </p:nvSpPr>
+        <p:spPr>
+          <a:xfrm>
+            <a:off x="457200" y="4617720"/>
+            <a:ext cx="4114800" cy="457200"/>
+          </a:xfrm>
+          <a:prstGeom prst="roundRect">
+            <a:avLst/>
+          </a:prstGeom>
+          <a:solidFill>
+            <a:srgbClr val="F3F4F6"/>
+          </a:solidFill>
+          <a:ln/>
+        </p:spPr>
+      </p:sp>
+      <p:sp>
+        <p:nvSpPr>
+          <p:cNvPr id="21" name="Text 19"/>
+          <p:cNvSpPr/>
+          <p:nvPr/>
+        </p:nvSpPr>
+        <p:spPr>
+          <a:xfrm>
+            <a:off x="640080" y="4709160"/>
+            <a:ext cx="3749040" cy="274320"/>
+          </a:xfrm>
+          <a:prstGeom prst="rect">
+            <a:avLst/>
+          </a:prstGeom>
+          <a:noFill/>
+          <a:ln/>
+        </p:spPr>
+        <p:txBody>
+          <a:bodyPr wrap="square" rtlCol="0" anchor="ctr"/>
+          <a:lstStyle/>
+          <a:p>
+            <a:pPr indent="0" marL="0">
+              <a:buNone/>
+            </a:pPr>
+            <a:r>
+              <a:rPr lang="en-US" sz="1100" dirty="0">
+                <a:solidFill>
+                  <a:srgbClr val="1E2761"/>
+                </a:solidFill>
+                <a:latin typeface="Microsoft YaHei" pitchFamily="34" charset="0"/>
+                <a:ea typeface="Microsoft YaHei" pitchFamily="34" charset="-122"/>
+                <a:cs typeface="Microsoft YaHei" pitchFamily="34" charset="-120"/>
+              </a:rPr>
+              <a:t>⛰️ 户外  随时安排</a:t>
+            </a:r>
+            <a:endParaRPr lang="en-US" sz="1100" dirty="0"/>
+          </a:p>
+        </p:txBody>
+      </p:sp>
+      <p:sp>
+        <p:nvSpPr>
+          <p:cNvPr id="22" name="Shape 20"/>
+          <p:cNvSpPr/>
+          <p:nvPr/>
+        </p:nvSpPr>
+        <p:spPr>
+          <a:xfrm>
+            <a:off x="4846320" y="4617720"/>
+            <a:ext cx="4114800" cy="457200"/>
+          </a:xfrm>
+          <a:prstGeom prst="roundRect">
+            <a:avLst/>
+          </a:prstGeom>
+          <a:solidFill>
+            <a:srgbClr val="F3F4F6"/>
+          </a:solidFill>
+          <a:ln/>
+        </p:spPr>
+      </p:sp>
+      <p:sp>
+        <p:nvSpPr>
+          <p:cNvPr id="23" name="Text 21"/>
+          <p:cNvSpPr/>
+          <p:nvPr/>
+        </p:nvSpPr>
+        <p:spPr>
+          <a:xfrm>
+            <a:off x="5029200" y="4709160"/>
+            <a:ext cx="3749040" cy="274320"/>
+          </a:xfrm>
+          <a:prstGeom prst="rect">
+            <a:avLst/>
+          </a:prstGeom>
+          <a:noFill/>
+          <a:ln/>
+        </p:spPr>
+        <p:txBody>
+          <a:bodyPr wrap="square" rtlCol="0" anchor="ctr"/>
+          <a:lstStyle/>
+          <a:p>
+            <a:pPr indent="0" marL="0">
+              <a:buNone/>
+            </a:pPr>
+            <a:r>
+              <a:rPr lang="en-US" sz="1100" dirty="0">
+                <a:solidFill>
+                  <a:srgbClr val="1E2761"/>
+                </a:solidFill>
+                <a:latin typeface="Microsoft YaHei" pitchFamily="34" charset="0"/>
+                <a:ea typeface="Microsoft YaHei" pitchFamily="34" charset="-122"/>
+                <a:cs typeface="Microsoft YaHei" pitchFamily="34" charset="-120"/>
+              </a:rPr>
+              <a:t>🤕 生病  动嘴指挥</a:t>
+            </a:r>
+            <a:endParaRPr lang="en-US" sz="1100" dirty="0"/>
           </a:p>
         </p:txBody>
       </p:sp>
@@ -2947,7 +3582,7 @@
                 <a:ea typeface="Microsoft YaHei" pitchFamily="34" charset="-122"/>
                 <a:cs typeface="Microsoft YaHei" pitchFamily="34" charset="-120"/>
               </a:rPr>
-              <a:t>通道才是杀手锏</a:t>
+              <a:t>你适合哪种？</a:t>
             </a:r>
             <a:endParaRPr lang="en-US" sz="3200" dirty="0"/>
           </a:p>
@@ -2955,55 +3590,16 @@
       </p:sp>
       <p:sp>
         <p:nvSpPr>
-          <p:cNvPr id="3" name="Text 1"/>
+          <p:cNvPr id="3" name="Shape 1"/>
           <p:cNvSpPr/>
           <p:nvPr/>
         </p:nvSpPr>
         <p:spPr>
           <a:xfrm>
             <a:off x="457200" y="1097280"/>
-            <a:ext cx="8229600" cy="365760"/>
-          </a:xfrm>
-          <a:prstGeom prst="rect">
-            <a:avLst/>
-          </a:prstGeom>
-          <a:noFill/>
-          <a:ln/>
-        </p:spPr>
-        <p:txBody>
-          <a:bodyPr wrap="square" rtlCol="0" anchor="ctr"/>
-          <a:lstStyle/>
-          <a:p>
-            <a:pPr indent="0" marL="0">
-              <a:buNone/>
-            </a:pPr>
-            <a:r>
-              <a:rPr lang="en-US" sz="1600" b="1" dirty="0">
-                <a:solidFill>
-                  <a:srgbClr val="3D7EAA"/>
-                </a:solidFill>
-                <a:latin typeface="Microsoft YaHei" pitchFamily="34" charset="0"/>
-                <a:ea typeface="Microsoft YaHei" pitchFamily="34" charset="-122"/>
-                <a:cs typeface="Microsoft YaHei" pitchFamily="34" charset="-120"/>
-              </a:rPr>
-              <a:t>OpenClaw vs AI编程工具</a:t>
-            </a:r>
-            <a:endParaRPr lang="en-US" sz="1600" dirty="0"/>
-          </a:p>
-        </p:txBody>
-      </p:sp>
-      <p:sp>
-        <p:nvSpPr>
-          <p:cNvPr id="4" name="Shape 2"/>
-          <p:cNvSpPr/>
-          <p:nvPr/>
-        </p:nvSpPr>
-        <p:spPr>
-          <a:xfrm>
-            <a:off x="457200" y="1645920"/>
-            <a:ext cx="3840480" cy="1188720"/>
-          </a:xfrm>
-          <a:prstGeom prst="rect">
+            <a:ext cx="8229600" cy="777240"/>
+          </a:xfrm>
+          <a:prstGeom prst="roundRect">
             <a:avLst/>
           </a:prstGeom>
           <a:solidFill>
@@ -3014,38 +3610,77 @@
       </p:sp>
       <p:sp>
         <p:nvSpPr>
+          <p:cNvPr id="4" name="Text 2"/>
+          <p:cNvSpPr/>
+          <p:nvPr/>
+        </p:nvSpPr>
+        <p:spPr>
+          <a:xfrm>
+            <a:off x="640080" y="1188720"/>
+            <a:ext cx="3657600" cy="320040"/>
+          </a:xfrm>
+          <a:prstGeom prst="rect">
+            <a:avLst/>
+          </a:prstGeom>
+          <a:noFill/>
+          <a:ln/>
+        </p:spPr>
+        <p:txBody>
+          <a:bodyPr wrap="square" rtlCol="0" anchor="ctr"/>
+          <a:lstStyle/>
+          <a:p>
+            <a:pPr indent="0" marL="0">
+              <a:buNone/>
+            </a:pPr>
+            <a:r>
+              <a:rPr lang="en-US" sz="1400" b="1" dirty="0">
+                <a:solidFill>
+                  <a:srgbClr val="1E3A5F"/>
+                </a:solidFill>
+                <a:latin typeface="Microsoft YaHei" pitchFamily="34" charset="0"/>
+                <a:ea typeface="Microsoft YaHei" pitchFamily="34" charset="-122"/>
+                <a:cs typeface="Microsoft YaHei" pitchFamily="34" charset="-120"/>
+              </a:rPr>
+              <a:t>问问题、查资料</a:t>
+            </a:r>
+            <a:endParaRPr lang="en-US" sz="1400" dirty="0"/>
+          </a:p>
+        </p:txBody>
+      </p:sp>
+      <p:sp>
+        <p:nvSpPr>
           <p:cNvPr id="5" name="Text 3"/>
           <p:cNvSpPr/>
           <p:nvPr/>
         </p:nvSpPr>
         <p:spPr>
           <a:xfrm>
-            <a:off x="457200" y="1737360"/>
-            <a:ext cx="3840480" cy="365760"/>
-          </a:xfrm>
-          <a:prstGeom prst="rect">
-            <a:avLst/>
-          </a:prstGeom>
-          <a:noFill/>
-          <a:ln/>
-        </p:spPr>
-        <p:txBody>
-          <a:bodyPr wrap="square" rtlCol="0" anchor="ctr"/>
-          <a:lstStyle/>
-          <a:p>
-            <a:pPr algn="ctr" indent="0" marL="0">
+            <a:off x="4114800" y="1188720"/>
+            <a:ext cx="1828800" cy="320040"/>
+          </a:xfrm>
+          <a:prstGeom prst="rect">
+            <a:avLst/>
+          </a:prstGeom>
+          <a:noFill/>
+          <a:ln/>
+        </p:spPr>
+        <p:txBody>
+          <a:bodyPr wrap="square" rtlCol="0" anchor="ctr"/>
+          <a:lstStyle/>
+          <a:p>
+            <a:pPr indent="0" marL="0">
               <a:buNone/>
             </a:pPr>
             <a:r>
               <a:rPr lang="en-US" sz="1400" b="1" dirty="0">
                 <a:solidFill>
-                  <a:srgbClr val="1E3A5F"/>
-                </a:solidFill>
-                <a:latin typeface="Microsoft YaHei" pitchFamily="34" charset="0"/>
-                <a:ea typeface="Microsoft YaHei" pitchFamily="34" charset="-122"/>
-                <a:cs typeface="Microsoft YaHei" pitchFamily="34" charset="-120"/>
-              </a:rPr>
-              <a:t>之前</a:t>
+                  <a:srgbClr val="FF6B35"/>
+                </a:solidFill>
+                <a:latin typeface="Microsoft YaHei" pitchFamily="34" charset="0"/>
+                <a:ea typeface="Microsoft YaHei" pitchFamily="34" charset="-122"/>
+                <a:cs typeface="Microsoft YaHei" pitchFamily="34" charset="-120"/>
+              </a:rPr>
+              <a:t>→ 豆包</a:t>
             </a:r>
             <a:endParaRPr lang="en-US" sz="1400" dirty="0"/>
           </a:p>
@@ -3059,51 +3694,34 @@
         </p:nvSpPr>
         <p:spPr>
           <a:xfrm>
-            <a:off x="640080" y="2103120"/>
-            <a:ext cx="3474720" cy="640080"/>
-          </a:xfrm>
-          <a:prstGeom prst="rect">
-            <a:avLst/>
-          </a:prstGeom>
-          <a:noFill/>
-          <a:ln/>
-        </p:spPr>
-        <p:txBody>
-          <a:bodyPr wrap="square" rtlCol="0" anchor="ctr"/>
-          <a:lstStyle/>
-          <a:p>
-            <a:pPr algn="ctr" indent="0" marL="0">
-              <a:buNone/>
-            </a:pPr>
-            <a:r>
-              <a:rPr lang="en-US" sz="1400" dirty="0">
-                <a:solidFill>
-                  <a:srgbClr val="1E2761"/>
-                </a:solidFill>
-                <a:latin typeface="Microsoft YaHei" pitchFamily="34" charset="0"/>
-                <a:ea typeface="Microsoft YaHei" pitchFamily="34" charset="-122"/>
-                <a:cs typeface="Microsoft YaHei" pitchFamily="34" charset="-120"/>
-              </a:rPr>
-              <a:t>跑到电脑前告诉它</a:t>
-            </a:r>
-            <a:endParaRPr lang="en-US" sz="1400" dirty="0"/>
-          </a:p>
-          <a:p>
-            <a:pPr algn="ctr" indent="0" marL="0">
-              <a:buNone/>
-            </a:pPr>
-            <a:r>
-              <a:rPr lang="en-US" sz="1400" dirty="0">
-                <a:solidFill>
-                  <a:srgbClr val="1E2761"/>
-                </a:solidFill>
-                <a:latin typeface="Microsoft YaHei" pitchFamily="34" charset="0"/>
-                <a:ea typeface="Microsoft YaHei" pitchFamily="34" charset="-122"/>
-                <a:cs typeface="Microsoft YaHei" pitchFamily="34" charset="-120"/>
-              </a:rPr>
-              <a:t>你需要做什么</a:t>
-            </a:r>
-            <a:endParaRPr lang="en-US" sz="1400" dirty="0"/>
+            <a:off x="5943600" y="1188720"/>
+            <a:ext cx="2560320" cy="548640"/>
+          </a:xfrm>
+          <a:prstGeom prst="rect">
+            <a:avLst/>
+          </a:prstGeom>
+          <a:noFill/>
+          <a:ln/>
+        </p:spPr>
+        <p:txBody>
+          <a:bodyPr wrap="square" rtlCol="0" anchor="ctr"/>
+          <a:lstStyle/>
+          <a:p>
+            <a:pPr indent="0" marL="0">
+              <a:buNone/>
+            </a:pPr>
+            <a:r>
+              <a:rPr lang="en-US" sz="1100" dirty="0">
+                <a:solidFill>
+                  <a:srgbClr val="6B7280"/>
+                </a:solidFill>
+                <a:latin typeface="Microsoft YaHei" pitchFamily="34" charset="0"/>
+                <a:ea typeface="Microsoft YaHei" pitchFamily="34" charset="-122"/>
+                <a:cs typeface="Microsoft YaHei" pitchFamily="34" charset="-120"/>
+              </a:rPr>
+              <a:t>快速响应，无需配置</a:t>
+            </a:r>
+            <a:endParaRPr lang="en-US" sz="1100" dirty="0"/>
           </a:p>
         </p:txBody>
       </p:sp>
@@ -3115,10 +3733,10 @@
         </p:nvSpPr>
         <p:spPr>
           <a:xfrm>
-            <a:off x="4846320" y="1645920"/>
-            <a:ext cx="3840480" cy="1188720"/>
-          </a:xfrm>
-          <a:prstGeom prst="rect">
+            <a:off x="457200" y="2011680"/>
+            <a:ext cx="8229600" cy="777240"/>
+          </a:xfrm>
+          <a:prstGeom prst="roundRect">
             <a:avLst/>
           </a:prstGeom>
           <a:solidFill>
@@ -3135,8 +3753,282 @@
         </p:nvSpPr>
         <p:spPr>
           <a:xfrm>
-            <a:off x="4846320" y="1737360"/>
-            <a:ext cx="3840480" cy="365760"/>
+            <a:off x="640080" y="2103120"/>
+            <a:ext cx="3657600" cy="320040"/>
+          </a:xfrm>
+          <a:prstGeom prst="rect">
+            <a:avLst/>
+          </a:prstGeom>
+          <a:noFill/>
+          <a:ln/>
+        </p:spPr>
+        <p:txBody>
+          <a:bodyPr wrap="square" rtlCol="0" anchor="ctr"/>
+          <a:lstStyle/>
+          <a:p>
+            <a:pPr indent="0" marL="0">
+              <a:buNone/>
+            </a:pPr>
+            <a:r>
+              <a:rPr lang="en-US" sz="1400" b="1" dirty="0">
+                <a:solidFill>
+                  <a:srgbClr val="1E3A5F"/>
+                </a:solidFill>
+                <a:latin typeface="Microsoft YaHei" pitchFamily="34" charset="0"/>
+                <a:ea typeface="Microsoft YaHei" pitchFamily="34" charset="-122"/>
+                <a:cs typeface="Microsoft YaHei" pitchFamily="34" charset="-120"/>
+              </a:rPr>
+              <a:t>需要写代码、坐电脑前</a:t>
+            </a:r>
+            <a:endParaRPr lang="en-US" sz="1400" dirty="0"/>
+          </a:p>
+        </p:txBody>
+      </p:sp>
+      <p:sp>
+        <p:nvSpPr>
+          <p:cNvPr id="9" name="Text 7"/>
+          <p:cNvSpPr/>
+          <p:nvPr/>
+        </p:nvSpPr>
+        <p:spPr>
+          <a:xfrm>
+            <a:off x="4114800" y="2103120"/>
+            <a:ext cx="1828800" cy="320040"/>
+          </a:xfrm>
+          <a:prstGeom prst="rect">
+            <a:avLst/>
+          </a:prstGeom>
+          <a:noFill/>
+          <a:ln/>
+        </p:spPr>
+        <p:txBody>
+          <a:bodyPr wrap="square" rtlCol="0" anchor="ctr"/>
+          <a:lstStyle/>
+          <a:p>
+            <a:pPr indent="0" marL="0">
+              <a:buNone/>
+            </a:pPr>
+            <a:r>
+              <a:rPr lang="en-US" sz="1400" b="1" dirty="0">
+                <a:solidFill>
+                  <a:srgbClr val="FF6B35"/>
+                </a:solidFill>
+                <a:latin typeface="Microsoft YaHei" pitchFamily="34" charset="0"/>
+                <a:ea typeface="Microsoft YaHei" pitchFamily="34" charset="-122"/>
+                <a:cs typeface="Microsoft YaHei" pitchFamily="34" charset="-120"/>
+              </a:rPr>
+              <a:t>→ Claude Code</a:t>
+            </a:r>
+            <a:endParaRPr lang="en-US" sz="1400" dirty="0"/>
+          </a:p>
+        </p:txBody>
+      </p:sp>
+      <p:sp>
+        <p:nvSpPr>
+          <p:cNvPr id="10" name="Text 8"/>
+          <p:cNvSpPr/>
+          <p:nvPr/>
+        </p:nvSpPr>
+        <p:spPr>
+          <a:xfrm>
+            <a:off x="5943600" y="2103120"/>
+            <a:ext cx="2560320" cy="548640"/>
+          </a:xfrm>
+          <a:prstGeom prst="rect">
+            <a:avLst/>
+          </a:prstGeom>
+          <a:noFill/>
+          <a:ln/>
+        </p:spPr>
+        <p:txBody>
+          <a:bodyPr wrap="square" rtlCol="0" anchor="ctr"/>
+          <a:lstStyle/>
+          <a:p>
+            <a:pPr indent="0" marL="0">
+              <a:buNone/>
+            </a:pPr>
+            <a:r>
+              <a:rPr lang="en-US" sz="1100" dirty="0">
+                <a:solidFill>
+                  <a:srgbClr val="6B7280"/>
+                </a:solidFill>
+                <a:latin typeface="Microsoft YaHei" pitchFamily="34" charset="0"/>
+                <a:ea typeface="Microsoft YaHei" pitchFamily="34" charset="-122"/>
+                <a:cs typeface="Microsoft YaHei" pitchFamily="34" charset="-120"/>
+              </a:rPr>
+              <a:t>编程能力强，适合开发</a:t>
+            </a:r>
+            <a:endParaRPr lang="en-US" sz="1100" dirty="0"/>
+          </a:p>
+        </p:txBody>
+      </p:sp>
+      <p:sp>
+        <p:nvSpPr>
+          <p:cNvPr id="11" name="Shape 9"/>
+          <p:cNvSpPr/>
+          <p:nvPr/>
+        </p:nvSpPr>
+        <p:spPr>
+          <a:xfrm>
+            <a:off x="457200" y="2926080"/>
+            <a:ext cx="8229600" cy="777240"/>
+          </a:xfrm>
+          <a:prstGeom prst="roundRect">
+            <a:avLst/>
+          </a:prstGeom>
+          <a:solidFill>
+            <a:srgbClr val="E8F4F8"/>
+          </a:solidFill>
+          <a:ln/>
+        </p:spPr>
+      </p:sp>
+      <p:sp>
+        <p:nvSpPr>
+          <p:cNvPr id="12" name="Text 10"/>
+          <p:cNvSpPr/>
+          <p:nvPr/>
+        </p:nvSpPr>
+        <p:spPr>
+          <a:xfrm>
+            <a:off x="640080" y="3017520"/>
+            <a:ext cx="3657600" cy="320040"/>
+          </a:xfrm>
+          <a:prstGeom prst="rect">
+            <a:avLst/>
+          </a:prstGeom>
+          <a:noFill/>
+          <a:ln/>
+        </p:spPr>
+        <p:txBody>
+          <a:bodyPr wrap="square" rtlCol="0" anchor="ctr"/>
+          <a:lstStyle/>
+          <a:p>
+            <a:pPr indent="0" marL="0">
+              <a:buNone/>
+            </a:pPr>
+            <a:r>
+              <a:rPr lang="en-US" sz="1400" b="1" dirty="0">
+                <a:solidFill>
+                  <a:srgbClr val="1E3A5F"/>
+                </a:solidFill>
+                <a:latin typeface="Microsoft YaHei" pitchFamily="34" charset="0"/>
+                <a:ea typeface="Microsoft YaHei" pitchFamily="34" charset="-122"/>
+                <a:cs typeface="Microsoft YaHei" pitchFamily="34" charset="-120"/>
+              </a:rPr>
+              <a:t>想要躺着指挥、随时办事</a:t>
+            </a:r>
+            <a:endParaRPr lang="en-US" sz="1400" dirty="0"/>
+          </a:p>
+        </p:txBody>
+      </p:sp>
+      <p:sp>
+        <p:nvSpPr>
+          <p:cNvPr id="13" name="Text 11"/>
+          <p:cNvSpPr/>
+          <p:nvPr/>
+        </p:nvSpPr>
+        <p:spPr>
+          <a:xfrm>
+            <a:off x="4114800" y="3017520"/>
+            <a:ext cx="1828800" cy="320040"/>
+          </a:xfrm>
+          <a:prstGeom prst="rect">
+            <a:avLst/>
+          </a:prstGeom>
+          <a:noFill/>
+          <a:ln/>
+        </p:spPr>
+        <p:txBody>
+          <a:bodyPr wrap="square" rtlCol="0" anchor="ctr"/>
+          <a:lstStyle/>
+          <a:p>
+            <a:pPr indent="0" marL="0">
+              <a:buNone/>
+            </a:pPr>
+            <a:r>
+              <a:rPr lang="en-US" sz="1400" b="1" dirty="0">
+                <a:solidFill>
+                  <a:srgbClr val="FF6B35"/>
+                </a:solidFill>
+                <a:latin typeface="Microsoft YaHei" pitchFamily="34" charset="0"/>
+                <a:ea typeface="Microsoft YaHei" pitchFamily="34" charset="-122"/>
+                <a:cs typeface="Microsoft YaHei" pitchFamily="34" charset="-120"/>
+              </a:rPr>
+              <a:t>→ OpenClaw</a:t>
+            </a:r>
+            <a:endParaRPr lang="en-US" sz="1400" dirty="0"/>
+          </a:p>
+        </p:txBody>
+      </p:sp>
+      <p:sp>
+        <p:nvSpPr>
+          <p:cNvPr id="14" name="Text 12"/>
+          <p:cNvSpPr/>
+          <p:nvPr/>
+        </p:nvSpPr>
+        <p:spPr>
+          <a:xfrm>
+            <a:off x="5943600" y="3017520"/>
+            <a:ext cx="2560320" cy="548640"/>
+          </a:xfrm>
+          <a:prstGeom prst="rect">
+            <a:avLst/>
+          </a:prstGeom>
+          <a:noFill/>
+          <a:ln/>
+        </p:spPr>
+        <p:txBody>
+          <a:bodyPr wrap="square" rtlCol="0" anchor="ctr"/>
+          <a:lstStyle/>
+          <a:p>
+            <a:pPr indent="0" marL="0">
+              <a:buNone/>
+            </a:pPr>
+            <a:r>
+              <a:rPr lang="en-US" sz="1100" dirty="0">
+                <a:solidFill>
+                  <a:srgbClr val="6B7280"/>
+                </a:solidFill>
+                <a:latin typeface="Microsoft YaHei" pitchFamily="34" charset="0"/>
+                <a:ea typeface="Microsoft YaHei" pitchFamily="34" charset="-122"/>
+                <a:cs typeface="Microsoft YaHei" pitchFamily="34" charset="-120"/>
+              </a:rPr>
+              <a:t>Channel通道，真正的自动化</a:t>
+            </a:r>
+            <a:endParaRPr lang="en-US" sz="1100" dirty="0"/>
+          </a:p>
+        </p:txBody>
+      </p:sp>
+      <p:sp>
+        <p:nvSpPr>
+          <p:cNvPr id="15" name="Shape 13"/>
+          <p:cNvSpPr/>
+          <p:nvPr/>
+        </p:nvSpPr>
+        <p:spPr>
+          <a:xfrm>
+            <a:off x="457200" y="4206240"/>
+            <a:ext cx="8229600" cy="640080"/>
+          </a:xfrm>
+          <a:prstGeom prst="roundRect">
+            <a:avLst/>
+          </a:prstGeom>
+          <a:solidFill>
+            <a:srgbClr val="1E3A5F"/>
+          </a:solidFill>
+          <a:ln/>
+        </p:spPr>
+      </p:sp>
+      <p:sp>
+        <p:nvSpPr>
+          <p:cNvPr id="16" name="Text 14"/>
+          <p:cNvSpPr/>
+          <p:nvPr/>
+        </p:nvSpPr>
+        <p:spPr>
+          <a:xfrm>
+            <a:off x="457200" y="4297680"/>
+            <a:ext cx="8229600" cy="457200"/>
           </a:xfrm>
           <a:prstGeom prst="rect">
             <a:avLst/>
@@ -3152,348 +4044,17 @@
               <a:buNone/>
             </a:pPr>
             <a:r>
-              <a:rPr lang="en-US" sz="1400" b="1" dirty="0">
-                <a:solidFill>
-                  <a:srgbClr val="FF6B35"/>
-                </a:solidFill>
-                <a:latin typeface="Microsoft YaHei" pitchFamily="34" charset="0"/>
-                <a:ea typeface="Microsoft YaHei" pitchFamily="34" charset="-122"/>
-                <a:cs typeface="Microsoft YaHei" pitchFamily="34" charset="-120"/>
-              </a:rPr>
-              <a:t>现在 🦞</a:t>
-            </a:r>
-            <a:endParaRPr lang="en-US" sz="1400" dirty="0"/>
-          </a:p>
-        </p:txBody>
-      </p:sp>
-      <p:sp>
-        <p:nvSpPr>
-          <p:cNvPr id="9" name="Text 7"/>
-          <p:cNvSpPr/>
-          <p:nvPr/>
-        </p:nvSpPr>
-        <p:spPr>
-          <a:xfrm>
-            <a:off x="5029200" y="2103120"/>
-            <a:ext cx="3474720" cy="640080"/>
-          </a:xfrm>
-          <a:prstGeom prst="rect">
-            <a:avLst/>
-          </a:prstGeom>
-          <a:noFill/>
-          <a:ln/>
-        </p:spPr>
-        <p:txBody>
-          <a:bodyPr wrap="square" rtlCol="0" anchor="ctr"/>
-          <a:lstStyle/>
-          <a:p>
-            <a:pPr algn="ctr" indent="0" marL="0">
-              <a:buNone/>
-            </a:pPr>
-            <a:r>
-              <a:rPr lang="en-US" sz="1400" dirty="0">
-                <a:solidFill>
-                  <a:srgbClr val="1E2761"/>
-                </a:solidFill>
-                <a:latin typeface="Microsoft YaHei" pitchFamily="34" charset="0"/>
-                <a:ea typeface="Microsoft YaHei" pitchFamily="34" charset="-122"/>
-                <a:cs typeface="Microsoft YaHei" pitchFamily="34" charset="-120"/>
-              </a:rPr>
-              <a:t>躺着也能指挥</a:t>
-            </a:r>
-            <a:endParaRPr lang="en-US" sz="1400" dirty="0"/>
-          </a:p>
-          <a:p>
-            <a:pPr algn="ctr" indent="0" marL="0">
-              <a:buNone/>
-            </a:pPr>
-            <a:r>
-              <a:rPr lang="en-US" sz="1400" dirty="0">
-                <a:solidFill>
-                  <a:srgbClr val="1E2761"/>
-                </a:solidFill>
-                <a:latin typeface="Microsoft YaHei" pitchFamily="34" charset="0"/>
-                <a:ea typeface="Microsoft YaHei" pitchFamily="34" charset="-122"/>
-                <a:cs typeface="Microsoft YaHei" pitchFamily="34" charset="-120"/>
-              </a:rPr>
-              <a:t>说话就能办事</a:t>
-            </a:r>
-            <a:endParaRPr lang="en-US" sz="1400" dirty="0"/>
-          </a:p>
-        </p:txBody>
-      </p:sp>
-      <p:sp>
-        <p:nvSpPr>
-          <p:cNvPr id="10" name="Text 8"/>
-          <p:cNvSpPr/>
-          <p:nvPr/>
-        </p:nvSpPr>
-        <p:spPr>
-          <a:xfrm>
-            <a:off x="457200" y="3108960"/>
-            <a:ext cx="8229600" cy="365760"/>
-          </a:xfrm>
-          <a:prstGeom prst="rect">
-            <a:avLst/>
-          </a:prstGeom>
-          <a:noFill/>
-          <a:ln/>
-        </p:spPr>
-        <p:txBody>
-          <a:bodyPr wrap="square" rtlCol="0" anchor="ctr"/>
-          <a:lstStyle/>
-          <a:p>
-            <a:pPr indent="0" marL="0">
-              <a:buNone/>
-            </a:pPr>
-            <a:r>
-              <a:rPr lang="en-US" sz="1600" b="1" dirty="0">
-                <a:solidFill>
-                  <a:srgbClr val="1E3A5F"/>
-                </a:solidFill>
-                <a:latin typeface="Microsoft YaHei" pitchFamily="34" charset="0"/>
-                <a:ea typeface="Microsoft YaHei" pitchFamily="34" charset="-122"/>
-                <a:cs typeface="Microsoft YaHei" pitchFamily="34" charset="-120"/>
-              </a:rPr>
-              <a:t>真实使用场景</a:t>
-            </a:r>
-            <a:endParaRPr lang="en-US" sz="1600" dirty="0"/>
-          </a:p>
-        </p:txBody>
-      </p:sp>
-      <p:sp>
-        <p:nvSpPr>
-          <p:cNvPr id="11" name="Shape 9"/>
-          <p:cNvSpPr/>
-          <p:nvPr/>
-        </p:nvSpPr>
-        <p:spPr>
-          <a:xfrm>
-            <a:off x="457200" y="3566160"/>
-            <a:ext cx="4114800" cy="502920"/>
-          </a:xfrm>
-          <a:prstGeom prst="roundRect">
-            <a:avLst/>
-          </a:prstGeom>
-          <a:solidFill>
-            <a:srgbClr val="FFF7ED"/>
-          </a:solidFill>
-          <a:ln/>
-        </p:spPr>
-      </p:sp>
-      <p:sp>
-        <p:nvSpPr>
-          <p:cNvPr id="12" name="Text 10"/>
-          <p:cNvSpPr/>
-          <p:nvPr/>
-        </p:nvSpPr>
-        <p:spPr>
-          <a:xfrm>
-            <a:off x="640080" y="3657600"/>
-            <a:ext cx="3749040" cy="320040"/>
-          </a:xfrm>
-          <a:prstGeom prst="rect">
-            <a:avLst/>
-          </a:prstGeom>
-          <a:noFill/>
-          <a:ln/>
-        </p:spPr>
-        <p:txBody>
-          <a:bodyPr wrap="square" rtlCol="0" anchor="ctr"/>
-          <a:lstStyle/>
-          <a:p>
-            <a:pPr indent="0" marL="0">
-              <a:buNone/>
-            </a:pPr>
-            <a:r>
-              <a:rPr lang="en-US" sz="1200" dirty="0">
-                <a:solidFill>
-                  <a:srgbClr val="1E2761"/>
-                </a:solidFill>
-                <a:latin typeface="Microsoft YaHei" pitchFamily="34" charset="0"/>
-                <a:ea typeface="Microsoft YaHei" pitchFamily="34" charset="-122"/>
-                <a:cs typeface="Microsoft YaHei" pitchFamily="34" charset="-120"/>
-              </a:rPr>
-              <a:t>🤰 带娃  说话就能处理工作</a:t>
-            </a:r>
-            <a:endParaRPr lang="en-US" sz="1200" dirty="0"/>
-          </a:p>
-        </p:txBody>
-      </p:sp>
-      <p:sp>
-        <p:nvSpPr>
-          <p:cNvPr id="13" name="Shape 11"/>
-          <p:cNvSpPr/>
-          <p:nvPr/>
-        </p:nvSpPr>
-        <p:spPr>
-          <a:xfrm>
-            <a:off x="4846320" y="3566160"/>
-            <a:ext cx="4114800" cy="502920"/>
-          </a:xfrm>
-          <a:prstGeom prst="roundRect">
-            <a:avLst/>
-          </a:prstGeom>
-          <a:solidFill>
-            <a:srgbClr val="FEF2F2"/>
-          </a:solidFill>
-          <a:ln/>
-        </p:spPr>
-      </p:sp>
-      <p:sp>
-        <p:nvSpPr>
-          <p:cNvPr id="14" name="Text 12"/>
-          <p:cNvSpPr/>
-          <p:nvPr/>
-        </p:nvSpPr>
-        <p:spPr>
-          <a:xfrm>
-            <a:off x="5029200" y="3657600"/>
-            <a:ext cx="3749040" cy="320040"/>
-          </a:xfrm>
-          <a:prstGeom prst="rect">
-            <a:avLst/>
-          </a:prstGeom>
-          <a:noFill/>
-          <a:ln/>
-        </p:spPr>
-        <p:txBody>
-          <a:bodyPr wrap="square" rtlCol="0" anchor="ctr"/>
-          <a:lstStyle/>
-          <a:p>
-            <a:pPr indent="0" marL="0">
-              <a:buNone/>
-            </a:pPr>
-            <a:r>
-              <a:rPr lang="en-US" sz="1200" dirty="0">
-                <a:solidFill>
-                  <a:srgbClr val="1E2761"/>
-                </a:solidFill>
-                <a:latin typeface="Microsoft YaHei" pitchFamily="34" charset="0"/>
-                <a:ea typeface="Microsoft YaHei" pitchFamily="34" charset="-122"/>
-                <a:cs typeface="Microsoft YaHei" pitchFamily="34" charset="-120"/>
-              </a:rPr>
-              <a:t>🚂 坐火车  手机指挥服务器</a:t>
-            </a:r>
-            <a:endParaRPr lang="en-US" sz="1200" dirty="0"/>
-          </a:p>
-        </p:txBody>
-      </p:sp>
-      <p:sp>
-        <p:nvSpPr>
-          <p:cNvPr id="15" name="Shape 13"/>
-          <p:cNvSpPr/>
-          <p:nvPr/>
-        </p:nvSpPr>
-        <p:spPr>
-          <a:xfrm>
-            <a:off x="457200" y="4206240"/>
-            <a:ext cx="4114800" cy="502920"/>
-          </a:xfrm>
-          <a:prstGeom prst="roundRect">
-            <a:avLst/>
-          </a:prstGeom>
-          <a:solidFill>
-            <a:srgbClr val="FFF7ED"/>
-          </a:solidFill>
-          <a:ln/>
-        </p:spPr>
-      </p:sp>
-      <p:sp>
-        <p:nvSpPr>
-          <p:cNvPr id="16" name="Text 14"/>
-          <p:cNvSpPr/>
-          <p:nvPr/>
-        </p:nvSpPr>
-        <p:spPr>
-          <a:xfrm>
-            <a:off x="640080" y="4297680"/>
-            <a:ext cx="3749040" cy="320040"/>
-          </a:xfrm>
-          <a:prstGeom prst="rect">
-            <a:avLst/>
-          </a:prstGeom>
-          <a:noFill/>
-          <a:ln/>
-        </p:spPr>
-        <p:txBody>
-          <a:bodyPr wrap="square" rtlCol="0" anchor="ctr"/>
-          <a:lstStyle/>
-          <a:p>
-            <a:pPr indent="0" marL="0">
-              <a:buNone/>
-            </a:pPr>
-            <a:r>
-              <a:rPr lang="en-US" sz="1200" dirty="0">
-                <a:solidFill>
-                  <a:srgbClr val="1E2761"/>
-                </a:solidFill>
-                <a:latin typeface="Microsoft YaHei" pitchFamily="34" charset="0"/>
-                <a:ea typeface="Microsoft YaHei" pitchFamily="34" charset="-122"/>
-                <a:cs typeface="Microsoft YaHei" pitchFamily="34" charset="-120"/>
-              </a:rPr>
-              <a:t>⛰️ 户外  随时安排任务</a:t>
-            </a:r>
-            <a:endParaRPr lang="en-US" sz="1200" dirty="0"/>
-          </a:p>
-        </p:txBody>
-      </p:sp>
-      <p:sp>
-        <p:nvSpPr>
-          <p:cNvPr id="17" name="Shape 15"/>
-          <p:cNvSpPr/>
-          <p:nvPr/>
-        </p:nvSpPr>
-        <p:spPr>
-          <a:xfrm>
-            <a:off x="4846320" y="4206240"/>
-            <a:ext cx="4114800" cy="502920"/>
-          </a:xfrm>
-          <a:prstGeom prst="roundRect">
-            <a:avLst/>
-          </a:prstGeom>
-          <a:solidFill>
-            <a:srgbClr val="FEF2F2"/>
-          </a:solidFill>
-          <a:ln/>
-        </p:spPr>
-      </p:sp>
-      <p:sp>
-        <p:nvSpPr>
-          <p:cNvPr id="18" name="Text 16"/>
-          <p:cNvSpPr/>
-          <p:nvPr/>
-        </p:nvSpPr>
-        <p:spPr>
-          <a:xfrm>
-            <a:off x="5029200" y="4297680"/>
-            <a:ext cx="3749040" cy="320040"/>
-          </a:xfrm>
-          <a:prstGeom prst="rect">
-            <a:avLst/>
-          </a:prstGeom>
-          <a:noFill/>
-          <a:ln/>
-        </p:spPr>
-        <p:txBody>
-          <a:bodyPr wrap="square" rtlCol="0" anchor="ctr"/>
-          <a:lstStyle/>
-          <a:p>
-            <a:pPr indent="0" marL="0">
-              <a:buNone/>
-            </a:pPr>
-            <a:r>
-              <a:rPr lang="en-US" sz="1200" dirty="0">
-                <a:solidFill>
-                  <a:srgbClr val="1E2761"/>
-                </a:solidFill>
-                <a:latin typeface="Microsoft YaHei" pitchFamily="34" charset="0"/>
-                <a:ea typeface="Microsoft YaHei" pitchFamily="34" charset="-122"/>
-                <a:cs typeface="Microsoft YaHei" pitchFamily="34" charset="-120"/>
-              </a:rPr>
-              <a:t>🤕 生病住院  动嘴指挥龙虾</a:t>
-            </a:r>
-            <a:endParaRPr lang="en-US" sz="1200" dirty="0"/>
+              <a:rPr lang="en-US" sz="1300" b="1" dirty="0">
+                <a:solidFill>
+                  <a:srgbClr val="FFFFFF"/>
+                </a:solidFill>
+                <a:latin typeface="Microsoft YaHei" pitchFamily="34" charset="0"/>
+                <a:ea typeface="Microsoft YaHei" pitchFamily="34" charset="-122"/>
+                <a:cs typeface="Microsoft YaHei" pitchFamily="34" charset="-120"/>
+              </a:rPr>
+              <a:t>一句话：豆包=问问题 Claude Code=你看着干 OpenClaw=你玩去</a:t>
+            </a:r>
+            <a:endParaRPr lang="en-US" sz="1300" dirty="0"/>
           </a:p>
         </p:txBody>
       </p:sp>
@@ -3848,7 +4409,7 @@
               <a:buNone/>
             </a:pPr>
             <a:r>
-              <a:rPr lang="en-US" sz="1400" b="1" dirty="0">
+              <a:rPr lang="en-US" sz="1300" b="1" dirty="0">
                 <a:solidFill>
                   <a:srgbClr val="1E3A5F"/>
                 </a:solidFill>
@@ -3858,7 +4419,7 @@
               </a:rPr>
               <a:t>官方源码部署</a:t>
             </a:r>
-            <a:endParaRPr lang="en-US" sz="1400" dirty="0"/>
+            <a:endParaRPr lang="en-US" sz="1300" dirty="0"/>
           </a:p>
         </p:txBody>
       </p:sp>
@@ -3887,7 +4448,7 @@
               <a:buNone/>
             </a:pPr>
             <a:r>
-              <a:rPr lang="en-US" sz="1200" dirty="0">
+              <a:rPr lang="en-US" sz="1100" dirty="0">
                 <a:solidFill>
                   <a:srgbClr val="FF6B35"/>
                 </a:solidFill>
@@ -3897,7 +4458,7 @@
               </a:rPr>
               <a:t>⭐⭐⭐</a:t>
             </a:r>
-            <a:endParaRPr lang="en-US" sz="1200" dirty="0"/>
+            <a:endParaRPr lang="en-US" sz="1100" dirty="0"/>
           </a:p>
         </p:txBody>
       </p:sp>
@@ -3910,46 +4471,7 @@
         <p:spPr>
           <a:xfrm>
             <a:off x="4297680" y="2788920"/>
-            <a:ext cx="2286000" cy="365760"/>
-          </a:xfrm>
-          <a:prstGeom prst="rect">
-            <a:avLst/>
-          </a:prstGeom>
-          <a:noFill/>
-          <a:ln/>
-        </p:spPr>
-        <p:txBody>
-          <a:bodyPr wrap="square" rtlCol="0" anchor="ctr"/>
-          <a:lstStyle/>
-          <a:p>
-            <a:pPr indent="0" marL="0">
-              <a:buNone/>
-            </a:pPr>
-            <a:r>
-              <a:rPr lang="en-US" sz="1200" dirty="0">
-                <a:solidFill>
-                  <a:srgbClr val="1E2761"/>
-                </a:solidFill>
-                <a:latin typeface="Microsoft YaHei" pitchFamily="34" charset="0"/>
-                <a:ea typeface="Microsoft YaHei" pitchFamily="34" charset="-122"/>
-                <a:cs typeface="Microsoft YaHei" pitchFamily="34" charset="-120"/>
-              </a:rPr>
-              <a:t>扩展性强，功能全</a:t>
-            </a:r>
-            <a:endParaRPr lang="en-US" sz="1200" dirty="0"/>
-          </a:p>
-        </p:txBody>
-      </p:sp>
-      <p:sp>
-        <p:nvSpPr>
-          <p:cNvPr id="14" name="Text 12"/>
-          <p:cNvSpPr/>
-          <p:nvPr/>
-        </p:nvSpPr>
-        <p:spPr>
-          <a:xfrm>
-            <a:off x="6583680" y="2788920"/>
-            <a:ext cx="1828800" cy="365760"/>
+            <a:ext cx="4114800" cy="365760"/>
           </a:xfrm>
           <a:prstGeom prst="rect">
             <a:avLst/>
@@ -3973,7 +4495,7 @@
                 <a:ea typeface="Microsoft YaHei" pitchFamily="34" charset="-122"/>
                 <a:cs typeface="Microsoft YaHei" pitchFamily="34" charset="-120"/>
               </a:rPr>
-              <a:t>适合: 有技术基础</a:t>
+              <a:t>扩展性强 | 有技术基础</a:t>
             </a:r>
             <a:endParaRPr lang="en-US" sz="1100" dirty="0"/>
           </a:p>
@@ -3981,13 +4503,13 @@
       </p:sp>
       <p:sp>
         <p:nvSpPr>
-          <p:cNvPr id="15" name="Shape 13"/>
-          <p:cNvSpPr/>
-          <p:nvPr/>
-        </p:nvSpPr>
-        <p:spPr>
-          <a:xfrm>
-            <a:off x="457200" y="3291840"/>
+          <p:cNvPr id="14" name="Shape 12"/>
+          <p:cNvSpPr/>
+          <p:nvPr/>
+        </p:nvSpPr>
+        <p:spPr>
+          <a:xfrm>
+            <a:off x="457200" y="3246120"/>
             <a:ext cx="8229600" cy="457200"/>
           </a:xfrm>
           <a:prstGeom prst="rect">
@@ -4001,40 +4523,79 @@
       </p:sp>
       <p:sp>
         <p:nvSpPr>
+          <p:cNvPr id="15" name="Text 13"/>
+          <p:cNvSpPr/>
+          <p:nvPr/>
+        </p:nvSpPr>
+        <p:spPr>
+          <a:xfrm>
+            <a:off x="640080" y="3291840"/>
+            <a:ext cx="2286000" cy="365760"/>
+          </a:xfrm>
+          <a:prstGeom prst="rect">
+            <a:avLst/>
+          </a:prstGeom>
+          <a:noFill/>
+          <a:ln/>
+        </p:spPr>
+        <p:txBody>
+          <a:bodyPr wrap="square" rtlCol="0" anchor="ctr"/>
+          <a:lstStyle/>
+          <a:p>
+            <a:pPr indent="0" marL="0">
+              <a:buNone/>
+            </a:pPr>
+            <a:r>
+              <a:rPr lang="en-US" sz="1300" b="1" dirty="0">
+                <a:solidFill>
+                  <a:srgbClr val="1E3A5F"/>
+                </a:solidFill>
+                <a:latin typeface="Microsoft YaHei" pitchFamily="34" charset="0"/>
+                <a:ea typeface="Microsoft YaHei" pitchFamily="34" charset="-122"/>
+                <a:cs typeface="Microsoft YaHei" pitchFamily="34" charset="-120"/>
+              </a:rPr>
+              <a:t>云服务一键部署</a:t>
+            </a:r>
+            <a:endParaRPr lang="en-US" sz="1300" dirty="0"/>
+          </a:p>
+        </p:txBody>
+      </p:sp>
+      <p:sp>
+        <p:nvSpPr>
           <p:cNvPr id="16" name="Text 14"/>
           <p:cNvSpPr/>
           <p:nvPr/>
         </p:nvSpPr>
         <p:spPr>
           <a:xfrm>
-            <a:off x="640080" y="3337560"/>
-            <a:ext cx="2286000" cy="365760"/>
-          </a:xfrm>
-          <a:prstGeom prst="rect">
-            <a:avLst/>
-          </a:prstGeom>
-          <a:noFill/>
-          <a:ln/>
-        </p:spPr>
-        <p:txBody>
-          <a:bodyPr wrap="square" rtlCol="0" anchor="ctr"/>
-          <a:lstStyle/>
-          <a:p>
-            <a:pPr indent="0" marL="0">
-              <a:buNone/>
-            </a:pPr>
-            <a:r>
-              <a:rPr lang="en-US" sz="1400" b="1" dirty="0">
-                <a:solidFill>
-                  <a:srgbClr val="1E3A5F"/>
-                </a:solidFill>
-                <a:latin typeface="Microsoft YaHei" pitchFamily="34" charset="0"/>
-                <a:ea typeface="Microsoft YaHei" pitchFamily="34" charset="-122"/>
-                <a:cs typeface="Microsoft YaHei" pitchFamily="34" charset="-120"/>
-              </a:rPr>
-              <a:t>云服务一键部署</a:t>
-            </a:r>
-            <a:endParaRPr lang="en-US" sz="1400" dirty="0"/>
+            <a:off x="2926080" y="3291840"/>
+            <a:ext cx="1371600" cy="365760"/>
+          </a:xfrm>
+          <a:prstGeom prst="rect">
+            <a:avLst/>
+          </a:prstGeom>
+          <a:noFill/>
+          <a:ln/>
+        </p:spPr>
+        <p:txBody>
+          <a:bodyPr wrap="square" rtlCol="0" anchor="ctr"/>
+          <a:lstStyle/>
+          <a:p>
+            <a:pPr indent="0" marL="0">
+              <a:buNone/>
+            </a:pPr>
+            <a:r>
+              <a:rPr lang="en-US" sz="1100" dirty="0">
+                <a:solidFill>
+                  <a:srgbClr val="FF6B35"/>
+                </a:solidFill>
+                <a:latin typeface="Microsoft YaHei" pitchFamily="34" charset="0"/>
+                <a:ea typeface="Microsoft YaHei" pitchFamily="34" charset="-122"/>
+                <a:cs typeface="Microsoft YaHei" pitchFamily="34" charset="-120"/>
+              </a:rPr>
+              <a:t>⭐⭐</a:t>
+            </a:r>
+            <a:endParaRPr lang="en-US" sz="1100" dirty="0"/>
           </a:p>
         </p:txBody>
       </p:sp>
@@ -4046,86 +4607,8 @@
         </p:nvSpPr>
         <p:spPr>
           <a:xfrm>
-            <a:off x="2926080" y="3337560"/>
-            <a:ext cx="1371600" cy="365760"/>
-          </a:xfrm>
-          <a:prstGeom prst="rect">
-            <a:avLst/>
-          </a:prstGeom>
-          <a:noFill/>
-          <a:ln/>
-        </p:spPr>
-        <p:txBody>
-          <a:bodyPr wrap="square" rtlCol="0" anchor="ctr"/>
-          <a:lstStyle/>
-          <a:p>
-            <a:pPr indent="0" marL="0">
-              <a:buNone/>
-            </a:pPr>
-            <a:r>
-              <a:rPr lang="en-US" sz="1200" dirty="0">
-                <a:solidFill>
-                  <a:srgbClr val="FF6B35"/>
-                </a:solidFill>
-                <a:latin typeface="Microsoft YaHei" pitchFamily="34" charset="0"/>
-                <a:ea typeface="Microsoft YaHei" pitchFamily="34" charset="-122"/>
-                <a:cs typeface="Microsoft YaHei" pitchFamily="34" charset="-120"/>
-              </a:rPr>
-              <a:t>⭐⭐</a:t>
-            </a:r>
-            <a:endParaRPr lang="en-US" sz="1200" dirty="0"/>
-          </a:p>
-        </p:txBody>
-      </p:sp>
-      <p:sp>
-        <p:nvSpPr>
-          <p:cNvPr id="18" name="Text 16"/>
-          <p:cNvSpPr/>
-          <p:nvPr/>
-        </p:nvSpPr>
-        <p:spPr>
-          <a:xfrm>
-            <a:off x="4297680" y="3337560"/>
-            <a:ext cx="2286000" cy="365760"/>
-          </a:xfrm>
-          <a:prstGeom prst="rect">
-            <a:avLst/>
-          </a:prstGeom>
-          <a:noFill/>
-          <a:ln/>
-        </p:spPr>
-        <p:txBody>
-          <a:bodyPr wrap="square" rtlCol="0" anchor="ctr"/>
-          <a:lstStyle/>
-          <a:p>
-            <a:pPr indent="0" marL="0">
-              <a:buNone/>
-            </a:pPr>
-            <a:r>
-              <a:rPr lang="en-US" sz="1200" dirty="0">
-                <a:solidFill>
-                  <a:srgbClr val="1E2761"/>
-                </a:solidFill>
-                <a:latin typeface="Microsoft YaHei" pitchFamily="34" charset="0"/>
-                <a:ea typeface="Microsoft YaHei" pitchFamily="34" charset="-122"/>
-                <a:cs typeface="Microsoft YaHei" pitchFamily="34" charset="-120"/>
-              </a:rPr>
-              <a:t>门槛低，体验快</a:t>
-            </a:r>
-            <a:endParaRPr lang="en-US" sz="1200" dirty="0"/>
-          </a:p>
-        </p:txBody>
-      </p:sp>
-      <p:sp>
-        <p:nvSpPr>
-          <p:cNvPr id="19" name="Text 17"/>
-          <p:cNvSpPr/>
-          <p:nvPr/>
-        </p:nvSpPr>
-        <p:spPr>
-          <a:xfrm>
-            <a:off x="6583680" y="3337560"/>
-            <a:ext cx="1828800" cy="365760"/>
+            <a:off x="4297680" y="3291840"/>
+            <a:ext cx="4114800" cy="365760"/>
           </a:xfrm>
           <a:prstGeom prst="rect">
             <a:avLst/>
@@ -4149,7 +4632,7 @@
                 <a:ea typeface="Microsoft YaHei" pitchFamily="34" charset="-122"/>
                 <a:cs typeface="Microsoft YaHei" pitchFamily="34" charset="-120"/>
               </a:rPr>
-              <a:t>适合: 想先体验</a:t>
+              <a:t>门槛低 | 想先体验</a:t>
             </a:r>
             <a:endParaRPr lang="en-US" sz="1100" dirty="0"/>
           </a:p>
@@ -4157,13 +4640,13 @@
       </p:sp>
       <p:sp>
         <p:nvSpPr>
-          <p:cNvPr id="20" name="Shape 18"/>
-          <p:cNvSpPr/>
-          <p:nvPr/>
-        </p:nvSpPr>
-        <p:spPr>
-          <a:xfrm>
-            <a:off x="457200" y="3840480"/>
+          <p:cNvPr id="18" name="Shape 16"/>
+          <p:cNvSpPr/>
+          <p:nvPr/>
+        </p:nvSpPr>
+        <p:spPr>
+          <a:xfrm>
+            <a:off x="457200" y="3749040"/>
             <a:ext cx="8229600" cy="457200"/>
           </a:xfrm>
           <a:prstGeom prst="rect">
@@ -4177,131 +4660,92 @@
       </p:sp>
       <p:sp>
         <p:nvSpPr>
+          <p:cNvPr id="19" name="Text 17"/>
+          <p:cNvSpPr/>
+          <p:nvPr/>
+        </p:nvSpPr>
+        <p:spPr>
+          <a:xfrm>
+            <a:off x="640080" y="3794760"/>
+            <a:ext cx="2286000" cy="365760"/>
+          </a:xfrm>
+          <a:prstGeom prst="rect">
+            <a:avLst/>
+          </a:prstGeom>
+          <a:noFill/>
+          <a:ln/>
+        </p:spPr>
+        <p:txBody>
+          <a:bodyPr wrap="square" rtlCol="0" anchor="ctr"/>
+          <a:lstStyle/>
+          <a:p>
+            <a:pPr indent="0" marL="0">
+              <a:buNone/>
+            </a:pPr>
+            <a:r>
+              <a:rPr lang="en-US" sz="1300" b="1" dirty="0">
+                <a:solidFill>
+                  <a:srgbClr val="1E3A5F"/>
+                </a:solidFill>
+                <a:latin typeface="Microsoft YaHei" pitchFamily="34" charset="0"/>
+                <a:ea typeface="Microsoft YaHei" pitchFamily="34" charset="-122"/>
+                <a:cs typeface="Microsoft YaHei" pitchFamily="34" charset="-120"/>
+              </a:rPr>
+              <a:t>App/第三方</a:t>
+            </a:r>
+            <a:endParaRPr lang="en-US" sz="1300" dirty="0"/>
+          </a:p>
+        </p:txBody>
+      </p:sp>
+      <p:sp>
+        <p:nvSpPr>
+          <p:cNvPr id="20" name="Text 18"/>
+          <p:cNvSpPr/>
+          <p:nvPr/>
+        </p:nvSpPr>
+        <p:spPr>
+          <a:xfrm>
+            <a:off x="2926080" y="3794760"/>
+            <a:ext cx="1371600" cy="365760"/>
+          </a:xfrm>
+          <a:prstGeom prst="rect">
+            <a:avLst/>
+          </a:prstGeom>
+          <a:noFill/>
+          <a:ln/>
+        </p:spPr>
+        <p:txBody>
+          <a:bodyPr wrap="square" rtlCol="0" anchor="ctr"/>
+          <a:lstStyle/>
+          <a:p>
+            <a:pPr indent="0" marL="0">
+              <a:buNone/>
+            </a:pPr>
+            <a:r>
+              <a:rPr lang="en-US" sz="1100" dirty="0">
+                <a:solidFill>
+                  <a:srgbClr val="FF6B35"/>
+                </a:solidFill>
+                <a:latin typeface="Microsoft YaHei" pitchFamily="34" charset="0"/>
+                <a:ea typeface="Microsoft YaHei" pitchFamily="34" charset="-122"/>
+                <a:cs typeface="Microsoft YaHei" pitchFamily="34" charset="-120"/>
+              </a:rPr>
+              <a:t>⭐</a:t>
+            </a:r>
+            <a:endParaRPr lang="en-US" sz="1100" dirty="0"/>
+          </a:p>
+        </p:txBody>
+      </p:sp>
+      <p:sp>
+        <p:nvSpPr>
           <p:cNvPr id="21" name="Text 19"/>
           <p:cNvSpPr/>
           <p:nvPr/>
         </p:nvSpPr>
         <p:spPr>
           <a:xfrm>
-            <a:off x="640080" y="3886200"/>
-            <a:ext cx="2286000" cy="365760"/>
-          </a:xfrm>
-          <a:prstGeom prst="rect">
-            <a:avLst/>
-          </a:prstGeom>
-          <a:noFill/>
-          <a:ln/>
-        </p:spPr>
-        <p:txBody>
-          <a:bodyPr wrap="square" rtlCol="0" anchor="ctr"/>
-          <a:lstStyle/>
-          <a:p>
-            <a:pPr indent="0" marL="0">
-              <a:buNone/>
-            </a:pPr>
-            <a:r>
-              <a:rPr lang="en-US" sz="1400" b="1" dirty="0">
-                <a:solidFill>
-                  <a:srgbClr val="1E3A5F"/>
-                </a:solidFill>
-                <a:latin typeface="Microsoft YaHei" pitchFamily="34" charset="0"/>
-                <a:ea typeface="Microsoft YaHei" pitchFamily="34" charset="-122"/>
-                <a:cs typeface="Microsoft YaHei" pitchFamily="34" charset="-120"/>
-              </a:rPr>
-              <a:t>App/第三方</a:t>
-            </a:r>
-            <a:endParaRPr lang="en-US" sz="1400" dirty="0"/>
-          </a:p>
-        </p:txBody>
-      </p:sp>
-      <p:sp>
-        <p:nvSpPr>
-          <p:cNvPr id="22" name="Text 20"/>
-          <p:cNvSpPr/>
-          <p:nvPr/>
-        </p:nvSpPr>
-        <p:spPr>
-          <a:xfrm>
-            <a:off x="2926080" y="3886200"/>
-            <a:ext cx="1371600" cy="365760"/>
-          </a:xfrm>
-          <a:prstGeom prst="rect">
-            <a:avLst/>
-          </a:prstGeom>
-          <a:noFill/>
-          <a:ln/>
-        </p:spPr>
-        <p:txBody>
-          <a:bodyPr wrap="square" rtlCol="0" anchor="ctr"/>
-          <a:lstStyle/>
-          <a:p>
-            <a:pPr indent="0" marL="0">
-              <a:buNone/>
-            </a:pPr>
-            <a:r>
-              <a:rPr lang="en-US" sz="1200" dirty="0">
-                <a:solidFill>
-                  <a:srgbClr val="FF6B35"/>
-                </a:solidFill>
-                <a:latin typeface="Microsoft YaHei" pitchFamily="34" charset="0"/>
-                <a:ea typeface="Microsoft YaHei" pitchFamily="34" charset="-122"/>
-                <a:cs typeface="Microsoft YaHei" pitchFamily="34" charset="-120"/>
-              </a:rPr>
-              <a:t>⭐</a:t>
-            </a:r>
-            <a:endParaRPr lang="en-US" sz="1200" dirty="0"/>
-          </a:p>
-        </p:txBody>
-      </p:sp>
-      <p:sp>
-        <p:nvSpPr>
-          <p:cNvPr id="23" name="Text 21"/>
-          <p:cNvSpPr/>
-          <p:nvPr/>
-        </p:nvSpPr>
-        <p:spPr>
-          <a:xfrm>
-            <a:off x="4297680" y="3886200"/>
-            <a:ext cx="2286000" cy="365760"/>
-          </a:xfrm>
-          <a:prstGeom prst="rect">
-            <a:avLst/>
-          </a:prstGeom>
-          <a:noFill/>
-          <a:ln/>
-        </p:spPr>
-        <p:txBody>
-          <a:bodyPr wrap="square" rtlCol="0" anchor="ctr"/>
-          <a:lstStyle/>
-          <a:p>
-            <a:pPr indent="0" marL="0">
-              <a:buNone/>
-            </a:pPr>
-            <a:r>
-              <a:rPr lang="en-US" sz="1200" dirty="0">
-                <a:solidFill>
-                  <a:srgbClr val="1E2761"/>
-                </a:solidFill>
-                <a:latin typeface="Microsoft YaHei" pitchFamily="34" charset="0"/>
-                <a:ea typeface="Microsoft YaHei" pitchFamily="34" charset="-122"/>
-                <a:cs typeface="Microsoft YaHei" pitchFamily="34" charset="-120"/>
-              </a:rPr>
-              <a:t>下载即用</a:t>
-            </a:r>
-            <a:endParaRPr lang="en-US" sz="1200" dirty="0"/>
-          </a:p>
-        </p:txBody>
-      </p:sp>
-      <p:sp>
-        <p:nvSpPr>
-          <p:cNvPr id="24" name="Text 22"/>
-          <p:cNvSpPr/>
-          <p:nvPr/>
-        </p:nvSpPr>
-        <p:spPr>
-          <a:xfrm>
-            <a:off x="6583680" y="3886200"/>
-            <a:ext cx="1828800" cy="365760"/>
+            <a:off x="4297680" y="3794760"/>
+            <a:ext cx="4114800" cy="365760"/>
           </a:xfrm>
           <a:prstGeom prst="rect">
             <a:avLst/>
@@ -4325,7 +4769,7 @@
                 <a:ea typeface="Microsoft YaHei" pitchFamily="34" charset="-122"/>
                 <a:cs typeface="Microsoft YaHei" pitchFamily="34" charset="-120"/>
               </a:rPr>
-              <a:t>适合: 纯小白</a:t>
+              <a:t>下载即用 | 纯小白</a:t>
             </a:r>
             <a:endParaRPr lang="en-US" sz="1100" dirty="0"/>
           </a:p>
@@ -4410,24 +4854,24 @@
         </p:nvSpPr>
         <p:spPr>
           <a:xfrm>
-            <a:off x="457200" y="1097280"/>
-            <a:ext cx="8229600" cy="365760"/>
-          </a:xfrm>
-          <a:prstGeom prst="rect">
-            <a:avLst/>
-          </a:prstGeom>
-          <a:noFill/>
-          <a:ln/>
-        </p:spPr>
-        <p:txBody>
-          <a:bodyPr wrap="square" rtlCol="0" anchor="ctr"/>
-          <a:lstStyle/>
-          <a:p>
-            <a:pPr indent="0" marL="0">
-              <a:buNone/>
-            </a:pPr>
-            <a:r>
-              <a:rPr lang="en-US" sz="1600" b="1" dirty="0">
+            <a:off x="457200" y="1005840"/>
+            <a:ext cx="3840480" cy="320040"/>
+          </a:xfrm>
+          <a:prstGeom prst="rect">
+            <a:avLst/>
+          </a:prstGeom>
+          <a:noFill/>
+          <a:ln/>
+        </p:spPr>
+        <p:txBody>
+          <a:bodyPr wrap="square" rtlCol="0" anchor="ctr"/>
+          <a:lstStyle/>
+          <a:p>
+            <a:pPr indent="0" marL="0">
+              <a:buNone/>
+            </a:pPr>
+            <a:r>
+              <a:rPr lang="en-US" sz="1400" b="1" dirty="0">
                 <a:solidFill>
                   <a:srgbClr val="3D7EAA"/>
                 </a:solidFill>
@@ -4437,7 +4881,7 @@
               </a:rPr>
               <a:t>明线：龙虾怎么用</a:t>
             </a:r>
-            <a:endParaRPr lang="en-US" sz="1600" dirty="0"/>
+            <a:endParaRPr lang="en-US" sz="1400" dirty="0"/>
           </a:p>
         </p:txBody>
       </p:sp>
@@ -4449,8 +4893,8 @@
         </p:nvSpPr>
         <p:spPr>
           <a:xfrm>
-            <a:off x="457200" y="1554480"/>
-            <a:ext cx="3840480" cy="411480"/>
+            <a:off x="457200" y="1371600"/>
+            <a:ext cx="3840480" cy="384048"/>
           </a:xfrm>
           <a:prstGeom prst="rect">
             <a:avLst/>
@@ -4469,24 +4913,24 @@
         </p:nvSpPr>
         <p:spPr>
           <a:xfrm>
-            <a:off x="548640" y="1645920"/>
-            <a:ext cx="1828800" cy="274320"/>
-          </a:xfrm>
-          <a:prstGeom prst="rect">
-            <a:avLst/>
-          </a:prstGeom>
-          <a:noFill/>
-          <a:ln/>
-        </p:spPr>
-        <p:txBody>
-          <a:bodyPr wrap="square" rtlCol="0" anchor="ctr"/>
-          <a:lstStyle/>
-          <a:p>
-            <a:pPr indent="0" marL="0">
-              <a:buNone/>
-            </a:pPr>
-            <a:r>
-              <a:rPr lang="en-US" sz="1200" b="1" dirty="0">
+            <a:off x="548640" y="1463040"/>
+            <a:ext cx="2286000" cy="228600"/>
+          </a:xfrm>
+          <a:prstGeom prst="rect">
+            <a:avLst/>
+          </a:prstGeom>
+          <a:noFill/>
+          <a:ln/>
+        </p:spPr>
+        <p:txBody>
+          <a:bodyPr wrap="square" rtlCol="0" anchor="ctr"/>
+          <a:lstStyle/>
+          <a:p>
+            <a:pPr indent="0" marL="0">
+              <a:buNone/>
+            </a:pPr>
+            <a:r>
+              <a:rPr lang="en-US" sz="1100" b="1" dirty="0">
                 <a:solidFill>
                   <a:srgbClr val="1E2761"/>
                 </a:solidFill>
@@ -4496,7 +4940,7 @@
               </a:rPr>
               <a:t>8个AI同事协同</a:t>
             </a:r>
-            <a:endParaRPr lang="en-US" sz="1200" dirty="0"/>
+            <a:endParaRPr lang="en-US" sz="1100" dirty="0"/>
           </a:p>
         </p:txBody>
       </p:sp>
@@ -4508,24 +4952,24 @@
         </p:nvSpPr>
         <p:spPr>
           <a:xfrm>
-            <a:off x="2377440" y="1645920"/>
-            <a:ext cx="1828800" cy="274320"/>
-          </a:xfrm>
-          <a:prstGeom prst="rect">
-            <a:avLst/>
-          </a:prstGeom>
-          <a:noFill/>
-          <a:ln/>
-        </p:spPr>
-        <p:txBody>
-          <a:bodyPr wrap="square" rtlCol="0" anchor="ctr"/>
-          <a:lstStyle/>
-          <a:p>
-            <a:pPr indent="0" marL="0">
-              <a:buNone/>
-            </a:pPr>
-            <a:r>
-              <a:rPr lang="en-US" sz="1100" dirty="0">
+            <a:off x="2834640" y="1463040"/>
+            <a:ext cx="1371600" cy="228600"/>
+          </a:xfrm>
+          <a:prstGeom prst="rect">
+            <a:avLst/>
+          </a:prstGeom>
+          <a:noFill/>
+          <a:ln/>
+        </p:spPr>
+        <p:txBody>
+          <a:bodyPr wrap="square" rtlCol="0" anchor="ctr"/>
+          <a:lstStyle/>
+          <a:p>
+            <a:pPr indent="0" marL="0">
+              <a:buNone/>
+            </a:pPr>
+            <a:r>
+              <a:rPr lang="en-US" sz="1000" dirty="0">
                 <a:solidFill>
                   <a:srgbClr val="6B7280"/>
                 </a:solidFill>
@@ -4533,9 +4977,9 @@
                 <a:ea typeface="Microsoft YaHei" pitchFamily="34" charset="-122"/>
                 <a:cs typeface="Microsoft YaHei" pitchFamily="34" charset="-120"/>
               </a:rPr>
-              <a:t>不同技能分工合作</a:t>
-            </a:r>
-            <a:endParaRPr lang="en-US" sz="1100" dirty="0"/>
+              <a:t>分工合作</a:t>
+            </a:r>
+            <a:endParaRPr lang="en-US" sz="1000" dirty="0"/>
           </a:p>
         </p:txBody>
       </p:sp>
@@ -4547,8 +4991,8 @@
         </p:nvSpPr>
         <p:spPr>
           <a:xfrm>
-            <a:off x="457200" y="2057400"/>
-            <a:ext cx="3840480" cy="411480"/>
+            <a:off x="457200" y="1828800"/>
+            <a:ext cx="3840480" cy="384048"/>
           </a:xfrm>
           <a:prstGeom prst="rect">
             <a:avLst/>
@@ -4567,24 +5011,24 @@
         </p:nvSpPr>
         <p:spPr>
           <a:xfrm>
-            <a:off x="548640" y="2148840"/>
-            <a:ext cx="1828800" cy="274320"/>
-          </a:xfrm>
-          <a:prstGeom prst="rect">
-            <a:avLst/>
-          </a:prstGeom>
-          <a:noFill/>
-          <a:ln/>
-        </p:spPr>
-        <p:txBody>
-          <a:bodyPr wrap="square" rtlCol="0" anchor="ctr"/>
-          <a:lstStyle/>
-          <a:p>
-            <a:pPr indent="0" marL="0">
-              <a:buNone/>
-            </a:pPr>
-            <a:r>
-              <a:rPr lang="en-US" sz="1200" b="1" dirty="0">
+            <a:off x="548640" y="1920240"/>
+            <a:ext cx="2286000" cy="228600"/>
+          </a:xfrm>
+          <a:prstGeom prst="rect">
+            <a:avLst/>
+          </a:prstGeom>
+          <a:noFill/>
+          <a:ln/>
+        </p:spPr>
+        <p:txBody>
+          <a:bodyPr wrap="square" rtlCol="0" anchor="ctr"/>
+          <a:lstStyle/>
+          <a:p>
+            <a:pPr indent="0" marL="0">
+              <a:buNone/>
+            </a:pPr>
+            <a:r>
+              <a:rPr lang="en-US" sz="1100" b="1" dirty="0">
                 <a:solidFill>
                   <a:srgbClr val="1E2761"/>
                 </a:solidFill>
@@ -4594,7 +5038,7 @@
               </a:rPr>
               <a:t>48小时139技能</a:t>
             </a:r>
-            <a:endParaRPr lang="en-US" sz="1200" dirty="0"/>
+            <a:endParaRPr lang="en-US" sz="1100" dirty="0"/>
           </a:p>
         </p:txBody>
       </p:sp>
@@ -4606,24 +5050,24 @@
         </p:nvSpPr>
         <p:spPr>
           <a:xfrm>
-            <a:off x="2377440" y="2148840"/>
-            <a:ext cx="1828800" cy="274320"/>
-          </a:xfrm>
-          <a:prstGeom prst="rect">
-            <a:avLst/>
-          </a:prstGeom>
-          <a:noFill/>
-          <a:ln/>
-        </p:spPr>
-        <p:txBody>
-          <a:bodyPr wrap="square" rtlCol="0" anchor="ctr"/>
-          <a:lstStyle/>
-          <a:p>
-            <a:pPr indent="0" marL="0">
-              <a:buNone/>
-            </a:pPr>
-            <a:r>
-              <a:rPr lang="en-US" sz="1100" dirty="0">
+            <a:off x="2834640" y="1920240"/>
+            <a:ext cx="1371600" cy="228600"/>
+          </a:xfrm>
+          <a:prstGeom prst="rect">
+            <a:avLst/>
+          </a:prstGeom>
+          <a:noFill/>
+          <a:ln/>
+        </p:spPr>
+        <p:txBody>
+          <a:bodyPr wrap="square" rtlCol="0" anchor="ctr"/>
+          <a:lstStyle/>
+          <a:p>
+            <a:pPr indent="0" marL="0">
+              <a:buNone/>
+            </a:pPr>
+            <a:r>
+              <a:rPr lang="en-US" sz="1000" dirty="0">
                 <a:solidFill>
                   <a:srgbClr val="6B7280"/>
                 </a:solidFill>
@@ -4631,9 +5075,9 @@
                 <a:ea typeface="Microsoft YaHei" pitchFamily="34" charset="-122"/>
                 <a:cs typeface="Microsoft YaHei" pitchFamily="34" charset="-120"/>
               </a:rPr>
-              <a:t>低成本快速验证</a:t>
-            </a:r>
-            <a:endParaRPr lang="en-US" sz="1100" dirty="0"/>
+              <a:t>快速验证</a:t>
+            </a:r>
+            <a:endParaRPr lang="en-US" sz="1000" dirty="0"/>
           </a:p>
         </p:txBody>
       </p:sp>
@@ -4645,8 +5089,8 @@
         </p:nvSpPr>
         <p:spPr>
           <a:xfrm>
-            <a:off x="457200" y="2560320"/>
-            <a:ext cx="3840480" cy="411480"/>
+            <a:off x="457200" y="2286000"/>
+            <a:ext cx="3840480" cy="384048"/>
           </a:xfrm>
           <a:prstGeom prst="rect">
             <a:avLst/>
@@ -4665,24 +5109,24 @@
         </p:nvSpPr>
         <p:spPr>
           <a:xfrm>
-            <a:off x="548640" y="2651760"/>
-            <a:ext cx="1828800" cy="274320"/>
-          </a:xfrm>
-          <a:prstGeom prst="rect">
-            <a:avLst/>
-          </a:prstGeom>
-          <a:noFill/>
-          <a:ln/>
-        </p:spPr>
-        <p:txBody>
-          <a:bodyPr wrap="square" rtlCol="0" anchor="ctr"/>
-          <a:lstStyle/>
-          <a:p>
-            <a:pPr indent="0" marL="0">
-              <a:buNone/>
-            </a:pPr>
-            <a:r>
-              <a:rPr lang="en-US" sz="1200" b="1" dirty="0">
+            <a:off x="548640" y="2377440"/>
+            <a:ext cx="2286000" cy="228600"/>
+          </a:xfrm>
+          <a:prstGeom prst="rect">
+            <a:avLst/>
+          </a:prstGeom>
+          <a:noFill/>
+          <a:ln/>
+        </p:spPr>
+        <p:txBody>
+          <a:bodyPr wrap="square" rtlCol="0" anchor="ctr"/>
+          <a:lstStyle/>
+          <a:p>
+            <a:pPr indent="0" marL="0">
+              <a:buNone/>
+            </a:pPr>
+            <a:r>
+              <a:rPr lang="en-US" sz="1100" b="1" dirty="0">
                 <a:solidFill>
                   <a:srgbClr val="1E2761"/>
                 </a:solidFill>
@@ -4692,7 +5136,7 @@
               </a:rPr>
               <a:t>健康管家</a:t>
             </a:r>
-            <a:endParaRPr lang="en-US" sz="1200" dirty="0"/>
+            <a:endParaRPr lang="en-US" sz="1100" dirty="0"/>
           </a:p>
         </p:txBody>
       </p:sp>
@@ -4704,24 +5148,24 @@
         </p:nvSpPr>
         <p:spPr>
           <a:xfrm>
-            <a:off x="2377440" y="2651760"/>
-            <a:ext cx="1828800" cy="274320"/>
-          </a:xfrm>
-          <a:prstGeom prst="rect">
-            <a:avLst/>
-          </a:prstGeom>
-          <a:noFill/>
-          <a:ln/>
-        </p:spPr>
-        <p:txBody>
-          <a:bodyPr wrap="square" rtlCol="0" anchor="ctr"/>
-          <a:lstStyle/>
-          <a:p>
-            <a:pPr indent="0" marL="0">
-              <a:buNone/>
-            </a:pPr>
-            <a:r>
-              <a:rPr lang="en-US" sz="1100" dirty="0">
+            <a:off x="2834640" y="2377440"/>
+            <a:ext cx="1371600" cy="228600"/>
+          </a:xfrm>
+          <a:prstGeom prst="rect">
+            <a:avLst/>
+          </a:prstGeom>
+          <a:noFill/>
+          <a:ln/>
+        </p:spPr>
+        <p:txBody>
+          <a:bodyPr wrap="square" rtlCol="0" anchor="ctr"/>
+          <a:lstStyle/>
+          <a:p>
+            <a:pPr indent="0" marL="0">
+              <a:buNone/>
+            </a:pPr>
+            <a:r>
+              <a:rPr lang="en-US" sz="1000" dirty="0">
                 <a:solidFill>
                   <a:srgbClr val="6B7280"/>
                 </a:solidFill>
@@ -4729,9 +5173,9 @@
                 <a:ea typeface="Microsoft YaHei" pitchFamily="34" charset="-122"/>
                 <a:cs typeface="Microsoft YaHei" pitchFamily="34" charset="-120"/>
               </a:rPr>
-              <a:t>监督康复日程</a:t>
-            </a:r>
-            <a:endParaRPr lang="en-US" sz="1100" dirty="0"/>
+              <a:t>监督康复</a:t>
+            </a:r>
+            <a:endParaRPr lang="en-US" sz="1000" dirty="0"/>
           </a:p>
         </p:txBody>
       </p:sp>
@@ -4743,8 +5187,8 @@
         </p:nvSpPr>
         <p:spPr>
           <a:xfrm>
-            <a:off x="457200" y="3063240"/>
-            <a:ext cx="3840480" cy="411480"/>
+            <a:off x="457200" y="2743200"/>
+            <a:ext cx="3840480" cy="384048"/>
           </a:xfrm>
           <a:prstGeom prst="rect">
             <a:avLst/>
@@ -4763,24 +5207,24 @@
         </p:nvSpPr>
         <p:spPr>
           <a:xfrm>
-            <a:off x="548640" y="3154680"/>
-            <a:ext cx="1828800" cy="274320"/>
-          </a:xfrm>
-          <a:prstGeom prst="rect">
-            <a:avLst/>
-          </a:prstGeom>
-          <a:noFill/>
-          <a:ln/>
-        </p:spPr>
-        <p:txBody>
-          <a:bodyPr wrap="square" rtlCol="0" anchor="ctr"/>
-          <a:lstStyle/>
-          <a:p>
-            <a:pPr indent="0" marL="0">
-              <a:buNone/>
-            </a:pPr>
-            <a:r>
-              <a:rPr lang="en-US" sz="1200" b="1" dirty="0">
+            <a:off x="548640" y="2834640"/>
+            <a:ext cx="2286000" cy="228600"/>
+          </a:xfrm>
+          <a:prstGeom prst="rect">
+            <a:avLst/>
+          </a:prstGeom>
+          <a:noFill/>
+          <a:ln/>
+        </p:spPr>
+        <p:txBody>
+          <a:bodyPr wrap="square" rtlCol="0" anchor="ctr"/>
+          <a:lstStyle/>
+          <a:p>
+            <a:pPr indent="0" marL="0">
+              <a:buNone/>
+            </a:pPr>
+            <a:r>
+              <a:rPr lang="en-US" sz="1100" b="1" dirty="0">
                 <a:solidFill>
                   <a:srgbClr val="1E2761"/>
                 </a:solidFill>
@@ -4790,7 +5234,7 @@
               </a:rPr>
               <a:t>交易官</a:t>
             </a:r>
-            <a:endParaRPr lang="en-US" sz="1200" dirty="0"/>
+            <a:endParaRPr lang="en-US" sz="1100" dirty="0"/>
           </a:p>
         </p:txBody>
       </p:sp>
@@ -4802,24 +5246,24 @@
         </p:nvSpPr>
         <p:spPr>
           <a:xfrm>
-            <a:off x="2377440" y="3154680"/>
-            <a:ext cx="1828800" cy="274320"/>
-          </a:xfrm>
-          <a:prstGeom prst="rect">
-            <a:avLst/>
-          </a:prstGeom>
-          <a:noFill/>
-          <a:ln/>
-        </p:spPr>
-        <p:txBody>
-          <a:bodyPr wrap="square" rtlCol="0" anchor="ctr"/>
-          <a:lstStyle/>
-          <a:p>
-            <a:pPr indent="0" marL="0">
-              <a:buNone/>
-            </a:pPr>
-            <a:r>
-              <a:rPr lang="en-US" sz="1100" dirty="0">
+            <a:off x="2834640" y="2834640"/>
+            <a:ext cx="1371600" cy="228600"/>
+          </a:xfrm>
+          <a:prstGeom prst="rect">
+            <a:avLst/>
+          </a:prstGeom>
+          <a:noFill/>
+          <a:ln/>
+        </p:spPr>
+        <p:txBody>
+          <a:bodyPr wrap="square" rtlCol="0" anchor="ctr"/>
+          <a:lstStyle/>
+          <a:p>
+            <a:pPr indent="0" marL="0">
+              <a:buNone/>
+            </a:pPr>
+            <a:r>
+              <a:rPr lang="en-US" sz="1000" dirty="0">
                 <a:solidFill>
                   <a:srgbClr val="6B7280"/>
                 </a:solidFill>
@@ -4827,136 +5271,38 @@
                 <a:ea typeface="Microsoft YaHei" pitchFamily="34" charset="-122"/>
                 <a:cs typeface="Microsoft YaHei" pitchFamily="34" charset="-120"/>
               </a:rPr>
-              <a:t>7x24小时分析</a:t>
-            </a:r>
-            <a:endParaRPr lang="en-US" sz="1100" dirty="0"/>
-          </a:p>
-        </p:txBody>
-      </p:sp>
-      <p:sp>
-        <p:nvSpPr>
-          <p:cNvPr id="16" name="Shape 14"/>
-          <p:cNvSpPr/>
-          <p:nvPr/>
-        </p:nvSpPr>
-        <p:spPr>
-          <a:xfrm>
-            <a:off x="457200" y="3566160"/>
-            <a:ext cx="3840480" cy="411480"/>
-          </a:xfrm>
-          <a:prstGeom prst="rect">
-            <a:avLst/>
-          </a:prstGeom>
-          <a:solidFill>
-            <a:srgbClr val="FEF3C7"/>
-          </a:solidFill>
-          <a:ln/>
-        </p:spPr>
-      </p:sp>
-      <p:sp>
-        <p:nvSpPr>
-          <p:cNvPr id="17" name="Text 15"/>
-          <p:cNvSpPr/>
-          <p:nvPr/>
-        </p:nvSpPr>
-        <p:spPr>
-          <a:xfrm>
-            <a:off x="548640" y="3657600"/>
-            <a:ext cx="1828800" cy="274320"/>
-          </a:xfrm>
-          <a:prstGeom prst="rect">
-            <a:avLst/>
-          </a:prstGeom>
-          <a:noFill/>
-          <a:ln/>
-        </p:spPr>
-        <p:txBody>
-          <a:bodyPr wrap="square" rtlCol="0" anchor="ctr"/>
-          <a:lstStyle/>
-          <a:p>
-            <a:pPr indent="0" marL="0">
-              <a:buNone/>
-            </a:pPr>
-            <a:r>
-              <a:rPr lang="en-US" sz="1200" b="1" dirty="0">
-                <a:solidFill>
-                  <a:srgbClr val="1E2761"/>
-                </a:solidFill>
-                <a:latin typeface="Microsoft YaHei" pitchFamily="34" charset="0"/>
-                <a:ea typeface="Microsoft YaHei" pitchFamily="34" charset="-122"/>
-                <a:cs typeface="Microsoft YaHei" pitchFamily="34" charset="-120"/>
-              </a:rPr>
-              <a:t>初中生都能用</a:t>
-            </a:r>
-            <a:endParaRPr lang="en-US" sz="1200" dirty="0"/>
-          </a:p>
-        </p:txBody>
-      </p:sp>
-      <p:sp>
-        <p:nvSpPr>
-          <p:cNvPr id="18" name="Text 16"/>
-          <p:cNvSpPr/>
-          <p:nvPr/>
-        </p:nvSpPr>
-        <p:spPr>
-          <a:xfrm>
-            <a:off x="2377440" y="3657600"/>
-            <a:ext cx="1828800" cy="274320"/>
-          </a:xfrm>
-          <a:prstGeom prst="rect">
-            <a:avLst/>
-          </a:prstGeom>
-          <a:noFill/>
-          <a:ln/>
-        </p:spPr>
-        <p:txBody>
-          <a:bodyPr wrap="square" rtlCol="0" anchor="ctr"/>
-          <a:lstStyle/>
-          <a:p>
-            <a:pPr indent="0" marL="0">
-              <a:buNone/>
-            </a:pPr>
-            <a:r>
-              <a:rPr lang="en-US" sz="1100" dirty="0">
-                <a:solidFill>
-                  <a:srgbClr val="6B7280"/>
-                </a:solidFill>
-                <a:latin typeface="Microsoft YaHei" pitchFamily="34" charset="0"/>
-                <a:ea typeface="Microsoft YaHei" pitchFamily="34" charset="-122"/>
-                <a:cs typeface="Microsoft YaHei" pitchFamily="34" charset="-120"/>
-              </a:rPr>
-              <a:t>降低门槛</a:t>
-            </a:r>
-            <a:endParaRPr lang="en-US" sz="1100" dirty="0"/>
-          </a:p>
-        </p:txBody>
-      </p:sp>
-      <p:sp>
-        <p:nvSpPr>
-          <p:cNvPr id="19" name="Text 17"/>
-          <p:cNvSpPr/>
-          <p:nvPr/>
-        </p:nvSpPr>
-        <p:spPr>
-          <a:xfrm>
-            <a:off x="4846320" y="1097280"/>
-            <a:ext cx="3840480" cy="365760"/>
-          </a:xfrm>
-          <a:prstGeom prst="rect">
-            <a:avLst/>
-          </a:prstGeom>
-          <a:noFill/>
-          <a:ln/>
-        </p:spPr>
-        <p:txBody>
-          <a:bodyPr wrap="square" rtlCol="0" anchor="ctr"/>
-          <a:lstStyle/>
-          <a:p>
-            <a:pPr indent="0" marL="0">
-              <a:buNone/>
-            </a:pPr>
-            <a:r>
-              <a:rPr lang="en-US" sz="1600" b="1" dirty="0">
+              <a:t>7x24分析</a:t>
+            </a:r>
+            <a:endParaRPr lang="en-US" sz="1000" dirty="0"/>
+          </a:p>
+        </p:txBody>
+      </p:sp>
+      <p:sp>
+        <p:nvSpPr>
+          <p:cNvPr id="16" name="Text 14"/>
+          <p:cNvSpPr/>
+          <p:nvPr/>
+        </p:nvSpPr>
+        <p:spPr>
+          <a:xfrm>
+            <a:off x="4846320" y="1005840"/>
+            <a:ext cx="3840480" cy="320040"/>
+          </a:xfrm>
+          <a:prstGeom prst="rect">
+            <a:avLst/>
+          </a:prstGeom>
+          <a:noFill/>
+          <a:ln/>
+        </p:spPr>
+        <p:txBody>
+          <a:bodyPr wrap="square" rtlCol="0" anchor="ctr"/>
+          <a:lstStyle/>
+          <a:p>
+            <a:pPr indent="0" marL="0">
+              <a:buNone/>
+            </a:pPr>
+            <a:r>
+              <a:rPr lang="en-US" sz="1400" b="1" dirty="0">
                 <a:solidFill>
                   <a:srgbClr val="3D7EAA"/>
                 </a:solidFill>
@@ -4966,20 +5312,20 @@
               </a:rPr>
               <a:t>暗线：营销手法</a:t>
             </a:r>
-            <a:endParaRPr lang="en-US" sz="1600" dirty="0"/>
-          </a:p>
-        </p:txBody>
-      </p:sp>
-      <p:sp>
-        <p:nvSpPr>
-          <p:cNvPr id="20" name="Shape 18"/>
-          <p:cNvSpPr/>
-          <p:nvPr/>
-        </p:nvSpPr>
-        <p:spPr>
-          <a:xfrm>
-            <a:off x="4846320" y="1554480"/>
-            <a:ext cx="3840480" cy="411480"/>
+            <a:endParaRPr lang="en-US" sz="1400" dirty="0"/>
+          </a:p>
+        </p:txBody>
+      </p:sp>
+      <p:sp>
+        <p:nvSpPr>
+          <p:cNvPr id="17" name="Shape 15"/>
+          <p:cNvSpPr/>
+          <p:nvPr/>
+        </p:nvSpPr>
+        <p:spPr>
+          <a:xfrm>
+            <a:off x="4846320" y="1371600"/>
+            <a:ext cx="3840480" cy="384048"/>
           </a:xfrm>
           <a:prstGeom prst="rect">
             <a:avLst/>
@@ -4992,30 +5338,30 @@
       </p:sp>
       <p:sp>
         <p:nvSpPr>
-          <p:cNvPr id="21" name="Text 19"/>
-          <p:cNvSpPr/>
-          <p:nvPr/>
-        </p:nvSpPr>
-        <p:spPr>
-          <a:xfrm>
-            <a:off x="4937760" y="1645920"/>
-            <a:ext cx="1828800" cy="274320"/>
-          </a:xfrm>
-          <a:prstGeom prst="rect">
-            <a:avLst/>
-          </a:prstGeom>
-          <a:noFill/>
-          <a:ln/>
-        </p:spPr>
-        <p:txBody>
-          <a:bodyPr wrap="square" rtlCol="0" anchor="ctr"/>
-          <a:lstStyle/>
-          <a:p>
-            <a:pPr indent="0" marL="0">
-              <a:buNone/>
-            </a:pPr>
-            <a:r>
-              <a:rPr lang="en-US" sz="1200" b="1" dirty="0">
+          <p:cNvPr id="18" name="Text 16"/>
+          <p:cNvSpPr/>
+          <p:nvPr/>
+        </p:nvSpPr>
+        <p:spPr>
+          <a:xfrm>
+            <a:off x="4937760" y="1463040"/>
+            <a:ext cx="2286000" cy="228600"/>
+          </a:xfrm>
+          <a:prstGeom prst="rect">
+            <a:avLst/>
+          </a:prstGeom>
+          <a:noFill/>
+          <a:ln/>
+        </p:spPr>
+        <p:txBody>
+          <a:bodyPr wrap="square" rtlCol="0" anchor="ctr"/>
+          <a:lstStyle/>
+          <a:p>
+            <a:pPr indent="0" marL="0">
+              <a:buNone/>
+            </a:pPr>
+            <a:r>
+              <a:rPr lang="en-US" sz="1100" b="1" dirty="0">
                 <a:solidFill>
                   <a:srgbClr val="1E2761"/>
                 </a:solidFill>
@@ -5023,38 +5369,38 @@
                 <a:ea typeface="Microsoft YaHei" pitchFamily="34" charset="-122"/>
                 <a:cs typeface="Microsoft YaHei" pitchFamily="34" charset="-120"/>
               </a:rPr>
-              <a:t>讲故事 &gt; 讲功能</a:t>
-            </a:r>
-            <a:endParaRPr lang="en-US" sz="1200" dirty="0"/>
-          </a:p>
-        </p:txBody>
-      </p:sp>
-      <p:sp>
-        <p:nvSpPr>
-          <p:cNvPr id="22" name="Text 20"/>
-          <p:cNvSpPr/>
-          <p:nvPr/>
-        </p:nvSpPr>
-        <p:spPr>
-          <a:xfrm>
-            <a:off x="6766560" y="1645920"/>
-            <a:ext cx="1828800" cy="274320"/>
-          </a:xfrm>
-          <a:prstGeom prst="rect">
-            <a:avLst/>
-          </a:prstGeom>
-          <a:noFill/>
-          <a:ln/>
-        </p:spPr>
-        <p:txBody>
-          <a:bodyPr wrap="square" rtlCol="0" anchor="ctr"/>
-          <a:lstStyle/>
-          <a:p>
-            <a:pPr indent="0" marL="0">
-              <a:buNone/>
-            </a:pPr>
-            <a:r>
-              <a:rPr lang="en-US" sz="1100" dirty="0">
+              <a:t>讲故事&gt;讲功能</a:t>
+            </a:r>
+            <a:endParaRPr lang="en-US" sz="1100" dirty="0"/>
+          </a:p>
+        </p:txBody>
+      </p:sp>
+      <p:sp>
+        <p:nvSpPr>
+          <p:cNvPr id="19" name="Text 17"/>
+          <p:cNvSpPr/>
+          <p:nvPr/>
+        </p:nvSpPr>
+        <p:spPr>
+          <a:xfrm>
+            <a:off x="7223760" y="1463040"/>
+            <a:ext cx="1371600" cy="228600"/>
+          </a:xfrm>
+          <a:prstGeom prst="rect">
+            <a:avLst/>
+          </a:prstGeom>
+          <a:noFill/>
+          <a:ln/>
+        </p:spPr>
+        <p:txBody>
+          <a:bodyPr wrap="square" rtlCol="0" anchor="ctr"/>
+          <a:lstStyle/>
+          <a:p>
+            <a:pPr indent="0" marL="0">
+              <a:buNone/>
+            </a:pPr>
+            <a:r>
+              <a:rPr lang="en-US" sz="1000" dirty="0">
                 <a:solidFill>
                   <a:srgbClr val="6B7280"/>
                 </a:solidFill>
@@ -5062,22 +5408,22 @@
                 <a:ea typeface="Microsoft YaHei" pitchFamily="34" charset="-122"/>
                 <a:cs typeface="Microsoft YaHei" pitchFamily="34" charset="-120"/>
               </a:rPr>
-              <a:t>真实故事更有说服力</a:t>
-            </a:r>
-            <a:endParaRPr lang="en-US" sz="1100" dirty="0"/>
-          </a:p>
-        </p:txBody>
-      </p:sp>
-      <p:sp>
-        <p:nvSpPr>
-          <p:cNvPr id="23" name="Shape 21"/>
-          <p:cNvSpPr/>
-          <p:nvPr/>
-        </p:nvSpPr>
-        <p:spPr>
-          <a:xfrm>
-            <a:off x="4846320" y="2057400"/>
-            <a:ext cx="3840480" cy="411480"/>
+              <a:t>有说服力</a:t>
+            </a:r>
+            <a:endParaRPr lang="en-US" sz="1000" dirty="0"/>
+          </a:p>
+        </p:txBody>
+      </p:sp>
+      <p:sp>
+        <p:nvSpPr>
+          <p:cNvPr id="20" name="Shape 18"/>
+          <p:cNvSpPr/>
+          <p:nvPr/>
+        </p:nvSpPr>
+        <p:spPr>
+          <a:xfrm>
+            <a:off x="4846320" y="1828800"/>
+            <a:ext cx="3840480" cy="384048"/>
           </a:xfrm>
           <a:prstGeom prst="rect">
             <a:avLst/>
@@ -5090,30 +5436,30 @@
       </p:sp>
       <p:sp>
         <p:nvSpPr>
-          <p:cNvPr id="24" name="Text 22"/>
-          <p:cNvSpPr/>
-          <p:nvPr/>
-        </p:nvSpPr>
-        <p:spPr>
-          <a:xfrm>
-            <a:off x="4937760" y="2148840"/>
-            <a:ext cx="1828800" cy="274320"/>
-          </a:xfrm>
-          <a:prstGeom prst="rect">
-            <a:avLst/>
-          </a:prstGeom>
-          <a:noFill/>
-          <a:ln/>
-        </p:spPr>
-        <p:txBody>
-          <a:bodyPr wrap="square" rtlCol="0" anchor="ctr"/>
-          <a:lstStyle/>
-          <a:p>
-            <a:pPr indent="0" marL="0">
-              <a:buNone/>
-            </a:pPr>
-            <a:r>
-              <a:rPr lang="en-US" sz="1200" b="1" dirty="0">
+          <p:cNvPr id="21" name="Text 19"/>
+          <p:cNvSpPr/>
+          <p:nvPr/>
+        </p:nvSpPr>
+        <p:spPr>
+          <a:xfrm>
+            <a:off x="4937760" y="1920240"/>
+            <a:ext cx="2286000" cy="228600"/>
+          </a:xfrm>
+          <a:prstGeom prst="rect">
+            <a:avLst/>
+          </a:prstGeom>
+          <a:noFill/>
+          <a:ln/>
+        </p:spPr>
+        <p:txBody>
+          <a:bodyPr wrap="square" rtlCol="0" anchor="ctr"/>
+          <a:lstStyle/>
+          <a:p>
+            <a:pPr indent="0" marL="0">
+              <a:buNone/>
+            </a:pPr>
+            <a:r>
+              <a:rPr lang="en-US" sz="1100" b="1" dirty="0">
                 <a:solidFill>
                   <a:srgbClr val="1E2761"/>
                 </a:solidFill>
@@ -5123,36 +5469,36 @@
               </a:rPr>
               <a:t>引导加群</a:t>
             </a:r>
-            <a:endParaRPr lang="en-US" sz="1200" dirty="0"/>
-          </a:p>
-        </p:txBody>
-      </p:sp>
-      <p:sp>
-        <p:nvSpPr>
-          <p:cNvPr id="25" name="Text 23"/>
-          <p:cNvSpPr/>
-          <p:nvPr/>
-        </p:nvSpPr>
-        <p:spPr>
-          <a:xfrm>
-            <a:off x="6766560" y="2148840"/>
-            <a:ext cx="1828800" cy="274320"/>
-          </a:xfrm>
-          <a:prstGeom prst="rect">
-            <a:avLst/>
-          </a:prstGeom>
-          <a:noFill/>
-          <a:ln/>
-        </p:spPr>
-        <p:txBody>
-          <a:bodyPr wrap="square" rtlCol="0" anchor="ctr"/>
-          <a:lstStyle/>
-          <a:p>
-            <a:pPr indent="0" marL="0">
-              <a:buNone/>
-            </a:pPr>
-            <a:r>
-              <a:rPr lang="en-US" sz="1100" dirty="0">
+            <a:endParaRPr lang="en-US" sz="1100" dirty="0"/>
+          </a:p>
+        </p:txBody>
+      </p:sp>
+      <p:sp>
+        <p:nvSpPr>
+          <p:cNvPr id="22" name="Text 20"/>
+          <p:cNvSpPr/>
+          <p:nvPr/>
+        </p:nvSpPr>
+        <p:spPr>
+          <a:xfrm>
+            <a:off x="7223760" y="1920240"/>
+            <a:ext cx="1371600" cy="228600"/>
+          </a:xfrm>
+          <a:prstGeom prst="rect">
+            <a:avLst/>
+          </a:prstGeom>
+          <a:noFill/>
+          <a:ln/>
+        </p:spPr>
+        <p:txBody>
+          <a:bodyPr wrap="square" rtlCol="0" anchor="ctr"/>
+          <a:lstStyle/>
+          <a:p>
+            <a:pPr indent="0" marL="0">
+              <a:buNone/>
+            </a:pPr>
+            <a:r>
+              <a:rPr lang="en-US" sz="1000" dirty="0">
                 <a:solidFill>
                   <a:srgbClr val="6B7280"/>
                 </a:solidFill>
@@ -5162,20 +5508,20 @@
               </a:rPr>
               <a:t>私域沉淀</a:t>
             </a:r>
-            <a:endParaRPr lang="en-US" sz="1100" dirty="0"/>
-          </a:p>
-        </p:txBody>
-      </p:sp>
-      <p:sp>
-        <p:nvSpPr>
-          <p:cNvPr id="26" name="Shape 24"/>
-          <p:cNvSpPr/>
-          <p:nvPr/>
-        </p:nvSpPr>
-        <p:spPr>
-          <a:xfrm>
-            <a:off x="4846320" y="2560320"/>
-            <a:ext cx="3840480" cy="411480"/>
+            <a:endParaRPr lang="en-US" sz="1000" dirty="0"/>
+          </a:p>
+        </p:txBody>
+      </p:sp>
+      <p:sp>
+        <p:nvSpPr>
+          <p:cNvPr id="23" name="Shape 21"/>
+          <p:cNvSpPr/>
+          <p:nvPr/>
+        </p:nvSpPr>
+        <p:spPr>
+          <a:xfrm>
+            <a:off x="4846320" y="2286000"/>
+            <a:ext cx="3840480" cy="384048"/>
           </a:xfrm>
           <a:prstGeom prst="rect">
             <a:avLst/>
@@ -5188,30 +5534,30 @@
       </p:sp>
       <p:sp>
         <p:nvSpPr>
-          <p:cNvPr id="27" name="Text 25"/>
-          <p:cNvSpPr/>
-          <p:nvPr/>
-        </p:nvSpPr>
-        <p:spPr>
-          <a:xfrm>
-            <a:off x="4937760" y="2651760"/>
-            <a:ext cx="1828800" cy="274320"/>
-          </a:xfrm>
-          <a:prstGeom prst="rect">
-            <a:avLst/>
-          </a:prstGeom>
-          <a:noFill/>
-          <a:ln/>
-        </p:spPr>
-        <p:txBody>
-          <a:bodyPr wrap="square" rtlCol="0" anchor="ctr"/>
-          <a:lstStyle/>
-          <a:p>
-            <a:pPr indent="0" marL="0">
-              <a:buNone/>
-            </a:pPr>
-            <a:r>
-              <a:rPr lang="en-US" sz="1200" b="1" dirty="0">
+          <p:cNvPr id="24" name="Text 22"/>
+          <p:cNvSpPr/>
+          <p:nvPr/>
+        </p:nvSpPr>
+        <p:spPr>
+          <a:xfrm>
+            <a:off x="4937760" y="2377440"/>
+            <a:ext cx="2286000" cy="228600"/>
+          </a:xfrm>
+          <a:prstGeom prst="rect">
+            <a:avLst/>
+          </a:prstGeom>
+          <a:noFill/>
+          <a:ln/>
+        </p:spPr>
+        <p:txBody>
+          <a:bodyPr wrap="square" rtlCol="0" anchor="ctr"/>
+          <a:lstStyle/>
+          <a:p>
+            <a:pPr indent="0" marL="0">
+              <a:buNone/>
+            </a:pPr>
+            <a:r>
+              <a:rPr lang="en-US" sz="1100" b="1" dirty="0">
                 <a:solidFill>
                   <a:srgbClr val="1E2761"/>
                 </a:solidFill>
@@ -5219,38 +5565,38 @@
                 <a:ea typeface="Microsoft YaHei" pitchFamily="34" charset="-122"/>
                 <a:cs typeface="Microsoft YaHei" pitchFamily="34" charset="-120"/>
               </a:rPr>
-              <a:t>初中生都能用</a:t>
-            </a:r>
-            <a:endParaRPr lang="en-US" sz="1200" dirty="0"/>
-          </a:p>
-        </p:txBody>
-      </p:sp>
-      <p:sp>
-        <p:nvSpPr>
-          <p:cNvPr id="28" name="Text 26"/>
-          <p:cNvSpPr/>
-          <p:nvPr/>
-        </p:nvSpPr>
-        <p:spPr>
-          <a:xfrm>
-            <a:off x="6766560" y="2651760"/>
-            <a:ext cx="1828800" cy="274320"/>
-          </a:xfrm>
-          <a:prstGeom prst="rect">
-            <a:avLst/>
-          </a:prstGeom>
-          <a:noFill/>
-          <a:ln/>
-        </p:spPr>
-        <p:txBody>
-          <a:bodyPr wrap="square" rtlCol="0" anchor="ctr"/>
-          <a:lstStyle/>
-          <a:p>
-            <a:pPr indent="0" marL="0">
-              <a:buNone/>
-            </a:pPr>
-            <a:r>
-              <a:rPr lang="en-US" sz="1100" dirty="0">
+              <a:t>线上+线下</a:t>
+            </a:r>
+            <a:endParaRPr lang="en-US" sz="1100" dirty="0"/>
+          </a:p>
+        </p:txBody>
+      </p:sp>
+      <p:sp>
+        <p:nvSpPr>
+          <p:cNvPr id="25" name="Text 23"/>
+          <p:cNvSpPr/>
+          <p:nvPr/>
+        </p:nvSpPr>
+        <p:spPr>
+          <a:xfrm>
+            <a:off x="7223760" y="2377440"/>
+            <a:ext cx="1371600" cy="228600"/>
+          </a:xfrm>
+          <a:prstGeom prst="rect">
+            <a:avLst/>
+          </a:prstGeom>
+          <a:noFill/>
+          <a:ln/>
+        </p:spPr>
+        <p:txBody>
+          <a:bodyPr wrap="square" rtlCol="0" anchor="ctr"/>
+          <a:lstStyle/>
+          <a:p>
+            <a:pPr indent="0" marL="0">
+              <a:buNone/>
+            </a:pPr>
+            <a:r>
+              <a:rPr lang="en-US" sz="1000" dirty="0">
                 <a:solidFill>
                   <a:srgbClr val="6B7280"/>
                 </a:solidFill>
@@ -5258,113 +5604,15 @@
                 <a:ea typeface="Microsoft YaHei" pitchFamily="34" charset="-122"/>
                 <a:cs typeface="Microsoft YaHei" pitchFamily="34" charset="-120"/>
               </a:rPr>
-              <a:t>降低心理障碍</a:t>
-            </a:r>
-            <a:endParaRPr lang="en-US" sz="1100" dirty="0"/>
-          </a:p>
-        </p:txBody>
-      </p:sp>
-      <p:sp>
-        <p:nvSpPr>
-          <p:cNvPr id="29" name="Shape 27"/>
-          <p:cNvSpPr/>
-          <p:nvPr/>
-        </p:nvSpPr>
-        <p:spPr>
-          <a:xfrm>
-            <a:off x="4846320" y="3063240"/>
-            <a:ext cx="3840480" cy="411480"/>
-          </a:xfrm>
-          <a:prstGeom prst="rect">
-            <a:avLst/>
-          </a:prstGeom>
-          <a:solidFill>
-            <a:srgbClr val="DBEAFE"/>
-          </a:solidFill>
-          <a:ln/>
-        </p:spPr>
-      </p:sp>
-      <p:sp>
-        <p:nvSpPr>
-          <p:cNvPr id="30" name="Text 28"/>
-          <p:cNvSpPr/>
-          <p:nvPr/>
-        </p:nvSpPr>
-        <p:spPr>
-          <a:xfrm>
-            <a:off x="4937760" y="3154680"/>
-            <a:ext cx="1828800" cy="274320"/>
-          </a:xfrm>
-          <a:prstGeom prst="rect">
-            <a:avLst/>
-          </a:prstGeom>
-          <a:noFill/>
-          <a:ln/>
-        </p:spPr>
-        <p:txBody>
-          <a:bodyPr wrap="square" rtlCol="0" anchor="ctr"/>
-          <a:lstStyle/>
-          <a:p>
-            <a:pPr indent="0" marL="0">
-              <a:buNone/>
-            </a:pPr>
-            <a:r>
-              <a:rPr lang="en-US" sz="1200" b="1" dirty="0">
-                <a:solidFill>
-                  <a:srgbClr val="1E2761"/>
-                </a:solidFill>
-                <a:latin typeface="Microsoft YaHei" pitchFamily="34" charset="0"/>
-                <a:ea typeface="Microsoft YaHei" pitchFamily="34" charset="-122"/>
-                <a:cs typeface="Microsoft YaHei" pitchFamily="34" charset="-120"/>
-              </a:rPr>
-              <a:t>线上+线下</a:t>
-            </a:r>
-            <a:endParaRPr lang="en-US" sz="1200" dirty="0"/>
-          </a:p>
-        </p:txBody>
-      </p:sp>
-      <p:sp>
-        <p:nvSpPr>
-          <p:cNvPr id="31" name="Text 29"/>
-          <p:cNvSpPr/>
-          <p:nvPr/>
-        </p:nvSpPr>
-        <p:spPr>
-          <a:xfrm>
-            <a:off x="6766560" y="3154680"/>
-            <a:ext cx="1828800" cy="274320"/>
-          </a:xfrm>
-          <a:prstGeom prst="rect">
-            <a:avLst/>
-          </a:prstGeom>
-          <a:noFill/>
-          <a:ln/>
-        </p:spPr>
-        <p:txBody>
-          <a:bodyPr wrap="square" rtlCol="0" anchor="ctr"/>
-          <a:lstStyle/>
-          <a:p>
-            <a:pPr indent="0" marL="0">
-              <a:buNone/>
-            </a:pPr>
-            <a:r>
-              <a:rPr lang="en-US" sz="1100" dirty="0">
-                <a:solidFill>
-                  <a:srgbClr val="6B7280"/>
-                </a:solidFill>
-                <a:latin typeface="Microsoft YaHei" pitchFamily="34" charset="0"/>
-                <a:ea typeface="Microsoft YaHei" pitchFamily="34" charset="-122"/>
-                <a:cs typeface="Microsoft YaHei" pitchFamily="34" charset="-120"/>
-              </a:rPr>
-              <a:t>"按头"让你用起来</a:t>
-            </a:r>
-            <a:endParaRPr lang="en-US" sz="1100" dirty="0"/>
-          </a:p>
-        </p:txBody>
-      </p:sp>
-      <p:sp>
-        <p:nvSpPr>
-          <p:cNvPr id="32" name="Shape 30"/>
+              <a:t>按头用起来</a:t>
+            </a:r>
+            <a:endParaRPr lang="en-US" sz="1000" dirty="0"/>
+          </a:p>
+        </p:txBody>
+      </p:sp>
+      <p:sp>
+        <p:nvSpPr>
+          <p:cNvPr id="26" name="Shape 24"/>
           <p:cNvSpPr/>
           <p:nvPr/>
         </p:nvSpPr>
@@ -5384,7 +5632,7 @@
       </p:sp>
       <p:sp>
         <p:nvSpPr>
-          <p:cNvPr id="33" name="Text 31"/>
+          <p:cNvPr id="27" name="Text 25"/>
           <p:cNvSpPr/>
           <p:nvPr/>
         </p:nvSpPr>
@@ -5500,8 +5748,8 @@
         </p:nvSpPr>
         <p:spPr>
           <a:xfrm>
-            <a:off x="457200" y="1188720"/>
-            <a:ext cx="8229600" cy="777240"/>
+            <a:off x="457200" y="1097280"/>
+            <a:ext cx="8229600" cy="685800"/>
           </a:xfrm>
           <a:prstGeom prst="roundRect">
             <a:avLst/>
@@ -5520,24 +5768,24 @@
         </p:nvSpPr>
         <p:spPr>
           <a:xfrm>
-            <a:off x="640080" y="1280160"/>
-            <a:ext cx="2286000" cy="320040"/>
-          </a:xfrm>
-          <a:prstGeom prst="rect">
-            <a:avLst/>
-          </a:prstGeom>
-          <a:noFill/>
-          <a:ln/>
-        </p:spPr>
-        <p:txBody>
-          <a:bodyPr wrap="square" rtlCol="0" anchor="ctr"/>
-          <a:lstStyle/>
-          <a:p>
-            <a:pPr indent="0" marL="0">
-              <a:buNone/>
-            </a:pPr>
-            <a:r>
-              <a:rPr lang="en-US" sz="1400" b="1" dirty="0">
+            <a:off x="640080" y="1188720"/>
+            <a:ext cx="2286000" cy="502920"/>
+          </a:xfrm>
+          <a:prstGeom prst="rect">
+            <a:avLst/>
+          </a:prstGeom>
+          <a:noFill/>
+          <a:ln/>
+        </p:spPr>
+        <p:txBody>
+          <a:bodyPr wrap="square" rtlCol="0" anchor="ctr"/>
+          <a:lstStyle/>
+          <a:p>
+            <a:pPr indent="0" marL="0">
+              <a:buNone/>
+            </a:pPr>
+            <a:r>
+              <a:rPr lang="en-US" sz="1300" b="1" dirty="0">
                 <a:solidFill>
                   <a:srgbClr val="1E3A5F"/>
                 </a:solidFill>
@@ -5547,7 +5795,7 @@
               </a:rPr>
               <a:t>量化交易 ⭐⭐⭐</a:t>
             </a:r>
-            <a:endParaRPr lang="en-US" sz="1400" dirty="0"/>
+            <a:endParaRPr lang="en-US" sz="1300" dirty="0"/>
           </a:p>
         </p:txBody>
       </p:sp>
@@ -5559,8 +5807,8 @@
         </p:nvSpPr>
         <p:spPr>
           <a:xfrm>
-            <a:off x="640080" y="1600200"/>
-            <a:ext cx="7772400" cy="320040"/>
+            <a:off x="2926080" y="1188720"/>
+            <a:ext cx="5486400" cy="502920"/>
           </a:xfrm>
           <a:prstGeom prst="rect">
             <a:avLst/>
@@ -5584,7 +5832,7 @@
                 <a:ea typeface="Microsoft YaHei" pitchFamily="34" charset="-122"/>
                 <a:cs typeface="Microsoft YaHei" pitchFamily="34" charset="-120"/>
               </a:rPr>
-              <a:t>傅盛不是交易员，但可以直接学会GitHub上的交易技能</a:t>
+              <a:t>傅盛不是交易员，但可以直接学会</a:t>
             </a:r>
             <a:endParaRPr lang="en-US" sz="1200" dirty="0"/>
           </a:p>
@@ -5598,8 +5846,8 @@
         </p:nvSpPr>
         <p:spPr>
           <a:xfrm>
-            <a:off x="457200" y="2103120"/>
-            <a:ext cx="8229600" cy="777240"/>
+            <a:off x="457200" y="1874520"/>
+            <a:ext cx="8229600" cy="685800"/>
           </a:xfrm>
           <a:prstGeom prst="roundRect">
             <a:avLst/>
@@ -5618,24 +5866,24 @@
         </p:nvSpPr>
         <p:spPr>
           <a:xfrm>
-            <a:off x="640080" y="2194560"/>
-            <a:ext cx="2286000" cy="320040"/>
-          </a:xfrm>
-          <a:prstGeom prst="rect">
-            <a:avLst/>
-          </a:prstGeom>
-          <a:noFill/>
-          <a:ln/>
-        </p:spPr>
-        <p:txBody>
-          <a:bodyPr wrap="square" rtlCol="0" anchor="ctr"/>
-          <a:lstStyle/>
-          <a:p>
-            <a:pPr indent="0" marL="0">
-              <a:buNone/>
-            </a:pPr>
-            <a:r>
-              <a:rPr lang="en-US" sz="1400" b="1" dirty="0">
+            <a:off x="640080" y="1965960"/>
+            <a:ext cx="2286000" cy="502920"/>
+          </a:xfrm>
+          <a:prstGeom prst="rect">
+            <a:avLst/>
+          </a:prstGeom>
+          <a:noFill/>
+          <a:ln/>
+        </p:spPr>
+        <p:txBody>
+          <a:bodyPr wrap="square" rtlCol="0" anchor="ctr"/>
+          <a:lstStyle/>
+          <a:p>
+            <a:pPr indent="0" marL="0">
+              <a:buNone/>
+            </a:pPr>
+            <a:r>
+              <a:rPr lang="en-US" sz="1300" b="1" dirty="0">
                 <a:solidFill>
                   <a:srgbClr val="1E3A5F"/>
                 </a:solidFill>
@@ -5645,7 +5893,7 @@
               </a:rPr>
               <a:t>电商 ⭐⭐⭐⭐</a:t>
             </a:r>
-            <a:endParaRPr lang="en-US" sz="1400" dirty="0"/>
+            <a:endParaRPr lang="en-US" sz="1300" dirty="0"/>
           </a:p>
         </p:txBody>
       </p:sp>
@@ -5657,8 +5905,8 @@
         </p:nvSpPr>
         <p:spPr>
           <a:xfrm>
-            <a:off x="640080" y="2514600"/>
-            <a:ext cx="7772400" cy="320040"/>
+            <a:off x="2926080" y="1965960"/>
+            <a:ext cx="5486400" cy="502920"/>
           </a:xfrm>
           <a:prstGeom prst="rect">
             <a:avLst/>
@@ -5682,7 +5930,7 @@
                 <a:ea typeface="Microsoft YaHei" pitchFamily="34" charset="-122"/>
                 <a:cs typeface="Microsoft YaHei" pitchFamily="34" charset="-120"/>
               </a:rPr>
-              <a:t>最成熟领域：选品+差异化+客服自动化</a:t>
+              <a:t>最成熟：选品+差异化+客服</a:t>
             </a:r>
             <a:endParaRPr lang="en-US" sz="1200" dirty="0"/>
           </a:p>
@@ -5696,8 +5944,8 @@
         </p:nvSpPr>
         <p:spPr>
           <a:xfrm>
-            <a:off x="457200" y="3017520"/>
-            <a:ext cx="8229600" cy="777240"/>
+            <a:off x="457200" y="2651760"/>
+            <a:ext cx="8229600" cy="685800"/>
           </a:xfrm>
           <a:prstGeom prst="roundRect">
             <a:avLst/>
@@ -5716,24 +5964,24 @@
         </p:nvSpPr>
         <p:spPr>
           <a:xfrm>
-            <a:off x="640080" y="3108960"/>
-            <a:ext cx="2286000" cy="320040"/>
-          </a:xfrm>
-          <a:prstGeom prst="rect">
-            <a:avLst/>
-          </a:prstGeom>
-          <a:noFill/>
-          <a:ln/>
-        </p:spPr>
-        <p:txBody>
-          <a:bodyPr wrap="square" rtlCol="0" anchor="ctr"/>
-          <a:lstStyle/>
-          <a:p>
-            <a:pPr indent="0" marL="0">
-              <a:buNone/>
-            </a:pPr>
-            <a:r>
-              <a:rPr lang="en-US" sz="1400" b="1" dirty="0">
+            <a:off x="640080" y="2743200"/>
+            <a:ext cx="2286000" cy="502920"/>
+          </a:xfrm>
+          <a:prstGeom prst="rect">
+            <a:avLst/>
+          </a:prstGeom>
+          <a:noFill/>
+          <a:ln/>
+        </p:spPr>
+        <p:txBody>
+          <a:bodyPr wrap="square" rtlCol="0" anchor="ctr"/>
+          <a:lstStyle/>
+          <a:p>
+            <a:pPr indent="0" marL="0">
+              <a:buNone/>
+            </a:pPr>
+            <a:r>
+              <a:rPr lang="en-US" sz="1300" b="1" dirty="0">
                 <a:solidFill>
                   <a:srgbClr val="1E3A5F"/>
                 </a:solidFill>
@@ -5743,7 +5991,7 @@
               </a:rPr>
               <a:t>自媒体 ⭐⭐⭐</a:t>
             </a:r>
-            <a:endParaRPr lang="en-US" sz="1400" dirty="0"/>
+            <a:endParaRPr lang="en-US" sz="1300" dirty="0"/>
           </a:p>
         </p:txBody>
       </p:sp>
@@ -5755,8 +6003,8 @@
         </p:nvSpPr>
         <p:spPr>
           <a:xfrm>
-            <a:off x="640080" y="3429000"/>
-            <a:ext cx="7772400" cy="320040"/>
+            <a:off x="2926080" y="2743200"/>
+            <a:ext cx="5486400" cy="502920"/>
           </a:xfrm>
           <a:prstGeom prst="rect">
             <a:avLst/>
@@ -5794,8 +6042,8 @@
         </p:nvSpPr>
         <p:spPr>
           <a:xfrm>
-            <a:off x="457200" y="3931920"/>
-            <a:ext cx="8229600" cy="777240"/>
+            <a:off x="457200" y="3429000"/>
+            <a:ext cx="8229600" cy="685800"/>
           </a:xfrm>
           <a:prstGeom prst="roundRect">
             <a:avLst/>
@@ -5814,24 +6062,24 @@
         </p:nvSpPr>
         <p:spPr>
           <a:xfrm>
-            <a:off x="640080" y="4023360"/>
-            <a:ext cx="2286000" cy="320040"/>
-          </a:xfrm>
-          <a:prstGeom prst="rect">
-            <a:avLst/>
-          </a:prstGeom>
-          <a:noFill/>
-          <a:ln/>
-        </p:spPr>
-        <p:txBody>
-          <a:bodyPr wrap="square" rtlCol="0" anchor="ctr"/>
-          <a:lstStyle/>
-          <a:p>
-            <a:pPr indent="0" marL="0">
-              <a:buNone/>
-            </a:pPr>
-            <a:r>
-              <a:rPr lang="en-US" sz="1400" b="1" dirty="0">
+            <a:off x="640080" y="3520440"/>
+            <a:ext cx="2286000" cy="502920"/>
+          </a:xfrm>
+          <a:prstGeom prst="rect">
+            <a:avLst/>
+          </a:prstGeom>
+          <a:noFill/>
+          <a:ln/>
+        </p:spPr>
+        <p:txBody>
+          <a:bodyPr wrap="square" rtlCol="0" anchor="ctr"/>
+          <a:lstStyle/>
+          <a:p>
+            <a:pPr indent="0" marL="0">
+              <a:buNone/>
+            </a:pPr>
+            <a:r>
+              <a:rPr lang="en-US" sz="1300" b="1" dirty="0">
                 <a:solidFill>
                   <a:srgbClr val="1E3A5F"/>
                 </a:solidFill>
@@ -5841,7 +6089,7 @@
               </a:rPr>
               <a:t>客服 ⭐⭐⭐</a:t>
             </a:r>
-            <a:endParaRPr lang="en-US" sz="1400" dirty="0"/>
+            <a:endParaRPr lang="en-US" sz="1300" dirty="0"/>
           </a:p>
         </p:txBody>
       </p:sp>
@@ -5853,8 +6101,8 @@
         </p:nvSpPr>
         <p:spPr>
           <a:xfrm>
-            <a:off x="640080" y="4343400"/>
-            <a:ext cx="7772400" cy="320040"/>
+            <a:off x="2926080" y="3520440"/>
+            <a:ext cx="5486400" cy="502920"/>
           </a:xfrm>
           <a:prstGeom prst="rect">
             <a:avLst/>
@@ -5878,7 +6126,7 @@
                 <a:ea typeface="Microsoft YaHei" pitchFamily="34" charset="-122"/>
                 <a:cs typeface="Microsoft YaHei" pitchFamily="34" charset="-120"/>
               </a:rPr>
-              <a:t>需要找不封闭的平台，toB业务支持</a:t>
+              <a:t>需要找不封闭的平台</a:t>
             </a:r>
             <a:endParaRPr lang="en-US" sz="1200" dirty="0"/>
           </a:p>
@@ -6023,7 +6271,7 @@
         <p:spPr>
           <a:xfrm>
             <a:off x="457200" y="1280160"/>
-            <a:ext cx="8229600" cy="822960"/>
+            <a:ext cx="8229600" cy="777240"/>
           </a:xfrm>
           <a:prstGeom prst="roundRect">
             <a:avLst/>
@@ -6045,7 +6293,46 @@
         <p:spPr>
           <a:xfrm>
             <a:off x="640080" y="1417320"/>
-            <a:ext cx="2743200" cy="548640"/>
+            <a:ext cx="4572000" cy="502920"/>
+          </a:xfrm>
+          <a:prstGeom prst="rect">
+            <a:avLst/>
+          </a:prstGeom>
+          <a:noFill/>
+          <a:ln/>
+        </p:spPr>
+        <p:txBody>
+          <a:bodyPr wrap="square" rtlCol="0" anchor="ctr"/>
+          <a:lstStyle/>
+          <a:p>
+            <a:pPr indent="0" marL="0">
+              <a:buNone/>
+            </a:pPr>
+            <a:r>
+              <a:rPr lang="en-US" sz="1600" b="1" dirty="0">
+                <a:solidFill>
+                  <a:srgbClr val="FFFFFF"/>
+                </a:solidFill>
+                <a:latin typeface="Microsoft YaHei" pitchFamily="34" charset="0"/>
+                <a:ea typeface="Microsoft YaHei" pitchFamily="34" charset="-122"/>
+                <a:cs typeface="Microsoft YaHei" pitchFamily="34" charset="-120"/>
+              </a:rPr>
+              <a:t>云服务器</a:t>
+            </a:r>
+            <a:endParaRPr lang="en-US" sz="1600" dirty="0"/>
+          </a:p>
+        </p:txBody>
+      </p:sp>
+      <p:sp>
+        <p:nvSpPr>
+          <p:cNvPr id="5" name="Text 3"/>
+          <p:cNvSpPr/>
+          <p:nvPr/>
+        </p:nvSpPr>
+        <p:spPr>
+          <a:xfrm>
+            <a:off x="5486400" y="1417320"/>
+            <a:ext cx="2743200" cy="502920"/>
           </a:xfrm>
           <a:prstGeom prst="rect">
             <a:avLst/>
@@ -6063,13 +6350,13 @@
             <a:r>
               <a:rPr lang="en-US" sz="1800" b="1" dirty="0">
                 <a:solidFill>
-                  <a:srgbClr val="FFFFFF"/>
-                </a:solidFill>
-                <a:latin typeface="Microsoft YaHei" pitchFamily="34" charset="0"/>
-                <a:ea typeface="Microsoft YaHei" pitchFamily="34" charset="-122"/>
-                <a:cs typeface="Microsoft YaHei" pitchFamily="34" charset="-120"/>
-              </a:rPr>
-              <a:t>云服务器</a:t>
+                  <a:srgbClr val="FF6B35"/>
+                </a:solidFill>
+                <a:latin typeface="Microsoft YaHei" pitchFamily="34" charset="0"/>
+                <a:ea typeface="Microsoft YaHei" pitchFamily="34" charset="-122"/>
+                <a:cs typeface="Microsoft YaHei" pitchFamily="34" charset="-120"/>
+              </a:rPr>
+              <a:t>99元/年</a:t>
             </a:r>
             <a:endParaRPr lang="en-US" sz="1800" dirty="0"/>
           </a:p>
@@ -6077,92 +6364,14 @@
       </p:sp>
       <p:sp>
         <p:nvSpPr>
-          <p:cNvPr id="5" name="Text 3"/>
-          <p:cNvSpPr/>
-          <p:nvPr/>
-        </p:nvSpPr>
-        <p:spPr>
-          <a:xfrm>
-            <a:off x="4572000" y="1417320"/>
-            <a:ext cx="1828800" cy="548640"/>
-          </a:xfrm>
-          <a:prstGeom prst="rect">
-            <a:avLst/>
-          </a:prstGeom>
-          <a:noFill/>
-          <a:ln/>
-        </p:spPr>
-        <p:txBody>
-          <a:bodyPr wrap="square" rtlCol="0" anchor="ctr"/>
-          <a:lstStyle/>
-          <a:p>
-            <a:pPr indent="0" marL="0">
-              <a:buNone/>
-            </a:pPr>
-            <a:r>
-              <a:rPr lang="en-US" sz="2000" b="1" dirty="0">
-                <a:solidFill>
-                  <a:srgbClr val="FF6B35"/>
-                </a:solidFill>
-                <a:latin typeface="Microsoft YaHei" pitchFamily="34" charset="0"/>
-                <a:ea typeface="Microsoft YaHei" pitchFamily="34" charset="-122"/>
-                <a:cs typeface="Microsoft YaHei" pitchFamily="34" charset="-120"/>
-              </a:rPr>
-              <a:t>99元/年</a:t>
-            </a:r>
-            <a:endParaRPr lang="en-US" sz="2000" dirty="0"/>
-          </a:p>
-        </p:txBody>
-      </p:sp>
-      <p:sp>
-        <p:nvSpPr>
-          <p:cNvPr id="6" name="Text 4"/>
-          <p:cNvSpPr/>
-          <p:nvPr/>
-        </p:nvSpPr>
-        <p:spPr>
-          <a:xfrm>
-            <a:off x="6400800" y="1508760"/>
-            <a:ext cx="2103120" cy="365760"/>
-          </a:xfrm>
-          <a:prstGeom prst="rect">
-            <a:avLst/>
-          </a:prstGeom>
-          <a:noFill/>
-          <a:ln/>
-        </p:spPr>
-        <p:txBody>
-          <a:bodyPr wrap="square" rtlCol="0" anchor="ctr"/>
-          <a:lstStyle/>
-          <a:p>
-            <a:pPr indent="0" marL="0">
-              <a:buNone/>
-            </a:pPr>
-            <a:r>
-              <a:rPr lang="en-US" sz="1200" dirty="0">
-                <a:solidFill>
-                  <a:srgbClr val="E8F4F8"/>
-                </a:solidFill>
-                <a:latin typeface="Microsoft YaHei" pitchFamily="34" charset="0"/>
-                <a:ea typeface="Microsoft YaHei" pitchFamily="34" charset="-122"/>
-                <a:cs typeface="Microsoft YaHei" pitchFamily="34" charset="-120"/>
-              </a:rPr>
-              <a:t>阿里云/腾讯云引流款</a:t>
-            </a:r>
-            <a:endParaRPr lang="en-US" sz="1200" dirty="0"/>
-          </a:p>
-        </p:txBody>
-      </p:sp>
-      <p:sp>
-        <p:nvSpPr>
-          <p:cNvPr id="7" name="Shape 5"/>
-          <p:cNvSpPr/>
-          <p:nvPr/>
-        </p:nvSpPr>
-        <p:spPr>
-          <a:xfrm>
-            <a:off x="457200" y="2286000"/>
-            <a:ext cx="8229600" cy="822960"/>
+          <p:cNvPr id="6" name="Shape 4"/>
+          <p:cNvSpPr/>
+          <p:nvPr/>
+        </p:nvSpPr>
+        <p:spPr>
+          <a:xfrm>
+            <a:off x="457200" y="2194560"/>
+            <a:ext cx="8229600" cy="777240"/>
           </a:xfrm>
           <a:prstGeom prst="roundRect">
             <a:avLst/>
@@ -6177,14 +6386,53 @@
       </p:sp>
       <p:sp>
         <p:nvSpPr>
+          <p:cNvPr id="7" name="Text 5"/>
+          <p:cNvSpPr/>
+          <p:nvPr/>
+        </p:nvSpPr>
+        <p:spPr>
+          <a:xfrm>
+            <a:off x="640080" y="2331720"/>
+            <a:ext cx="4572000" cy="502920"/>
+          </a:xfrm>
+          <a:prstGeom prst="rect">
+            <a:avLst/>
+          </a:prstGeom>
+          <a:noFill/>
+          <a:ln/>
+        </p:spPr>
+        <p:txBody>
+          <a:bodyPr wrap="square" rtlCol="0" anchor="ctr"/>
+          <a:lstStyle/>
+          <a:p>
+            <a:pPr indent="0" marL="0">
+              <a:buNone/>
+            </a:pPr>
+            <a:r>
+              <a:rPr lang="en-US" sz="1600" b="1" dirty="0">
+                <a:solidFill>
+                  <a:srgbClr val="FFFFFF"/>
+                </a:solidFill>
+                <a:latin typeface="Microsoft YaHei" pitchFamily="34" charset="0"/>
+                <a:ea typeface="Microsoft YaHei" pitchFamily="34" charset="-122"/>
+                <a:cs typeface="Microsoft YaHei" pitchFamily="34" charset="-120"/>
+              </a:rPr>
+              <a:t>大模型API</a:t>
+            </a:r>
+            <a:endParaRPr lang="en-US" sz="1600" dirty="0"/>
+          </a:p>
+        </p:txBody>
+      </p:sp>
+      <p:sp>
+        <p:nvSpPr>
           <p:cNvPr id="8" name="Text 6"/>
           <p:cNvSpPr/>
           <p:nvPr/>
         </p:nvSpPr>
         <p:spPr>
           <a:xfrm>
-            <a:off x="640080" y="2423160"/>
-            <a:ext cx="2743200" cy="548640"/>
+            <a:off x="5486400" y="2331720"/>
+            <a:ext cx="2743200" cy="502920"/>
           </a:xfrm>
           <a:prstGeom prst="rect">
             <a:avLst/>
@@ -6202,13 +6450,13 @@
             <a:r>
               <a:rPr lang="en-US" sz="1800" b="1" dirty="0">
                 <a:solidFill>
-                  <a:srgbClr val="FFFFFF"/>
-                </a:solidFill>
-                <a:latin typeface="Microsoft YaHei" pitchFamily="34" charset="0"/>
-                <a:ea typeface="Microsoft YaHei" pitchFamily="34" charset="-122"/>
-                <a:cs typeface="Microsoft YaHei" pitchFamily="34" charset="-120"/>
-              </a:rPr>
-              <a:t>大模型API</a:t>
+                  <a:srgbClr val="FF6B35"/>
+                </a:solidFill>
+                <a:latin typeface="Microsoft YaHei" pitchFamily="34" charset="0"/>
+                <a:ea typeface="Microsoft YaHei" pitchFamily="34" charset="-122"/>
+                <a:cs typeface="Microsoft YaHei" pitchFamily="34" charset="-120"/>
+              </a:rPr>
+              <a:t>几十元/月</a:t>
             </a:r>
             <a:endParaRPr lang="en-US" sz="1800" dirty="0"/>
           </a:p>
@@ -6216,92 +6464,14 @@
       </p:sp>
       <p:sp>
         <p:nvSpPr>
-          <p:cNvPr id="9" name="Text 7"/>
-          <p:cNvSpPr/>
-          <p:nvPr/>
-        </p:nvSpPr>
-        <p:spPr>
-          <a:xfrm>
-            <a:off x="4572000" y="2423160"/>
-            <a:ext cx="1828800" cy="548640"/>
-          </a:xfrm>
-          <a:prstGeom prst="rect">
-            <a:avLst/>
-          </a:prstGeom>
-          <a:noFill/>
-          <a:ln/>
-        </p:spPr>
-        <p:txBody>
-          <a:bodyPr wrap="square" rtlCol="0" anchor="ctr"/>
-          <a:lstStyle/>
-          <a:p>
-            <a:pPr indent="0" marL="0">
-              <a:buNone/>
-            </a:pPr>
-            <a:r>
-              <a:rPr lang="en-US" sz="2000" b="1" dirty="0">
-                <a:solidFill>
-                  <a:srgbClr val="FF6B35"/>
-                </a:solidFill>
-                <a:latin typeface="Microsoft YaHei" pitchFamily="34" charset="0"/>
-                <a:ea typeface="Microsoft YaHei" pitchFamily="34" charset="-122"/>
-                <a:cs typeface="Microsoft YaHei" pitchFamily="34" charset="-120"/>
-              </a:rPr>
-              <a:t>几十元/月</a:t>
-            </a:r>
-            <a:endParaRPr lang="en-US" sz="2000" dirty="0"/>
-          </a:p>
-        </p:txBody>
-      </p:sp>
-      <p:sp>
-        <p:nvSpPr>
-          <p:cNvPr id="10" name="Text 8"/>
-          <p:cNvSpPr/>
-          <p:nvPr/>
-        </p:nvSpPr>
-        <p:spPr>
-          <a:xfrm>
-            <a:off x="6400800" y="2514600"/>
-            <a:ext cx="2103120" cy="365760"/>
-          </a:xfrm>
-          <a:prstGeom prst="rect">
-            <a:avLst/>
-          </a:prstGeom>
-          <a:noFill/>
-          <a:ln/>
-        </p:spPr>
-        <p:txBody>
-          <a:bodyPr wrap="square" rtlCol="0" anchor="ctr"/>
-          <a:lstStyle/>
-          <a:p>
-            <a:pPr indent="0" marL="0">
-              <a:buNone/>
-            </a:pPr>
-            <a:r>
-              <a:rPr lang="en-US" sz="1200" dirty="0">
-                <a:solidFill>
-                  <a:srgbClr val="E8F4F8"/>
-                </a:solidFill>
-                <a:latin typeface="Microsoft YaHei" pitchFamily="34" charset="0"/>
-                <a:ea typeface="Microsoft YaHei" pitchFamily="34" charset="-122"/>
-                <a:cs typeface="Microsoft YaHei" pitchFamily="34" charset="-120"/>
-              </a:rPr>
-              <a:t>MiniMax等</a:t>
-            </a:r>
-            <a:endParaRPr lang="en-US" sz="1200" dirty="0"/>
-          </a:p>
-        </p:txBody>
-      </p:sp>
-      <p:sp>
-        <p:nvSpPr>
-          <p:cNvPr id="11" name="Shape 9"/>
-          <p:cNvSpPr/>
-          <p:nvPr/>
-        </p:nvSpPr>
-        <p:spPr>
-          <a:xfrm>
-            <a:off x="457200" y="3291840"/>
-            <a:ext cx="8229600" cy="822960"/>
+          <p:cNvPr id="9" name="Shape 7"/>
+          <p:cNvSpPr/>
+          <p:nvPr/>
+        </p:nvSpPr>
+        <p:spPr>
+          <a:xfrm>
+            <a:off x="457200" y="3108960"/>
+            <a:ext cx="8229600" cy="777240"/>
           </a:xfrm>
           <a:prstGeom prst="roundRect">
             <a:avLst/>
@@ -6316,14 +6486,53 @@
       </p:sp>
       <p:sp>
         <p:nvSpPr>
-          <p:cNvPr id="12" name="Text 10"/>
-          <p:cNvSpPr/>
-          <p:nvPr/>
-        </p:nvSpPr>
-        <p:spPr>
-          <a:xfrm>
-            <a:off x="640080" y="3429000"/>
-            <a:ext cx="2743200" cy="548640"/>
+          <p:cNvPr id="10" name="Text 8"/>
+          <p:cNvSpPr/>
+          <p:nvPr/>
+        </p:nvSpPr>
+        <p:spPr>
+          <a:xfrm>
+            <a:off x="640080" y="3246120"/>
+            <a:ext cx="4572000" cy="502920"/>
+          </a:xfrm>
+          <a:prstGeom prst="rect">
+            <a:avLst/>
+          </a:prstGeom>
+          <a:noFill/>
+          <a:ln/>
+        </p:spPr>
+        <p:txBody>
+          <a:bodyPr wrap="square" rtlCol="0" anchor="ctr"/>
+          <a:lstStyle/>
+          <a:p>
+            <a:pPr indent="0" marL="0">
+              <a:buNone/>
+            </a:pPr>
+            <a:r>
+              <a:rPr lang="en-US" sz="1600" b="1" dirty="0">
+                <a:solidFill>
+                  <a:srgbClr val="FFFFFF"/>
+                </a:solidFill>
+                <a:latin typeface="Microsoft YaHei" pitchFamily="34" charset="0"/>
+                <a:ea typeface="Microsoft YaHei" pitchFamily="34" charset="-122"/>
+                <a:cs typeface="Microsoft YaHei" pitchFamily="34" charset="-120"/>
+              </a:rPr>
+              <a:t>Mac mini</a:t>
+            </a:r>
+            <a:endParaRPr lang="en-US" sz="1600" dirty="0"/>
+          </a:p>
+        </p:txBody>
+      </p:sp>
+      <p:sp>
+        <p:nvSpPr>
+          <p:cNvPr id="11" name="Text 9"/>
+          <p:cNvSpPr/>
+          <p:nvPr/>
+        </p:nvSpPr>
+        <p:spPr>
+          <a:xfrm>
+            <a:off x="5486400" y="3246120"/>
+            <a:ext cx="2743200" cy="502920"/>
           </a:xfrm>
           <a:prstGeom prst="rect">
             <a:avLst/>
@@ -6341,13 +6550,13 @@
             <a:r>
               <a:rPr lang="en-US" sz="1800" b="1" dirty="0">
                 <a:solidFill>
-                  <a:srgbClr val="FFFFFF"/>
-                </a:solidFill>
-                <a:latin typeface="Microsoft YaHei" pitchFamily="34" charset="0"/>
-                <a:ea typeface="Microsoft YaHei" pitchFamily="34" charset="-122"/>
-                <a:cs typeface="Microsoft YaHei" pitchFamily="34" charset="-120"/>
-              </a:rPr>
-              <a:t>Mac mini</a:t>
+                  <a:srgbClr val="FF6B35"/>
+                </a:solidFill>
+                <a:latin typeface="Microsoft YaHei" pitchFamily="34" charset="0"/>
+                <a:ea typeface="Microsoft YaHei" pitchFamily="34" charset="-122"/>
+                <a:cs typeface="Microsoft YaHei" pitchFamily="34" charset="-120"/>
+              </a:rPr>
+              <a:t>500元+</a:t>
             </a:r>
             <a:endParaRPr lang="en-US" sz="1800" dirty="0"/>
           </a:p>
@@ -6355,85 +6564,7 @@
       </p:sp>
       <p:sp>
         <p:nvSpPr>
-          <p:cNvPr id="13" name="Text 11"/>
-          <p:cNvSpPr/>
-          <p:nvPr/>
-        </p:nvSpPr>
-        <p:spPr>
-          <a:xfrm>
-            <a:off x="4572000" y="3429000"/>
-            <a:ext cx="1828800" cy="548640"/>
-          </a:xfrm>
-          <a:prstGeom prst="rect">
-            <a:avLst/>
-          </a:prstGeom>
-          <a:noFill/>
-          <a:ln/>
-        </p:spPr>
-        <p:txBody>
-          <a:bodyPr wrap="square" rtlCol="0" anchor="ctr"/>
-          <a:lstStyle/>
-          <a:p>
-            <a:pPr indent="0" marL="0">
-              <a:buNone/>
-            </a:pPr>
-            <a:r>
-              <a:rPr lang="en-US" sz="2000" b="1" dirty="0">
-                <a:solidFill>
-                  <a:srgbClr val="FF6B35"/>
-                </a:solidFill>
-                <a:latin typeface="Microsoft YaHei" pitchFamily="34" charset="0"/>
-                <a:ea typeface="Microsoft YaHei" pitchFamily="34" charset="-122"/>
-                <a:cs typeface="Microsoft YaHei" pitchFamily="34" charset="-120"/>
-              </a:rPr>
-              <a:t>500元+</a:t>
-            </a:r>
-            <a:endParaRPr lang="en-US" sz="2000" dirty="0"/>
-          </a:p>
-        </p:txBody>
-      </p:sp>
-      <p:sp>
-        <p:nvSpPr>
-          <p:cNvPr id="14" name="Text 12"/>
-          <p:cNvSpPr/>
-          <p:nvPr/>
-        </p:nvSpPr>
-        <p:spPr>
-          <a:xfrm>
-            <a:off x="6400800" y="3520440"/>
-            <a:ext cx="2103120" cy="365760"/>
-          </a:xfrm>
-          <a:prstGeom prst="rect">
-            <a:avLst/>
-          </a:prstGeom>
-          <a:noFill/>
-          <a:ln/>
-        </p:spPr>
-        <p:txBody>
-          <a:bodyPr wrap="square" rtlCol="0" anchor="ctr"/>
-          <a:lstStyle/>
-          <a:p>
-            <a:pPr indent="0" marL="0">
-              <a:buNone/>
-            </a:pPr>
-            <a:r>
-              <a:rPr lang="en-US" sz="1200" dirty="0">
-                <a:solidFill>
-                  <a:srgbClr val="E8F4F8"/>
-                </a:solidFill>
-                <a:latin typeface="Microsoft YaHei" pitchFamily="34" charset="0"/>
-                <a:ea typeface="Microsoft YaHei" pitchFamily="34" charset="-122"/>
-                <a:cs typeface="Microsoft YaHei" pitchFamily="34" charset="-120"/>
-              </a:rPr>
-              <a:t>一次性投入</a:t>
-            </a:r>
-            <a:endParaRPr lang="en-US" sz="1200" dirty="0"/>
-          </a:p>
-        </p:txBody>
-      </p:sp>
-      <p:sp>
-        <p:nvSpPr>
-          <p:cNvPr id="15" name="Shape 13"/>
+          <p:cNvPr id="12" name="Shape 10"/>
           <p:cNvSpPr/>
           <p:nvPr/>
         </p:nvSpPr>
@@ -6453,7 +6584,7 @@
       </p:sp>
       <p:sp>
         <p:nvSpPr>
-          <p:cNvPr id="16" name="Text 14"/>
+          <p:cNvPr id="13" name="Text 11"/>
           <p:cNvSpPr/>
           <p:nvPr/>
         </p:nvSpPr>
@@ -6484,7 +6615,7 @@
                 <a:ea typeface="Microsoft YaHei" pitchFamily="34" charset="-122"/>
                 <a:cs typeface="Microsoft YaHei" pitchFamily="34" charset="-120"/>
               </a:rPr>
-              <a:t>一个月几十块钱，也就是一杯奶茶钱 🧋</a:t>
+              <a:t>一个月几十块钱，一杯奶茶钱 🧋</a:t>
             </a:r>
             <a:endParaRPr lang="en-US" sz="1800" dirty="0"/>
           </a:p>
@@ -6555,7 +6686,7 @@
                 <a:ea typeface="Microsoft YaHei" pitchFamily="34" charset="-122"/>
                 <a:cs typeface="Microsoft YaHei" pitchFamily="34" charset="-120"/>
               </a:rPr>
-              <a:t>四步走计划：养一只龙虾</a:t>
+              <a:t>四步走计划</a:t>
             </a:r>
             <a:endParaRPr lang="en-US" sz="3200" dirty="0"/>
           </a:p>
@@ -6570,7 +6701,7 @@
         <p:spPr>
           <a:xfrm>
             <a:off x="457200" y="1188720"/>
-            <a:ext cx="548640" cy="548640"/>
+            <a:ext cx="502920" cy="502920"/>
           </a:xfrm>
           <a:prstGeom prst="ellipse">
             <a:avLst/>
@@ -6590,7 +6721,7 @@
         <p:spPr>
           <a:xfrm>
             <a:off x="457200" y="1280160"/>
-            <a:ext cx="548640" cy="365760"/>
+            <a:ext cx="502920" cy="320040"/>
           </a:xfrm>
           <a:prstGeom prst="rect">
             <a:avLst/>
@@ -6606,7 +6737,7 @@
               <a:buNone/>
             </a:pPr>
             <a:r>
-              <a:rPr lang="en-US" sz="2000" b="1" dirty="0">
+              <a:rPr lang="en-US" sz="1800" b="1" dirty="0">
                 <a:solidFill>
                   <a:srgbClr val="FFFFFF"/>
                 </a:solidFill>
@@ -6616,7 +6747,7 @@
               </a:rPr>
               <a:t>1</a:t>
             </a:r>
-            <a:endParaRPr lang="en-US" sz="2000" dirty="0"/>
+            <a:endParaRPr lang="en-US" sz="1800" dirty="0"/>
           </a:p>
         </p:txBody>
       </p:sp>
@@ -6628,24 +6759,24 @@
         </p:nvSpPr>
         <p:spPr>
           <a:xfrm>
-            <a:off x="1188720" y="1188720"/>
-            <a:ext cx="2743200" cy="365760"/>
-          </a:xfrm>
-          <a:prstGeom prst="rect">
-            <a:avLst/>
-          </a:prstGeom>
-          <a:noFill/>
-          <a:ln/>
-        </p:spPr>
-        <p:txBody>
-          <a:bodyPr wrap="square" rtlCol="0" anchor="ctr"/>
-          <a:lstStyle/>
-          <a:p>
-            <a:pPr indent="0" marL="0">
-              <a:buNone/>
-            </a:pPr>
-            <a:r>
-              <a:rPr lang="en-US" sz="1800" b="1" dirty="0">
+            <a:off x="1097280" y="1188720"/>
+            <a:ext cx="2743200" cy="320040"/>
+          </a:xfrm>
+          <a:prstGeom prst="rect">
+            <a:avLst/>
+          </a:prstGeom>
+          <a:noFill/>
+          <a:ln/>
+        </p:spPr>
+        <p:txBody>
+          <a:bodyPr wrap="square" rtlCol="0" anchor="ctr"/>
+          <a:lstStyle/>
+          <a:p>
+            <a:pPr indent="0" marL="0">
+              <a:buNone/>
+            </a:pPr>
+            <a:r>
+              <a:rPr lang="en-US" sz="1600" b="1" dirty="0">
                 <a:solidFill>
                   <a:srgbClr val="1E3A5F"/>
                 </a:solidFill>
@@ -6655,7 +6786,7 @@
               </a:rPr>
               <a:t>看案例</a:t>
             </a:r>
-            <a:endParaRPr lang="en-US" sz="1800" dirty="0"/>
+            <a:endParaRPr lang="en-US" sz="1600" dirty="0"/>
           </a:p>
         </p:txBody>
       </p:sp>
@@ -6667,24 +6798,24 @@
         </p:nvSpPr>
         <p:spPr>
           <a:xfrm>
-            <a:off x="1188720" y="1554480"/>
-            <a:ext cx="7315200" cy="365760"/>
-          </a:xfrm>
-          <a:prstGeom prst="rect">
-            <a:avLst/>
-          </a:prstGeom>
-          <a:noFill/>
-          <a:ln/>
-        </p:spPr>
-        <p:txBody>
-          <a:bodyPr wrap="square" rtlCol="0" anchor="ctr"/>
-          <a:lstStyle/>
-          <a:p>
-            <a:pPr indent="0" marL="0">
-              <a:buNone/>
-            </a:pPr>
-            <a:r>
-              <a:rPr lang="en-US" sz="1400" dirty="0">
+            <a:off x="1097280" y="1554480"/>
+            <a:ext cx="7315200" cy="320040"/>
+          </a:xfrm>
+          <a:prstGeom prst="rect">
+            <a:avLst/>
+          </a:prstGeom>
+          <a:noFill/>
+          <a:ln/>
+        </p:spPr>
+        <p:txBody>
+          <a:bodyPr wrap="square" rtlCol="0" anchor="ctr"/>
+          <a:lstStyle/>
+          <a:p>
+            <a:pPr indent="0" marL="0">
+              <a:buNone/>
+            </a:pPr>
+            <a:r>
+              <a:rPr lang="en-US" sz="1300" dirty="0">
                 <a:solidFill>
                   <a:srgbClr val="6B7280"/>
                 </a:solidFill>
@@ -6692,9 +6823,9 @@
                 <a:ea typeface="Microsoft YaHei" pitchFamily="34" charset="-122"/>
                 <a:cs typeface="Microsoft YaHei" pitchFamily="34" charset="-120"/>
               </a:rPr>
-              <a:t>知道AI的边界在哪里</a:t>
-            </a:r>
-            <a:endParaRPr lang="en-US" sz="1400" dirty="0"/>
+              <a:t>知道AI边界</a:t>
+            </a:r>
+            <a:endParaRPr lang="en-US" sz="1300" dirty="0"/>
           </a:p>
         </p:txBody>
       </p:sp>
@@ -6706,8 +6837,8 @@
         </p:nvSpPr>
         <p:spPr>
           <a:xfrm>
-            <a:off x="457200" y="2103120"/>
-            <a:ext cx="548640" cy="548640"/>
+            <a:off x="457200" y="2011680"/>
+            <a:ext cx="502920" cy="502920"/>
           </a:xfrm>
           <a:prstGeom prst="ellipse">
             <a:avLst/>
@@ -6726,8 +6857,8 @@
         </p:nvSpPr>
         <p:spPr>
           <a:xfrm>
-            <a:off x="457200" y="2194560"/>
-            <a:ext cx="548640" cy="365760"/>
+            <a:off x="457200" y="2103120"/>
+            <a:ext cx="502920" cy="320040"/>
           </a:xfrm>
           <a:prstGeom prst="rect">
             <a:avLst/>
@@ -6743,7 +6874,7 @@
               <a:buNone/>
             </a:pPr>
             <a:r>
-              <a:rPr lang="en-US" sz="2000" b="1" dirty="0">
+              <a:rPr lang="en-US" sz="1800" b="1" dirty="0">
                 <a:solidFill>
                   <a:srgbClr val="FFFFFF"/>
                 </a:solidFill>
@@ -6753,7 +6884,7 @@
               </a:rPr>
               <a:t>2</a:t>
             </a:r>
-            <a:endParaRPr lang="en-US" sz="2000" dirty="0"/>
+            <a:endParaRPr lang="en-US" sz="1800" dirty="0"/>
           </a:p>
         </p:txBody>
       </p:sp>
@@ -6765,24 +6896,24 @@
         </p:nvSpPr>
         <p:spPr>
           <a:xfrm>
-            <a:off x="1188720" y="2103120"/>
-            <a:ext cx="2743200" cy="365760"/>
-          </a:xfrm>
-          <a:prstGeom prst="rect">
-            <a:avLst/>
-          </a:prstGeom>
-          <a:noFill/>
-          <a:ln/>
-        </p:spPr>
-        <p:txBody>
-          <a:bodyPr wrap="square" rtlCol="0" anchor="ctr"/>
-          <a:lstStyle/>
-          <a:p>
-            <a:pPr indent="0" marL="0">
-              <a:buNone/>
-            </a:pPr>
-            <a:r>
-              <a:rPr lang="en-US" sz="1800" b="1" dirty="0">
+            <a:off x="1097280" y="2011680"/>
+            <a:ext cx="2743200" cy="320040"/>
+          </a:xfrm>
+          <a:prstGeom prst="rect">
+            <a:avLst/>
+          </a:prstGeom>
+          <a:noFill/>
+          <a:ln/>
+        </p:spPr>
+        <p:txBody>
+          <a:bodyPr wrap="square" rtlCol="0" anchor="ctr"/>
+          <a:lstStyle/>
+          <a:p>
+            <a:pPr indent="0" marL="0">
+              <a:buNone/>
+            </a:pPr>
+            <a:r>
+              <a:rPr lang="en-US" sz="1600" b="1" dirty="0">
                 <a:solidFill>
                   <a:srgbClr val="1E3A5F"/>
                 </a:solidFill>
@@ -6792,7 +6923,7 @@
               </a:rPr>
               <a:t>盘需求</a:t>
             </a:r>
-            <a:endParaRPr lang="en-US" sz="1800" dirty="0"/>
+            <a:endParaRPr lang="en-US" sz="1600" dirty="0"/>
           </a:p>
         </p:txBody>
       </p:sp>
@@ -6804,24 +6935,24 @@
         </p:nvSpPr>
         <p:spPr>
           <a:xfrm>
-            <a:off x="1188720" y="2468880"/>
-            <a:ext cx="7315200" cy="365760"/>
-          </a:xfrm>
-          <a:prstGeom prst="rect">
-            <a:avLst/>
-          </a:prstGeom>
-          <a:noFill/>
-          <a:ln/>
-        </p:spPr>
-        <p:txBody>
-          <a:bodyPr wrap="square" rtlCol="0" anchor="ctr"/>
-          <a:lstStyle/>
-          <a:p>
-            <a:pPr indent="0" marL="0">
-              <a:buNone/>
-            </a:pPr>
-            <a:r>
-              <a:rPr lang="en-US" sz="1400" dirty="0">
+            <a:off x="1097280" y="2377440"/>
+            <a:ext cx="7315200" cy="320040"/>
+          </a:xfrm>
+          <a:prstGeom prst="rect">
+            <a:avLst/>
+          </a:prstGeom>
+          <a:noFill/>
+          <a:ln/>
+        </p:spPr>
+        <p:txBody>
+          <a:bodyPr wrap="square" rtlCol="0" anchor="ctr"/>
+          <a:lstStyle/>
+          <a:p>
+            <a:pPr indent="0" marL="0">
+              <a:buNone/>
+            </a:pPr>
+            <a:r>
+              <a:rPr lang="en-US" sz="1300" dirty="0">
                 <a:solidFill>
                   <a:srgbClr val="6B7280"/>
                 </a:solidFill>
@@ -6831,7 +6962,7 @@
               </a:rPr>
               <a:t>知道自己要什么</a:t>
             </a:r>
-            <a:endParaRPr lang="en-US" sz="1400" dirty="0"/>
+            <a:endParaRPr lang="en-US" sz="1300" dirty="0"/>
           </a:p>
         </p:txBody>
       </p:sp>
@@ -6843,8 +6974,8 @@
         </p:nvSpPr>
         <p:spPr>
           <a:xfrm>
-            <a:off x="457200" y="3017520"/>
-            <a:ext cx="548640" cy="548640"/>
+            <a:off x="457200" y="2834640"/>
+            <a:ext cx="502920" cy="502920"/>
           </a:xfrm>
           <a:prstGeom prst="ellipse">
             <a:avLst/>
@@ -6863,8 +6994,8 @@
         </p:nvSpPr>
         <p:spPr>
           <a:xfrm>
-            <a:off x="457200" y="3108960"/>
-            <a:ext cx="548640" cy="365760"/>
+            <a:off x="457200" y="2926080"/>
+            <a:ext cx="502920" cy="320040"/>
           </a:xfrm>
           <a:prstGeom prst="rect">
             <a:avLst/>
@@ -6880,7 +7011,7 @@
               <a:buNone/>
             </a:pPr>
             <a:r>
-              <a:rPr lang="en-US" sz="2000" b="1" dirty="0">
+              <a:rPr lang="en-US" sz="1800" b="1" dirty="0">
                 <a:solidFill>
                   <a:srgbClr val="FFFFFF"/>
                 </a:solidFill>
@@ -6890,7 +7021,7 @@
               </a:rPr>
               <a:t>3</a:t>
             </a:r>
-            <a:endParaRPr lang="en-US" sz="2000" dirty="0"/>
+            <a:endParaRPr lang="en-US" sz="1800" dirty="0"/>
           </a:p>
         </p:txBody>
       </p:sp>
@@ -6902,24 +7033,24 @@
         </p:nvSpPr>
         <p:spPr>
           <a:xfrm>
-            <a:off x="1188720" y="3017520"/>
-            <a:ext cx="2743200" cy="365760"/>
-          </a:xfrm>
-          <a:prstGeom prst="rect">
-            <a:avLst/>
-          </a:prstGeom>
-          <a:noFill/>
-          <a:ln/>
-        </p:spPr>
-        <p:txBody>
-          <a:bodyPr wrap="square" rtlCol="0" anchor="ctr"/>
-          <a:lstStyle/>
-          <a:p>
-            <a:pPr indent="0" marL="0">
-              <a:buNone/>
-            </a:pPr>
-            <a:r>
-              <a:rPr lang="en-US" sz="1800" b="1" dirty="0">
+            <a:off x="1097280" y="2834640"/>
+            <a:ext cx="2743200" cy="320040"/>
+          </a:xfrm>
+          <a:prstGeom prst="rect">
+            <a:avLst/>
+          </a:prstGeom>
+          <a:noFill/>
+          <a:ln/>
+        </p:spPr>
+        <p:txBody>
+          <a:bodyPr wrap="square" rtlCol="0" anchor="ctr"/>
+          <a:lstStyle/>
+          <a:p>
+            <a:pPr indent="0" marL="0">
+              <a:buNone/>
+            </a:pPr>
+            <a:r>
+              <a:rPr lang="en-US" sz="1600" b="1" dirty="0">
                 <a:solidFill>
                   <a:srgbClr val="1E3A5F"/>
                 </a:solidFill>
@@ -6929,7 +7060,7 @@
               </a:rPr>
               <a:t>每天一个Skill</a:t>
             </a:r>
-            <a:endParaRPr lang="en-US" sz="1800" dirty="0"/>
+            <a:endParaRPr lang="en-US" sz="1600" dirty="0"/>
           </a:p>
         </p:txBody>
       </p:sp>
@@ -6941,24 +7072,24 @@
         </p:nvSpPr>
         <p:spPr>
           <a:xfrm>
-            <a:off x="1188720" y="3383280"/>
-            <a:ext cx="7315200" cy="365760"/>
-          </a:xfrm>
-          <a:prstGeom prst="rect">
-            <a:avLst/>
-          </a:prstGeom>
-          <a:noFill/>
-          <a:ln/>
-        </p:spPr>
-        <p:txBody>
-          <a:bodyPr wrap="square" rtlCol="0" anchor="ctr"/>
-          <a:lstStyle/>
-          <a:p>
-            <a:pPr indent="0" marL="0">
-              <a:buNone/>
-            </a:pPr>
-            <a:r>
-              <a:rPr lang="en-US" sz="1400" dirty="0">
+            <a:off x="1097280" y="3200400"/>
+            <a:ext cx="7315200" cy="320040"/>
+          </a:xfrm>
+          <a:prstGeom prst="rect">
+            <a:avLst/>
+          </a:prstGeom>
+          <a:noFill/>
+          <a:ln/>
+        </p:spPr>
+        <p:txBody>
+          <a:bodyPr wrap="square" rtlCol="0" anchor="ctr"/>
+          <a:lstStyle/>
+          <a:p>
+            <a:pPr indent="0" marL="0">
+              <a:buNone/>
+            </a:pPr>
+            <a:r>
+              <a:rPr lang="en-US" sz="1300" dirty="0">
                 <a:solidFill>
                   <a:srgbClr val="6B7280"/>
                 </a:solidFill>
@@ -6966,9 +7097,9 @@
                 <a:ea typeface="Microsoft YaHei" pitchFamily="34" charset="-122"/>
                 <a:cs typeface="Microsoft YaHei" pitchFamily="34" charset="-120"/>
               </a:rPr>
-              <a:t>从需求里挑一个跑通</a:t>
-            </a:r>
-            <a:endParaRPr lang="en-US" sz="1400" dirty="0"/>
+              <a:t>从需求挑一个跑通</a:t>
+            </a:r>
+            <a:endParaRPr lang="en-US" sz="1300" dirty="0"/>
           </a:p>
         </p:txBody>
       </p:sp>
@@ -6980,8 +7111,8 @@
         </p:nvSpPr>
         <p:spPr>
           <a:xfrm>
-            <a:off x="457200" y="3931920"/>
-            <a:ext cx="548640" cy="548640"/>
+            <a:off x="457200" y="3657600"/>
+            <a:ext cx="502920" cy="502920"/>
           </a:xfrm>
           <a:prstGeom prst="ellipse">
             <a:avLst/>
@@ -7000,8 +7131,8 @@
         </p:nvSpPr>
         <p:spPr>
           <a:xfrm>
-            <a:off x="457200" y="4023360"/>
-            <a:ext cx="548640" cy="365760"/>
+            <a:off x="457200" y="3749040"/>
+            <a:ext cx="502920" cy="320040"/>
           </a:xfrm>
           <a:prstGeom prst="rect">
             <a:avLst/>
@@ -7017,7 +7148,7 @@
               <a:buNone/>
             </a:pPr>
             <a:r>
-              <a:rPr lang="en-US" sz="2000" b="1" dirty="0">
+              <a:rPr lang="en-US" sz="1800" b="1" dirty="0">
                 <a:solidFill>
                   <a:srgbClr val="FFFFFF"/>
                 </a:solidFill>
@@ -7027,7 +7158,7 @@
               </a:rPr>
               <a:t>4</a:t>
             </a:r>
-            <a:endParaRPr lang="en-US" sz="2000" dirty="0"/>
+            <a:endParaRPr lang="en-US" sz="1800" dirty="0"/>
           </a:p>
         </p:txBody>
       </p:sp>
@@ -7039,24 +7170,24 @@
         </p:nvSpPr>
         <p:spPr>
           <a:xfrm>
-            <a:off x="1188720" y="3931920"/>
-            <a:ext cx="2743200" cy="365760"/>
-          </a:xfrm>
-          <a:prstGeom prst="rect">
-            <a:avLst/>
-          </a:prstGeom>
-          <a:noFill/>
-          <a:ln/>
-        </p:spPr>
-        <p:txBody>
-          <a:bodyPr wrap="square" rtlCol="0" anchor="ctr"/>
-          <a:lstStyle/>
-          <a:p>
-            <a:pPr indent="0" marL="0">
-              <a:buNone/>
-            </a:pPr>
-            <a:r>
-              <a:rPr lang="en-US" sz="1800" b="1" dirty="0">
+            <a:off x="1097280" y="3657600"/>
+            <a:ext cx="2743200" cy="320040"/>
+          </a:xfrm>
+          <a:prstGeom prst="rect">
+            <a:avLst/>
+          </a:prstGeom>
+          <a:noFill/>
+          <a:ln/>
+        </p:spPr>
+        <p:txBody>
+          <a:bodyPr wrap="square" rtlCol="0" anchor="ctr"/>
+          <a:lstStyle/>
+          <a:p>
+            <a:pPr indent="0" marL="0">
+              <a:buNone/>
+            </a:pPr>
+            <a:r>
+              <a:rPr lang="en-US" sz="1600" b="1" dirty="0">
                 <a:solidFill>
                   <a:srgbClr val="1E3A5F"/>
                 </a:solidFill>
@@ -7066,7 +7197,7 @@
               </a:rPr>
               <a:t>一人公司</a:t>
             </a:r>
-            <a:endParaRPr lang="en-US" sz="1800" dirty="0"/>
+            <a:endParaRPr lang="en-US" sz="1600" dirty="0"/>
           </a:p>
         </p:txBody>
       </p:sp>
@@ -7078,24 +7209,24 @@
         </p:nvSpPr>
         <p:spPr>
           <a:xfrm>
-            <a:off x="1188720" y="4297680"/>
-            <a:ext cx="7315200" cy="365760"/>
-          </a:xfrm>
-          <a:prstGeom prst="rect">
-            <a:avLst/>
-          </a:prstGeom>
-          <a:noFill/>
-          <a:ln/>
-        </p:spPr>
-        <p:txBody>
-          <a:bodyPr wrap="square" rtlCol="0" anchor="ctr"/>
-          <a:lstStyle/>
-          <a:p>
-            <a:pPr indent="0" marL="0">
-              <a:buNone/>
-            </a:pPr>
-            <a:r>
-              <a:rPr lang="en-US" sz="1400" dirty="0">
+            <a:off x="1097280" y="4023360"/>
+            <a:ext cx="7315200" cy="320040"/>
+          </a:xfrm>
+          <a:prstGeom prst="rect">
+            <a:avLst/>
+          </a:prstGeom>
+          <a:noFill/>
+          <a:ln/>
+        </p:spPr>
+        <p:txBody>
+          <a:bodyPr wrap="square" rtlCol="0" anchor="ctr"/>
+          <a:lstStyle/>
+          <a:p>
+            <a:pPr indent="0" marL="0">
+              <a:buNone/>
+            </a:pPr>
+            <a:r>
+              <a:rPr lang="en-US" sz="1300" dirty="0">
                 <a:solidFill>
                   <a:srgbClr val="6B7280"/>
                 </a:solidFill>
@@ -7103,9 +7234,9 @@
                 <a:ea typeface="Microsoft YaHei" pitchFamily="34" charset="-122"/>
                 <a:cs typeface="Microsoft YaHei" pitchFamily="34" charset="-120"/>
               </a:rPr>
-              <a:t>多Agent模式，超级个体</a:t>
-            </a:r>
-            <a:endParaRPr lang="en-US" sz="1400" dirty="0"/>
+              <a:t>多Agent，超级个体</a:t>
+            </a:r>
+            <a:endParaRPr lang="en-US" sz="1300" dirty="0"/>
           </a:p>
         </p:txBody>
       </p:sp>
@@ -7117,8 +7248,8 @@
         </p:nvSpPr>
         <p:spPr>
           <a:xfrm>
-            <a:off x="4572000" y="3200400"/>
-            <a:ext cx="4114800" cy="1371600"/>
+            <a:off x="4572000" y="2926080"/>
+            <a:ext cx="4114800" cy="1645920"/>
           </a:xfrm>
           <a:prstGeom prst="roundRect">
             <a:avLst/>
@@ -7137,7 +7268,7 @@
         </p:nvSpPr>
         <p:spPr>
           <a:xfrm>
-            <a:off x="4754880" y="3383280"/>
+            <a:off x="4754880" y="3108960"/>
             <a:ext cx="3749040" cy="457200"/>
           </a:xfrm>
           <a:prstGeom prst="rect">
@@ -7154,7 +7285,7 @@
               <a:buNone/>
             </a:pPr>
             <a:r>
-              <a:rPr lang="en-US" sz="1600" b="1" dirty="0">
+              <a:rPr lang="en-US" sz="1500" b="1" dirty="0">
                 <a:solidFill>
                   <a:srgbClr val="1E3A5F"/>
                 </a:solidFill>
@@ -7164,7 +7295,7 @@
               </a:rPr>
               <a:t>🦞 养一只龙虾</a:t>
             </a:r>
-            <a:endParaRPr lang="en-US" sz="1600" dirty="0"/>
+            <a:endParaRPr lang="en-US" sz="1500" dirty="0"/>
           </a:p>
         </p:txBody>
       </p:sp>
@@ -7176,8 +7307,8 @@
         </p:nvSpPr>
         <p:spPr>
           <a:xfrm>
-            <a:off x="4754880" y="3840480"/>
-            <a:ext cx="3749040" cy="640080"/>
+            <a:off x="4754880" y="3566160"/>
+            <a:ext cx="3749040" cy="822960"/>
           </a:xfrm>
           <a:prstGeom prst="rect">
             <a:avLst/>
@@ -7201,7 +7332,7 @@
                 <a:ea typeface="Microsoft YaHei" pitchFamily="34" charset="-122"/>
                 <a:cs typeface="Microsoft YaHei" pitchFamily="34" charset="-120"/>
               </a:rPr>
-              <a:t>把它养成超级个体</a:t>
+              <a:t>变成超级个体</a:t>
             </a:r>
             <a:endParaRPr lang="en-US" sz="1300" dirty="0"/>
           </a:p>
@@ -7218,7 +7349,7 @@
                 <a:ea typeface="Microsoft YaHei" pitchFamily="34" charset="-122"/>
                 <a:cs typeface="Microsoft YaHei" pitchFamily="34" charset="-120"/>
               </a:rPr>
-              <a:t>最终变成一人公司</a:t>
+              <a:t>最终成为一人公司</a:t>
             </a:r>
             <a:endParaRPr lang="en-US" sz="1300" dirty="0"/>
           </a:p>
